--- a/TCP_PQC_HW_Gateway_Simple.pptx
+++ b/TCP_PQC_HW_Gateway_Simple.pptx
@@ -5,23 +5,19 @@
     <p:sldMasterId id="2147483648" r:id="rId1"/>
   </p:sldMasterIdLst>
   <p:sldIdLst>
-    <p:sldId id="256" r:id="rId7"/>
-    <p:sldId id="257" r:id="rId8"/>
-    <p:sldId id="258" r:id="rId9"/>
-    <p:sldId id="259" r:id="rId10"/>
-    <p:sldId id="260" r:id="rId11"/>
-    <p:sldId id="261" r:id="rId12"/>
-    <p:sldId id="262" r:id="rId13"/>
-    <p:sldId id="263" r:id="rId14"/>
-    <p:sldId id="264" r:id="rId15"/>
-    <p:sldId id="265" r:id="rId16"/>
-    <p:sldId id="266" r:id="rId17"/>
-    <p:sldId id="267" r:id="rId18"/>
-    <p:sldId id="268" r:id="rId19"/>
-    <p:sldId id="269" r:id="rId20"/>
-    <p:sldId id="270" r:id="rId21"/>
+    <p:sldId id="256" r:id="rId2"/>
+    <p:sldId id="257" r:id="rId3"/>
+    <p:sldId id="258" r:id="rId4"/>
+    <p:sldId id="259" r:id="rId5"/>
+    <p:sldId id="260" r:id="rId6"/>
+    <p:sldId id="261" r:id="rId7"/>
+    <p:sldId id="262" r:id="rId8"/>
+    <p:sldId id="263" r:id="rId9"/>
+    <p:sldId id="264" r:id="rId10"/>
+    <p:sldId id="265" r:id="rId11"/>
+    <p:sldId id="268" r:id="rId12"/>
   </p:sldIdLst>
-  <p:sldSz cx="12188952" cy="6858000" type="screen4x3"/>
+  <p:sldSz cx="12188825" cy="6858000"/>
   <p:notesSz cx="6858000" cy="9144000"/>
   <p:defaultTextStyle>
     <a:defPPr>
@@ -118,6 +114,22 @@
       </a:defRPr>
     </a:lvl9pPr>
   </p:defaultTextStyle>
+  <p:extLst>
+    <p:ext uri="{EFAFB233-063F-42B5-8137-9DF3F51BA10A}">
+      <p15:sldGuideLst xmlns:p15="http://schemas.microsoft.com/office/powerpoint/2012/main">
+        <p15:guide id="1" orient="horz" pos="2160">
+          <p15:clr>
+            <a:srgbClr val="A4A3A4"/>
+          </p15:clr>
+        </p15:guide>
+        <p15:guide id="2" pos="2880">
+          <p15:clr>
+            <a:srgbClr val="A4A3A4"/>
+          </p15:clr>
+        </p15:guide>
+      </p15:sldGuideLst>
+    </p:ext>
+  </p:extLst>
 </p:presentation>
 </file>
 
@@ -159,10 +171,9 @@
           <a:lstStyle/>
           <a:p>
             <a:r>
-              <a:rPr lang="en-US" smtClean="0"/>
+              <a:rPr lang="en-US"/>
               <a:t>Click to edit Master title style</a:t>
             </a:r>
-            <a:endParaRPr lang="en-US"/>
           </a:p>
         </p:txBody>
       </p:sp>
@@ -278,10 +289,9 @@
           </a:lstStyle>
           <a:p>
             <a:r>
-              <a:rPr lang="en-US" smtClean="0"/>
+              <a:rPr lang="en-US"/>
               <a:t>Click to edit Master subtitle style</a:t>
             </a:r>
-            <a:endParaRPr lang="en-US"/>
           </a:p>
         </p:txBody>
       </p:sp>
@@ -302,7 +312,7 @@
           <a:p>
             <a:fld id="{5BCAD085-E8A6-8845-BD4E-CB4CCA059FC4}" type="datetimeFigureOut">
               <a:rPr lang="en-US" smtClean="0"/>
-              <a:t>1/27/13</a:t>
+              <a:t>7/1/2026</a:t>
             </a:fld>
             <a:endParaRPr lang="en-US"/>
           </a:p>
@@ -396,10 +406,9 @@
           <a:lstStyle/>
           <a:p>
             <a:r>
-              <a:rPr lang="en-US" smtClean="0"/>
+              <a:rPr lang="en-US"/>
               <a:t>Click to edit Master title style</a:t>
             </a:r>
-            <a:endParaRPr lang="en-US"/>
           </a:p>
         </p:txBody>
       </p:sp>
@@ -420,38 +429,37 @@
           <a:p>
             <a:pPr lvl="0"/>
             <a:r>
-              <a:rPr lang="en-US" smtClean="0"/>
+              <a:rPr lang="en-US"/>
               <a:t>Click to edit Master text styles</a:t>
             </a:r>
           </a:p>
           <a:p>
             <a:pPr lvl="1"/>
             <a:r>
-              <a:rPr lang="en-US" smtClean="0"/>
+              <a:rPr lang="en-US"/>
               <a:t>Second level</a:t>
             </a:r>
           </a:p>
           <a:p>
             <a:pPr lvl="2"/>
             <a:r>
-              <a:rPr lang="en-US" smtClean="0"/>
+              <a:rPr lang="en-US"/>
               <a:t>Third level</a:t>
             </a:r>
           </a:p>
           <a:p>
             <a:pPr lvl="3"/>
             <a:r>
-              <a:rPr lang="en-US" smtClean="0"/>
+              <a:rPr lang="en-US"/>
               <a:t>Fourth level</a:t>
             </a:r>
           </a:p>
           <a:p>
             <a:pPr lvl="4"/>
             <a:r>
-              <a:rPr lang="en-US" smtClean="0"/>
+              <a:rPr lang="en-US"/>
               <a:t>Fifth level</a:t>
             </a:r>
-            <a:endParaRPr lang="en-US"/>
           </a:p>
         </p:txBody>
       </p:sp>
@@ -472,7 +480,7 @@
           <a:p>
             <a:fld id="{5BCAD085-E8A6-8845-BD4E-CB4CCA059FC4}" type="datetimeFigureOut">
               <a:rPr lang="en-US" smtClean="0"/>
-              <a:t>1/27/13</a:t>
+              <a:t>7/1/2026</a:t>
             </a:fld>
             <a:endParaRPr lang="en-US"/>
           </a:p>
@@ -571,10 +579,9 @@
           <a:lstStyle/>
           <a:p>
             <a:r>
-              <a:rPr lang="en-US" smtClean="0"/>
+              <a:rPr lang="en-US"/>
               <a:t>Click to edit Master title style</a:t>
             </a:r>
-            <a:endParaRPr lang="en-US"/>
           </a:p>
         </p:txBody>
       </p:sp>
@@ -600,38 +607,37 @@
           <a:p>
             <a:pPr lvl="0"/>
             <a:r>
-              <a:rPr lang="en-US" smtClean="0"/>
+              <a:rPr lang="en-US"/>
               <a:t>Click to edit Master text styles</a:t>
             </a:r>
           </a:p>
           <a:p>
             <a:pPr lvl="1"/>
             <a:r>
-              <a:rPr lang="en-US" smtClean="0"/>
+              <a:rPr lang="en-US"/>
               <a:t>Second level</a:t>
             </a:r>
           </a:p>
           <a:p>
             <a:pPr lvl="2"/>
             <a:r>
-              <a:rPr lang="en-US" smtClean="0"/>
+              <a:rPr lang="en-US"/>
               <a:t>Third level</a:t>
             </a:r>
           </a:p>
           <a:p>
             <a:pPr lvl="3"/>
             <a:r>
-              <a:rPr lang="en-US" smtClean="0"/>
+              <a:rPr lang="en-US"/>
               <a:t>Fourth level</a:t>
             </a:r>
           </a:p>
           <a:p>
             <a:pPr lvl="4"/>
             <a:r>
-              <a:rPr lang="en-US" smtClean="0"/>
+              <a:rPr lang="en-US"/>
               <a:t>Fifth level</a:t>
             </a:r>
-            <a:endParaRPr lang="en-US"/>
           </a:p>
         </p:txBody>
       </p:sp>
@@ -652,7 +658,7 @@
           <a:p>
             <a:fld id="{5BCAD085-E8A6-8845-BD4E-CB4CCA059FC4}" type="datetimeFigureOut">
               <a:rPr lang="en-US" smtClean="0"/>
-              <a:t>1/27/13</a:t>
+              <a:t>7/1/2026</a:t>
             </a:fld>
             <a:endParaRPr lang="en-US"/>
           </a:p>
@@ -746,10 +752,9 @@
           <a:lstStyle/>
           <a:p>
             <a:r>
-              <a:rPr lang="en-US" smtClean="0"/>
+              <a:rPr lang="en-US"/>
               <a:t>Click to edit Master title style</a:t>
             </a:r>
-            <a:endParaRPr lang="en-US"/>
           </a:p>
         </p:txBody>
       </p:sp>
@@ -770,38 +775,37 @@
           <a:p>
             <a:pPr lvl="0"/>
             <a:r>
-              <a:rPr lang="en-US" smtClean="0"/>
+              <a:rPr lang="en-US"/>
               <a:t>Click to edit Master text styles</a:t>
             </a:r>
           </a:p>
           <a:p>
             <a:pPr lvl="1"/>
             <a:r>
-              <a:rPr lang="en-US" smtClean="0"/>
+              <a:rPr lang="en-US"/>
               <a:t>Second level</a:t>
             </a:r>
           </a:p>
           <a:p>
             <a:pPr lvl="2"/>
             <a:r>
-              <a:rPr lang="en-US" smtClean="0"/>
+              <a:rPr lang="en-US"/>
               <a:t>Third level</a:t>
             </a:r>
           </a:p>
           <a:p>
             <a:pPr lvl="3"/>
             <a:r>
-              <a:rPr lang="en-US" smtClean="0"/>
+              <a:rPr lang="en-US"/>
               <a:t>Fourth level</a:t>
             </a:r>
           </a:p>
           <a:p>
             <a:pPr lvl="4"/>
             <a:r>
-              <a:rPr lang="en-US" smtClean="0"/>
+              <a:rPr lang="en-US"/>
               <a:t>Fifth level</a:t>
             </a:r>
-            <a:endParaRPr lang="en-US"/>
           </a:p>
         </p:txBody>
       </p:sp>
@@ -822,7 +826,7 @@
           <a:p>
             <a:fld id="{5BCAD085-E8A6-8845-BD4E-CB4CCA059FC4}" type="datetimeFigureOut">
               <a:rPr lang="en-US" smtClean="0"/>
-              <a:t>1/27/13</a:t>
+              <a:t>7/1/2026</a:t>
             </a:fld>
             <a:endParaRPr lang="en-US"/>
           </a:p>
@@ -925,10 +929,9 @@
           </a:lstStyle>
           <a:p>
             <a:r>
-              <a:rPr lang="en-US" smtClean="0"/>
+              <a:rPr lang="en-US"/>
               <a:t>Click to edit Master title style</a:t>
             </a:r>
-            <a:endParaRPr lang="en-US"/>
           </a:p>
         </p:txBody>
       </p:sp>
@@ -1045,7 +1048,7 @@
           <a:p>
             <a:pPr lvl="0"/>
             <a:r>
-              <a:rPr lang="en-US" smtClean="0"/>
+              <a:rPr lang="en-US"/>
               <a:t>Click to edit Master text styles</a:t>
             </a:r>
           </a:p>
@@ -1068,7 +1071,7 @@
           <a:p>
             <a:fld id="{5BCAD085-E8A6-8845-BD4E-CB4CCA059FC4}" type="datetimeFigureOut">
               <a:rPr lang="en-US" smtClean="0"/>
-              <a:t>1/27/13</a:t>
+              <a:t>7/1/2026</a:t>
             </a:fld>
             <a:endParaRPr lang="en-US"/>
           </a:p>
@@ -1162,10 +1165,9 @@
           <a:lstStyle/>
           <a:p>
             <a:r>
-              <a:rPr lang="en-US" smtClean="0"/>
+              <a:rPr lang="en-US"/>
               <a:t>Click to edit Master title style</a:t>
             </a:r>
-            <a:endParaRPr lang="en-US"/>
           </a:p>
         </p:txBody>
       </p:sp>
@@ -1219,38 +1221,37 @@
           <a:p>
             <a:pPr lvl="0"/>
             <a:r>
-              <a:rPr lang="en-US" smtClean="0"/>
+              <a:rPr lang="en-US"/>
               <a:t>Click to edit Master text styles</a:t>
             </a:r>
           </a:p>
           <a:p>
             <a:pPr lvl="1"/>
             <a:r>
-              <a:rPr lang="en-US" smtClean="0"/>
+              <a:rPr lang="en-US"/>
               <a:t>Second level</a:t>
             </a:r>
           </a:p>
           <a:p>
             <a:pPr lvl="2"/>
             <a:r>
-              <a:rPr lang="en-US" smtClean="0"/>
+              <a:rPr lang="en-US"/>
               <a:t>Third level</a:t>
             </a:r>
           </a:p>
           <a:p>
             <a:pPr lvl="3"/>
             <a:r>
-              <a:rPr lang="en-US" smtClean="0"/>
+              <a:rPr lang="en-US"/>
               <a:t>Fourth level</a:t>
             </a:r>
           </a:p>
           <a:p>
             <a:pPr lvl="4"/>
             <a:r>
-              <a:rPr lang="en-US" smtClean="0"/>
+              <a:rPr lang="en-US"/>
               <a:t>Fifth level</a:t>
             </a:r>
-            <a:endParaRPr lang="en-US"/>
           </a:p>
         </p:txBody>
       </p:sp>
@@ -1304,38 +1305,37 @@
           <a:p>
             <a:pPr lvl="0"/>
             <a:r>
-              <a:rPr lang="en-US" smtClean="0"/>
+              <a:rPr lang="en-US"/>
               <a:t>Click to edit Master text styles</a:t>
             </a:r>
           </a:p>
           <a:p>
             <a:pPr lvl="1"/>
             <a:r>
-              <a:rPr lang="en-US" smtClean="0"/>
+              <a:rPr lang="en-US"/>
               <a:t>Second level</a:t>
             </a:r>
           </a:p>
           <a:p>
             <a:pPr lvl="2"/>
             <a:r>
-              <a:rPr lang="en-US" smtClean="0"/>
+              <a:rPr lang="en-US"/>
               <a:t>Third level</a:t>
             </a:r>
           </a:p>
           <a:p>
             <a:pPr lvl="3"/>
             <a:r>
-              <a:rPr lang="en-US" smtClean="0"/>
+              <a:rPr lang="en-US"/>
               <a:t>Fourth level</a:t>
             </a:r>
           </a:p>
           <a:p>
             <a:pPr lvl="4"/>
             <a:r>
-              <a:rPr lang="en-US" smtClean="0"/>
+              <a:rPr lang="en-US"/>
               <a:t>Fifth level</a:t>
             </a:r>
-            <a:endParaRPr lang="en-US"/>
           </a:p>
         </p:txBody>
       </p:sp>
@@ -1356,7 +1356,7 @@
           <a:p>
             <a:fld id="{5BCAD085-E8A6-8845-BD4E-CB4CCA059FC4}" type="datetimeFigureOut">
               <a:rPr lang="en-US" smtClean="0"/>
-              <a:t>1/27/13</a:t>
+              <a:t>7/1/2026</a:t>
             </a:fld>
             <a:endParaRPr lang="en-US"/>
           </a:p>
@@ -1454,10 +1454,9 @@
           </a:lstStyle>
           <a:p>
             <a:r>
-              <a:rPr lang="en-US" smtClean="0"/>
+              <a:rPr lang="en-US"/>
               <a:t>Click to edit Master title style</a:t>
             </a:r>
-            <a:endParaRPr lang="en-US"/>
           </a:p>
         </p:txBody>
       </p:sp>
@@ -1520,7 +1519,7 @@
           <a:p>
             <a:pPr lvl="0"/>
             <a:r>
-              <a:rPr lang="en-US" smtClean="0"/>
+              <a:rPr lang="en-US"/>
               <a:t>Click to edit Master text styles</a:t>
             </a:r>
           </a:p>
@@ -1576,38 +1575,37 @@
           <a:p>
             <a:pPr lvl="0"/>
             <a:r>
-              <a:rPr lang="en-US" smtClean="0"/>
+              <a:rPr lang="en-US"/>
               <a:t>Click to edit Master text styles</a:t>
             </a:r>
           </a:p>
           <a:p>
             <a:pPr lvl="1"/>
             <a:r>
-              <a:rPr lang="en-US" smtClean="0"/>
+              <a:rPr lang="en-US"/>
               <a:t>Second level</a:t>
             </a:r>
           </a:p>
           <a:p>
             <a:pPr lvl="2"/>
             <a:r>
-              <a:rPr lang="en-US" smtClean="0"/>
+              <a:rPr lang="en-US"/>
               <a:t>Third level</a:t>
             </a:r>
           </a:p>
           <a:p>
             <a:pPr lvl="3"/>
             <a:r>
-              <a:rPr lang="en-US" smtClean="0"/>
+              <a:rPr lang="en-US"/>
               <a:t>Fourth level</a:t>
             </a:r>
           </a:p>
           <a:p>
             <a:pPr lvl="4"/>
             <a:r>
-              <a:rPr lang="en-US" smtClean="0"/>
+              <a:rPr lang="en-US"/>
               <a:t>Fifth level</a:t>
             </a:r>
-            <a:endParaRPr lang="en-US"/>
           </a:p>
         </p:txBody>
       </p:sp>
@@ -1670,7 +1668,7 @@
           <a:p>
             <a:pPr lvl="0"/>
             <a:r>
-              <a:rPr lang="en-US" smtClean="0"/>
+              <a:rPr lang="en-US"/>
               <a:t>Click to edit Master text styles</a:t>
             </a:r>
           </a:p>
@@ -1726,38 +1724,37 @@
           <a:p>
             <a:pPr lvl="0"/>
             <a:r>
-              <a:rPr lang="en-US" smtClean="0"/>
+              <a:rPr lang="en-US"/>
               <a:t>Click to edit Master text styles</a:t>
             </a:r>
           </a:p>
           <a:p>
             <a:pPr lvl="1"/>
             <a:r>
-              <a:rPr lang="en-US" smtClean="0"/>
+              <a:rPr lang="en-US"/>
               <a:t>Second level</a:t>
             </a:r>
           </a:p>
           <a:p>
             <a:pPr lvl="2"/>
             <a:r>
-              <a:rPr lang="en-US" smtClean="0"/>
+              <a:rPr lang="en-US"/>
               <a:t>Third level</a:t>
             </a:r>
           </a:p>
           <a:p>
             <a:pPr lvl="3"/>
             <a:r>
-              <a:rPr lang="en-US" smtClean="0"/>
+              <a:rPr lang="en-US"/>
               <a:t>Fourth level</a:t>
             </a:r>
           </a:p>
           <a:p>
             <a:pPr lvl="4"/>
             <a:r>
-              <a:rPr lang="en-US" smtClean="0"/>
+              <a:rPr lang="en-US"/>
               <a:t>Fifth level</a:t>
             </a:r>
-            <a:endParaRPr lang="en-US"/>
           </a:p>
         </p:txBody>
       </p:sp>
@@ -1778,7 +1775,7 @@
           <a:p>
             <a:fld id="{5BCAD085-E8A6-8845-BD4E-CB4CCA059FC4}" type="datetimeFigureOut">
               <a:rPr lang="en-US" smtClean="0"/>
-              <a:t>1/27/13</a:t>
+              <a:t>7/1/2026</a:t>
             </a:fld>
             <a:endParaRPr lang="en-US"/>
           </a:p>
@@ -1872,10 +1869,9 @@
           <a:lstStyle/>
           <a:p>
             <a:r>
-              <a:rPr lang="en-US" smtClean="0"/>
+              <a:rPr lang="en-US"/>
               <a:t>Click to edit Master title style</a:t>
             </a:r>
-            <a:endParaRPr lang="en-US"/>
           </a:p>
         </p:txBody>
       </p:sp>
@@ -1896,7 +1892,7 @@
           <a:p>
             <a:fld id="{5BCAD085-E8A6-8845-BD4E-CB4CCA059FC4}" type="datetimeFigureOut">
               <a:rPr lang="en-US" smtClean="0"/>
-              <a:t>1/27/13</a:t>
+              <a:t>7/1/2026</a:t>
             </a:fld>
             <a:endParaRPr lang="en-US"/>
           </a:p>
@@ -1991,7 +1987,7 @@
           <a:p>
             <a:fld id="{5BCAD085-E8A6-8845-BD4E-CB4CCA059FC4}" type="datetimeFigureOut">
               <a:rPr lang="en-US" smtClean="0"/>
-              <a:t>1/27/13</a:t>
+              <a:t>7/1/2026</a:t>
             </a:fld>
             <a:endParaRPr lang="en-US"/>
           </a:p>
@@ -2094,10 +2090,9 @@
           </a:lstStyle>
           <a:p>
             <a:r>
-              <a:rPr lang="en-US" smtClean="0"/>
+              <a:rPr lang="en-US"/>
               <a:t>Click to edit Master title style</a:t>
             </a:r>
-            <a:endParaRPr lang="en-US"/>
           </a:p>
         </p:txBody>
       </p:sp>
@@ -2151,38 +2146,37 @@
           <a:p>
             <a:pPr lvl="0"/>
             <a:r>
-              <a:rPr lang="en-US" smtClean="0"/>
+              <a:rPr lang="en-US"/>
               <a:t>Click to edit Master text styles</a:t>
             </a:r>
           </a:p>
           <a:p>
             <a:pPr lvl="1"/>
             <a:r>
-              <a:rPr lang="en-US" smtClean="0"/>
+              <a:rPr lang="en-US"/>
               <a:t>Second level</a:t>
             </a:r>
           </a:p>
           <a:p>
             <a:pPr lvl="2"/>
             <a:r>
-              <a:rPr lang="en-US" smtClean="0"/>
+              <a:rPr lang="en-US"/>
               <a:t>Third level</a:t>
             </a:r>
           </a:p>
           <a:p>
             <a:pPr lvl="3"/>
             <a:r>
-              <a:rPr lang="en-US" smtClean="0"/>
+              <a:rPr lang="en-US"/>
               <a:t>Fourth level</a:t>
             </a:r>
           </a:p>
           <a:p>
             <a:pPr lvl="4"/>
             <a:r>
-              <a:rPr lang="en-US" smtClean="0"/>
+              <a:rPr lang="en-US"/>
               <a:t>Fifth level</a:t>
             </a:r>
-            <a:endParaRPr lang="en-US"/>
           </a:p>
         </p:txBody>
       </p:sp>
@@ -2245,7 +2239,7 @@
           <a:p>
             <a:pPr lvl="0"/>
             <a:r>
-              <a:rPr lang="en-US" smtClean="0"/>
+              <a:rPr lang="en-US"/>
               <a:t>Click to edit Master text styles</a:t>
             </a:r>
           </a:p>
@@ -2268,7 +2262,7 @@
           <a:p>
             <a:fld id="{5BCAD085-E8A6-8845-BD4E-CB4CCA059FC4}" type="datetimeFigureOut">
               <a:rPr lang="en-US" smtClean="0"/>
-              <a:t>1/27/13</a:t>
+              <a:t>7/1/2026</a:t>
             </a:fld>
             <a:endParaRPr lang="en-US"/>
           </a:p>
@@ -2371,10 +2365,9 @@
           </a:lstStyle>
           <a:p>
             <a:r>
-              <a:rPr lang="en-US" smtClean="0"/>
+              <a:rPr lang="en-US"/>
               <a:t>Click to edit Master title style</a:t>
             </a:r>
-            <a:endParaRPr lang="en-US"/>
           </a:p>
         </p:txBody>
       </p:sp>
@@ -2498,7 +2491,7 @@
           <a:p>
             <a:pPr lvl="0"/>
             <a:r>
-              <a:rPr lang="en-US" smtClean="0"/>
+              <a:rPr lang="en-US"/>
               <a:t>Click to edit Master text styles</a:t>
             </a:r>
           </a:p>
@@ -2521,7 +2514,7 @@
           <a:p>
             <a:fld id="{5BCAD085-E8A6-8845-BD4E-CB4CCA059FC4}" type="datetimeFigureOut">
               <a:rPr lang="en-US" smtClean="0"/>
-              <a:t>1/27/13</a:t>
+              <a:t>7/1/2026</a:t>
             </a:fld>
             <a:endParaRPr lang="en-US"/>
           </a:p>
@@ -2630,10 +2623,9 @@
           <a:lstStyle/>
           <a:p>
             <a:r>
-              <a:rPr lang="en-US" smtClean="0"/>
+              <a:rPr lang="en-US"/>
               <a:t>Click to edit Master title style</a:t>
             </a:r>
-            <a:endParaRPr lang="en-US"/>
           </a:p>
         </p:txBody>
       </p:sp>
@@ -2664,38 +2656,37 @@
           <a:p>
             <a:pPr lvl="0"/>
             <a:r>
-              <a:rPr lang="en-US" smtClean="0"/>
+              <a:rPr lang="en-US"/>
               <a:t>Click to edit Master text styles</a:t>
             </a:r>
           </a:p>
           <a:p>
             <a:pPr lvl="1"/>
             <a:r>
-              <a:rPr lang="en-US" smtClean="0"/>
+              <a:rPr lang="en-US"/>
               <a:t>Second level</a:t>
             </a:r>
           </a:p>
           <a:p>
             <a:pPr lvl="2"/>
             <a:r>
-              <a:rPr lang="en-US" smtClean="0"/>
+              <a:rPr lang="en-US"/>
               <a:t>Third level</a:t>
             </a:r>
           </a:p>
           <a:p>
             <a:pPr lvl="3"/>
             <a:r>
-              <a:rPr lang="en-US" smtClean="0"/>
+              <a:rPr lang="en-US"/>
               <a:t>Fourth level</a:t>
             </a:r>
           </a:p>
           <a:p>
             <a:pPr lvl="4"/>
             <a:r>
-              <a:rPr lang="en-US" smtClean="0"/>
+              <a:rPr lang="en-US"/>
               <a:t>Fifth level</a:t>
             </a:r>
-            <a:endParaRPr lang="en-US"/>
           </a:p>
         </p:txBody>
       </p:sp>
@@ -2734,7 +2725,7 @@
           <a:p>
             <a:fld id="{5BCAD085-E8A6-8845-BD4E-CB4CCA059FC4}" type="datetimeFigureOut">
               <a:rPr lang="en-US" smtClean="0"/>
-              <a:t>1/27/13</a:t>
+              <a:t>7/1/2026</a:t>
             </a:fld>
             <a:endParaRPr lang="en-US"/>
           </a:p>
@@ -3093,7 +3084,7 @@
 </file>
 
 <file path=ppt/slides/slide1.xml><?xml version="1.0" encoding="utf-8"?>
-<p:sld xmlns:a="http://schemas.openxmlformats.org/drawingml/2006/main" xmlns:p="http://schemas.openxmlformats.org/presentationml/2006/main" xmlns:r="http://schemas.openxmlformats.org/officeDocument/2006/relationships">
+<p:sld xmlns:a="http://schemas.openxmlformats.org/drawingml/2006/main" xmlns:r="http://schemas.openxmlformats.org/officeDocument/2006/relationships" xmlns:p="http://schemas.openxmlformats.org/presentationml/2006/main">
   <p:cSld>
     <p:spTree>
       <p:nvGrpSpPr>
@@ -3101,7 +3092,14 @@
         <p:cNvGrpSpPr/>
         <p:nvPr/>
       </p:nvGrpSpPr>
-      <p:grpSpPr/>
+      <p:grpSpPr>
+        <a:xfrm>
+          <a:off x="0" y="0"/>
+          <a:ext cx="0" cy="0"/>
+          <a:chOff x="0" y="0"/>
+          <a:chExt cx="0" cy="0"/>
+        </a:xfrm>
+      </p:grpSpPr>
       <p:sp>
         <p:nvSpPr>
           <p:cNvPr id="2" name="Rectangle 1"/>
@@ -3142,6 +3140,7 @@
           <a:lstStyle/>
           <a:p>
             <a:pPr algn="ctr"/>
+            <a:endParaRPr/>
           </a:p>
         </p:txBody>
       </p:sp>
@@ -3185,6 +3184,7 @@
           <a:lstStyle/>
           <a:p>
             <a:pPr algn="ctr"/>
+            <a:endParaRPr/>
           </a:p>
         </p:txBody>
       </p:sp>
@@ -3228,6 +3228,7 @@
           <a:lstStyle/>
           <a:p>
             <a:pPr algn="ctr"/>
+            <a:endParaRPr/>
           </a:p>
         </p:txBody>
       </p:sp>
@@ -3339,6 +3340,7 @@
           <a:lstStyle/>
           <a:p>
             <a:pPr algn="ctr"/>
+            <a:endParaRPr/>
           </a:p>
         </p:txBody>
       </p:sp>
@@ -3453,7 +3455,7 @@
 </file>
 
 <file path=ppt/slides/slide10.xml><?xml version="1.0" encoding="utf-8"?>
-<p:sld xmlns:a="http://schemas.openxmlformats.org/drawingml/2006/main" xmlns:p="http://schemas.openxmlformats.org/presentationml/2006/main" xmlns:r="http://schemas.openxmlformats.org/officeDocument/2006/relationships">
+<p:sld xmlns:a="http://schemas.openxmlformats.org/drawingml/2006/main" xmlns:r="http://schemas.openxmlformats.org/officeDocument/2006/relationships" xmlns:p="http://schemas.openxmlformats.org/presentationml/2006/main">
   <p:cSld>
     <p:spTree>
       <p:nvGrpSpPr>
@@ -3461,7 +3463,14 @@
         <p:cNvGrpSpPr/>
         <p:nvPr/>
       </p:nvGrpSpPr>
-      <p:grpSpPr/>
+      <p:grpSpPr>
+        <a:xfrm>
+          <a:off x="0" y="0"/>
+          <a:ext cx="0" cy="0"/>
+          <a:chOff x="0" y="0"/>
+          <a:chExt cx="0" cy="0"/>
+        </a:xfrm>
+      </p:grpSpPr>
       <p:sp>
         <p:nvSpPr>
           <p:cNvPr id="2" name="Rectangle 1"/>
@@ -3502,6 +3511,7 @@
           <a:lstStyle/>
           <a:p>
             <a:pPr algn="ctr"/>
+            <a:endParaRPr/>
           </a:p>
         </p:txBody>
       </p:sp>
@@ -3545,6 +3555,7 @@
           <a:lstStyle/>
           <a:p>
             <a:pPr algn="ctr"/>
+            <a:endParaRPr/>
           </a:p>
         </p:txBody>
       </p:sp>
@@ -3588,6 +3599,7 @@
           <a:lstStyle/>
           <a:p>
             <a:pPr algn="ctr"/>
+            <a:endParaRPr/>
           </a:p>
         </p:txBody>
       </p:sp>
@@ -3699,6 +3711,7 @@
           <a:lstStyle/>
           <a:p>
             <a:pPr algn="ctr"/>
+            <a:endParaRPr/>
           </a:p>
         </p:txBody>
       </p:sp>
@@ -3744,6 +3757,7 @@
           <a:lstStyle/>
           <a:p>
             <a:pPr algn="ctr"/>
+            <a:endParaRPr/>
           </a:p>
         </p:txBody>
       </p:sp>
@@ -3787,6 +3801,7 @@
           <a:lstStyle/>
           <a:p>
             <a:pPr algn="ctr"/>
+            <a:endParaRPr/>
           </a:p>
         </p:txBody>
       </p:sp>
@@ -4002,6 +4017,7 @@
           <a:lstStyle/>
           <a:p>
             <a:pPr algn="ctr"/>
+            <a:endParaRPr/>
           </a:p>
         </p:txBody>
       </p:sp>
@@ -4045,6 +4061,7 @@
           <a:lstStyle/>
           <a:p>
             <a:pPr algn="ctr"/>
+            <a:endParaRPr/>
           </a:p>
         </p:txBody>
       </p:sp>
@@ -4260,6 +4277,7 @@
           <a:lstStyle/>
           <a:p>
             <a:pPr algn="ctr"/>
+            <a:endParaRPr/>
           </a:p>
         </p:txBody>
       </p:sp>
@@ -4303,6 +4321,7 @@
           <a:lstStyle/>
           <a:p>
             <a:pPr algn="ctr"/>
+            <a:endParaRPr/>
           </a:p>
         </p:txBody>
       </p:sp>
@@ -4518,6 +4537,7 @@
           <a:lstStyle/>
           <a:p>
             <a:pPr algn="ctr"/>
+            <a:endParaRPr/>
           </a:p>
         </p:txBody>
       </p:sp>
@@ -4564,7 +4584,7 @@
 </file>
 
 <file path=ppt/slides/slide11.xml><?xml version="1.0" encoding="utf-8"?>
-<p:sld xmlns:a="http://schemas.openxmlformats.org/drawingml/2006/main" xmlns:p="http://schemas.openxmlformats.org/presentationml/2006/main" xmlns:r="http://schemas.openxmlformats.org/officeDocument/2006/relationships">
+<p:sld xmlns:a="http://schemas.openxmlformats.org/drawingml/2006/main" xmlns:r="http://schemas.openxmlformats.org/officeDocument/2006/relationships" xmlns:p="http://schemas.openxmlformats.org/presentationml/2006/main">
   <p:cSld>
     <p:spTree>
       <p:nvGrpSpPr>
@@ -4572,7 +4592,14 @@
         <p:cNvGrpSpPr/>
         <p:nvPr/>
       </p:nvGrpSpPr>
-      <p:grpSpPr/>
+      <p:grpSpPr>
+        <a:xfrm>
+          <a:off x="0" y="0"/>
+          <a:ext cx="0" cy="0"/>
+          <a:chOff x="0" y="0"/>
+          <a:chExt cx="0" cy="0"/>
+        </a:xfrm>
+      </p:grpSpPr>
       <p:sp>
         <p:nvSpPr>
           <p:cNvPr id="2" name="Rectangle 1"/>
@@ -4613,6 +4640,7 @@
           <a:lstStyle/>
           <a:p>
             <a:pPr algn="ctr"/>
+            <a:endParaRPr/>
           </a:p>
         </p:txBody>
       </p:sp>
@@ -4656,6 +4684,7 @@
           <a:lstStyle/>
           <a:p>
             <a:pPr algn="ctr"/>
+            <a:endParaRPr/>
           </a:p>
         </p:txBody>
       </p:sp>
@@ -4699,6 +4728,7 @@
           <a:lstStyle/>
           <a:p>
             <a:pPr algn="ctr"/>
+            <a:endParaRPr/>
           </a:p>
         </p:txBody>
       </p:sp>
@@ -4731,7 +4761,7 @@
                   <a:srgbClr val="1E3A5F"/>
                 </a:solidFill>
               </a:rPr>
-              <a:t>구현 로드맵</a:t>
+              <a:t>보안 고려사항 및 위협 모델</a:t>
             </a:r>
           </a:p>
         </p:txBody>
@@ -4765,7 +4795,7 @@
                   <a:srgbClr val="888888"/>
                 </a:solidFill>
               </a:rPr>
-              <a:t>Phase별 개발 계획</a:t>
+              <a:t>Security Considerations</a:t>
             </a:r>
           </a:p>
         </p:txBody>
@@ -4810,6 +4840,7 @@
           <a:lstStyle/>
           <a:p>
             <a:pPr algn="ctr"/>
+            <a:endParaRPr/>
           </a:p>
         </p:txBody>
       </p:sp>
@@ -4822,7 +4853,7 @@
         <p:spPr>
           <a:xfrm>
             <a:off x="274320" y="1325880"/>
-            <a:ext cx="2743200" cy="4937760"/>
+            <a:ext cx="5669280" cy="4846320"/>
           </a:xfrm>
           <a:prstGeom prst="rect">
             <a:avLst/>
@@ -4855,232 +4886,428 @@
           <a:lstStyle/>
           <a:p>
             <a:pPr algn="ctr"/>
-          </a:p>
-        </p:txBody>
-      </p:sp>
-      <p:sp>
-        <p:nvSpPr>
-          <p:cNvPr id="9" name="Rectangle 8"/>
+            <a:endParaRPr/>
+          </a:p>
+        </p:txBody>
+      </p:sp>
+      <p:sp>
+        <p:nvSpPr>
+          <p:cNvPr id="9" name="TextBox 8"/>
+          <p:cNvSpPr txBox="1"/>
+          <p:nvPr/>
+        </p:nvSpPr>
+        <p:spPr>
+          <a:xfrm>
+            <a:off x="384048" y="1435607"/>
+            <a:ext cx="5440680" cy="365760"/>
+          </a:xfrm>
+          <a:prstGeom prst="rect">
+            <a:avLst/>
+          </a:prstGeom>
+          <a:noFill/>
+        </p:spPr>
+        <p:txBody>
+          <a:bodyPr wrap="square">
+            <a:spAutoFit/>
+          </a:bodyPr>
+          <a:lstStyle/>
+          <a:p>
+            <a:pPr algn="l"/>
+            <a:r>
+              <a:rPr sz="1300" b="1" i="0">
+                <a:solidFill>
+                  <a:srgbClr val="1E3A5F"/>
+                </a:solidFill>
+              </a:rPr>
+              <a:t>위협 및 대응</a:t>
+            </a:r>
+          </a:p>
+        </p:txBody>
+      </p:sp>
+      <p:sp>
+        <p:nvSpPr>
+          <p:cNvPr id="10" name="TextBox 9"/>
+          <p:cNvSpPr txBox="1"/>
+          <p:nvPr/>
+        </p:nvSpPr>
+        <p:spPr>
+          <a:xfrm>
+            <a:off x="347472" y="1837943"/>
+            <a:ext cx="5486400" cy="347472"/>
+          </a:xfrm>
+          <a:prstGeom prst="rect">
+            <a:avLst/>
+          </a:prstGeom>
+          <a:noFill/>
+        </p:spPr>
+        <p:txBody>
+          <a:bodyPr wrap="square">
+            <a:spAutoFit/>
+          </a:bodyPr>
+          <a:lstStyle/>
+          <a:p>
+            <a:pPr algn="l"/>
+            <a:r>
+              <a:rPr sz="1250" b="0" i="0">
+                <a:solidFill>
+                  <a:srgbClr val="1A1A1A"/>
+                </a:solidFill>
+              </a:rPr>
+              <a:t>  ▪ 통신 구간 도청 (Man-in-the-Middle)</a:t>
+            </a:r>
+          </a:p>
+        </p:txBody>
+      </p:sp>
+      <p:sp>
+        <p:nvSpPr>
+          <p:cNvPr id="11" name="TextBox 10"/>
+          <p:cNvSpPr txBox="1"/>
+          <p:nvPr/>
+        </p:nvSpPr>
+        <p:spPr>
+          <a:xfrm>
+            <a:off x="347472" y="2167127"/>
+            <a:ext cx="5486400" cy="347472"/>
+          </a:xfrm>
+          <a:prstGeom prst="rect">
+            <a:avLst/>
+          </a:prstGeom>
+          <a:noFill/>
+        </p:spPr>
+        <p:txBody>
+          <a:bodyPr wrap="square">
+            <a:spAutoFit/>
+          </a:bodyPr>
+          <a:lstStyle/>
+          <a:p>
+            <a:pPr algn="l"/>
+            <a:r>
+              <a:rPr sz="1200" b="0" i="0">
+                <a:solidFill>
+                  <a:srgbClr val="888888"/>
+                </a:solidFill>
+              </a:rPr>
+              <a:t>    – ML-KEM 키 교환: 양자 컴퓨터로도 해독 불가 (NIST 표준)</a:t>
+            </a:r>
+          </a:p>
+        </p:txBody>
+      </p:sp>
+      <p:sp>
+        <p:nvSpPr>
+          <p:cNvPr id="12" name="TextBox 11"/>
+          <p:cNvSpPr txBox="1"/>
+          <p:nvPr/>
+        </p:nvSpPr>
+        <p:spPr>
+          <a:xfrm>
+            <a:off x="347472" y="2496311"/>
+            <a:ext cx="5486400" cy="347472"/>
+          </a:xfrm>
+          <a:prstGeom prst="rect">
+            <a:avLst/>
+          </a:prstGeom>
+          <a:noFill/>
+        </p:spPr>
+        <p:txBody>
+          <a:bodyPr wrap="square">
+            <a:spAutoFit/>
+          </a:bodyPr>
+          <a:lstStyle/>
+          <a:p>
+            <a:pPr algn="l"/>
+            <a:r>
+              <a:rPr sz="1200" b="0" i="0">
+                <a:solidFill>
+                  <a:srgbClr val="888888"/>
+                </a:solidFill>
+              </a:rPr>
+              <a:t>    – AES-256-GCM: 무결성 + 기밀성 동시 보장</a:t>
+            </a:r>
+          </a:p>
+        </p:txBody>
+      </p:sp>
+      <p:sp>
+        <p:nvSpPr>
+          <p:cNvPr id="13" name="TextBox 12"/>
+          <p:cNvSpPr txBox="1"/>
+          <p:nvPr/>
+        </p:nvSpPr>
+        <p:spPr>
+          <a:xfrm>
+            <a:off x="347472" y="2825495"/>
+            <a:ext cx="5486400" cy="347472"/>
+          </a:xfrm>
+          <a:prstGeom prst="rect">
+            <a:avLst/>
+          </a:prstGeom>
+          <a:noFill/>
+        </p:spPr>
+        <p:txBody>
+          <a:bodyPr wrap="square">
+            <a:spAutoFit/>
+          </a:bodyPr>
+          <a:lstStyle/>
+          <a:p>
+            <a:pPr algn="l"/>
+            <a:r>
+              <a:rPr sz="1250" b="0" i="0">
+                <a:solidFill>
+                  <a:srgbClr val="1A1A1A"/>
+                </a:solidFill>
+              </a:rPr>
+              <a:t>  ▪ 재전송 공격 (Replay Attack)</a:t>
+            </a:r>
+          </a:p>
+        </p:txBody>
+      </p:sp>
+      <p:sp>
+        <p:nvSpPr>
+          <p:cNvPr id="14" name="TextBox 13"/>
+          <p:cNvSpPr txBox="1"/>
+          <p:nvPr/>
+        </p:nvSpPr>
+        <p:spPr>
+          <a:xfrm>
+            <a:off x="347472" y="3154679"/>
+            <a:ext cx="5486400" cy="347472"/>
+          </a:xfrm>
+          <a:prstGeom prst="rect">
+            <a:avLst/>
+          </a:prstGeom>
+          <a:noFill/>
+        </p:spPr>
+        <p:txBody>
+          <a:bodyPr wrap="square">
+            <a:spAutoFit/>
+          </a:bodyPr>
+          <a:lstStyle/>
+          <a:p>
+            <a:pPr algn="l"/>
+            <a:r>
+              <a:rPr sz="1200" b="0" i="0">
+                <a:solidFill>
+                  <a:srgbClr val="888888"/>
+                </a:solidFill>
+              </a:rPr>
+              <a:t>    – 각 패킷에 단조 증가 시퀀스 번호 + GCM 인증 태그</a:t>
+            </a:r>
+          </a:p>
+        </p:txBody>
+      </p:sp>
+      <p:sp>
+        <p:nvSpPr>
+          <p:cNvPr id="15" name="TextBox 14"/>
+          <p:cNvSpPr txBox="1"/>
+          <p:nvPr/>
+        </p:nvSpPr>
+        <p:spPr>
+          <a:xfrm>
+            <a:off x="347472" y="3483863"/>
+            <a:ext cx="5486400" cy="347472"/>
+          </a:xfrm>
+          <a:prstGeom prst="rect">
+            <a:avLst/>
+          </a:prstGeom>
+          <a:noFill/>
+        </p:spPr>
+        <p:txBody>
+          <a:bodyPr wrap="square">
+            <a:spAutoFit/>
+          </a:bodyPr>
+          <a:lstStyle/>
+          <a:p>
+            <a:pPr algn="l"/>
+            <a:r>
+              <a:rPr sz="1250" b="0" i="0">
+                <a:solidFill>
+                  <a:srgbClr val="1A1A1A"/>
+                </a:solidFill>
+              </a:rPr>
+              <a:t>  ▪ 게이트웨이 물리적 탈취</a:t>
+            </a:r>
+          </a:p>
+        </p:txBody>
+      </p:sp>
+      <p:sp>
+        <p:nvSpPr>
+          <p:cNvPr id="16" name="TextBox 15"/>
+          <p:cNvSpPr txBox="1"/>
+          <p:nvPr/>
+        </p:nvSpPr>
+        <p:spPr>
+          <a:xfrm>
+            <a:off x="347472" y="3813047"/>
+            <a:ext cx="5486400" cy="347472"/>
+          </a:xfrm>
+          <a:prstGeom prst="rect">
+            <a:avLst/>
+          </a:prstGeom>
+          <a:noFill/>
+        </p:spPr>
+        <p:txBody>
+          <a:bodyPr wrap="square">
+            <a:spAutoFit/>
+          </a:bodyPr>
+          <a:lstStyle/>
+          <a:p>
+            <a:pPr algn="l"/>
+            <a:r>
+              <a:rPr sz="1200" b="0" i="0">
+                <a:solidFill>
+                  <a:srgbClr val="888888"/>
+                </a:solidFill>
+              </a:rPr>
+              <a:t>    – FPGA Bitstream 암호화 (AES-256 device key)</a:t>
+            </a:r>
+          </a:p>
+        </p:txBody>
+      </p:sp>
+      <p:sp>
+        <p:nvSpPr>
+          <p:cNvPr id="17" name="TextBox 16"/>
+          <p:cNvSpPr txBox="1"/>
+          <p:nvPr/>
+        </p:nvSpPr>
+        <p:spPr>
+          <a:xfrm>
+            <a:off x="347472" y="4142231"/>
+            <a:ext cx="5486400" cy="347472"/>
+          </a:xfrm>
+          <a:prstGeom prst="rect">
+            <a:avLst/>
+          </a:prstGeom>
+          <a:noFill/>
+        </p:spPr>
+        <p:txBody>
+          <a:bodyPr wrap="square">
+            <a:spAutoFit/>
+          </a:bodyPr>
+          <a:lstStyle/>
+          <a:p>
+            <a:pPr algn="l"/>
+            <a:r>
+              <a:rPr sz="1200" b="0" i="0">
+                <a:solidFill>
+                  <a:srgbClr val="888888"/>
+                </a:solidFill>
+              </a:rPr>
+              <a:t>    – 세션 키: BRAM 비휘발성 저장 금지, 전원 차단 시 자동 소거</a:t>
+            </a:r>
+          </a:p>
+        </p:txBody>
+      </p:sp>
+      <p:sp>
+        <p:nvSpPr>
+          <p:cNvPr id="18" name="TextBox 17"/>
+          <p:cNvSpPr txBox="1"/>
+          <p:nvPr/>
+        </p:nvSpPr>
+        <p:spPr>
+          <a:xfrm>
+            <a:off x="347472" y="4471416"/>
+            <a:ext cx="5486400" cy="347472"/>
+          </a:xfrm>
+          <a:prstGeom prst="rect">
+            <a:avLst/>
+          </a:prstGeom>
+          <a:noFill/>
+        </p:spPr>
+        <p:txBody>
+          <a:bodyPr wrap="square">
+            <a:spAutoFit/>
+          </a:bodyPr>
+          <a:lstStyle/>
+          <a:p>
+            <a:pPr algn="l"/>
+            <a:r>
+              <a:rPr sz="1250" b="0" i="0">
+                <a:solidFill>
+                  <a:srgbClr val="1A1A1A"/>
+                </a:solidFill>
+              </a:rPr>
+              <a:t>  ▪ 키 관리 위험</a:t>
+            </a:r>
+          </a:p>
+        </p:txBody>
+      </p:sp>
+      <p:sp>
+        <p:nvSpPr>
+          <p:cNvPr id="19" name="TextBox 18"/>
+          <p:cNvSpPr txBox="1"/>
+          <p:nvPr/>
+        </p:nvSpPr>
+        <p:spPr>
+          <a:xfrm>
+            <a:off x="347472" y="4800600"/>
+            <a:ext cx="5486400" cy="347472"/>
+          </a:xfrm>
+          <a:prstGeom prst="rect">
+            <a:avLst/>
+          </a:prstGeom>
+          <a:noFill/>
+        </p:spPr>
+        <p:txBody>
+          <a:bodyPr wrap="square">
+            <a:spAutoFit/>
+          </a:bodyPr>
+          <a:lstStyle/>
+          <a:p>
+            <a:pPr algn="l"/>
+            <a:r>
+              <a:rPr sz="1200" b="0" i="0">
+                <a:solidFill>
+                  <a:srgbClr val="888888"/>
+                </a:solidFill>
+              </a:rPr>
+              <a:t>    – PFS: 세션마다 신규 KEM 수행</a:t>
+            </a:r>
+          </a:p>
+        </p:txBody>
+      </p:sp>
+      <p:sp>
+        <p:nvSpPr>
+          <p:cNvPr id="20" name="TextBox 19"/>
+          <p:cNvSpPr txBox="1"/>
+          <p:nvPr/>
+        </p:nvSpPr>
+        <p:spPr>
+          <a:xfrm>
+            <a:off x="347472" y="5129784"/>
+            <a:ext cx="5486400" cy="347472"/>
+          </a:xfrm>
+          <a:prstGeom prst="rect">
+            <a:avLst/>
+          </a:prstGeom>
+          <a:noFill/>
+        </p:spPr>
+        <p:txBody>
+          <a:bodyPr wrap="square">
+            <a:spAutoFit/>
+          </a:bodyPr>
+          <a:lstStyle/>
+          <a:p>
+            <a:pPr algn="l"/>
+            <a:r>
+              <a:rPr sz="1200" b="0" i="0">
+                <a:solidFill>
+                  <a:srgbClr val="888888"/>
+                </a:solidFill>
+              </a:rPr>
+              <a:t>    – 정기 재핸드셰이크 (1시간 또는 1GB 데이터마다)</a:t>
+            </a:r>
+          </a:p>
+        </p:txBody>
+      </p:sp>
+      <p:sp>
+        <p:nvSpPr>
+          <p:cNvPr id="21" name="Rectangle 20"/>
           <p:cNvSpPr/>
           <p:nvPr/>
         </p:nvSpPr>
         <p:spPr>
           <a:xfrm>
-            <a:off x="274320" y="1325880"/>
-            <a:ext cx="2743200" cy="457200"/>
-          </a:xfrm>
-          <a:prstGeom prst="rect">
-            <a:avLst/>
-          </a:prstGeom>
-          <a:solidFill>
-            <a:srgbClr val="D6E4F4"/>
-          </a:solidFill>
-          <a:ln>
-            <a:noFill/>
-          </a:ln>
-        </p:spPr>
-        <p:style>
-          <a:lnRef idx="1">
-            <a:schemeClr val="accent1"/>
-          </a:lnRef>
-          <a:fillRef idx="3">
-            <a:schemeClr val="accent1"/>
-          </a:fillRef>
-          <a:effectRef idx="2">
-            <a:schemeClr val="accent1"/>
-          </a:effectRef>
-          <a:fontRef idx="minor">
-            <a:schemeClr val="lt1"/>
-          </a:fontRef>
-        </p:style>
-        <p:txBody>
-          <a:bodyPr rtlCol="0" anchor="ctr"/>
-          <a:lstStyle/>
-          <a:p>
-            <a:pPr algn="ctr"/>
-          </a:p>
-        </p:txBody>
-      </p:sp>
-      <p:sp>
-        <p:nvSpPr>
-          <p:cNvPr id="10" name="TextBox 9"/>
-          <p:cNvSpPr txBox="1"/>
-          <p:nvPr/>
-        </p:nvSpPr>
-        <p:spPr>
-          <a:xfrm>
-            <a:off x="347472" y="1371600"/>
-            <a:ext cx="2606040" cy="384048"/>
-          </a:xfrm>
-          <a:prstGeom prst="rect">
-            <a:avLst/>
-          </a:prstGeom>
-          <a:noFill/>
-        </p:spPr>
-        <p:txBody>
-          <a:bodyPr wrap="square">
-            <a:spAutoFit/>
-          </a:bodyPr>
-          <a:lstStyle/>
-          <a:p>
-            <a:pPr algn="l"/>
-            <a:r>
-              <a:rPr sz="1100" b="1" i="0">
-                <a:solidFill>
-                  <a:srgbClr val="1E3A5F"/>
-                </a:solidFill>
-              </a:rPr>
-              <a:t>Phase 1  (1~2개월)</a:t>
-            </a:r>
-          </a:p>
-        </p:txBody>
-      </p:sp>
-      <p:sp>
-        <p:nvSpPr>
-          <p:cNvPr id="11" name="TextBox 10"/>
-          <p:cNvSpPr txBox="1"/>
-          <p:nvPr/>
-        </p:nvSpPr>
-        <p:spPr>
-          <a:xfrm>
-            <a:off x="365760" y="1920240"/>
-            <a:ext cx="2560320" cy="749808"/>
-          </a:xfrm>
-          <a:prstGeom prst="rect">
-            <a:avLst/>
-          </a:prstGeom>
-          <a:noFill/>
-        </p:spPr>
-        <p:txBody>
-          <a:bodyPr wrap="square">
-            <a:spAutoFit/>
-          </a:bodyPr>
-          <a:lstStyle/>
-          <a:p>
-            <a:pPr algn="l"/>
-            <a:r>
-              <a:rPr sz="1150" b="0" i="0">
-                <a:solidFill>
-                  <a:srgbClr val="1A1A1A"/>
-                </a:solidFill>
-              </a:rPr>
-              <a:t>▪  xQlave IP 라이선스 취득 및 평가 보드 셋업</a:t>
-            </a:r>
-          </a:p>
-        </p:txBody>
-      </p:sp>
-      <p:sp>
-        <p:nvSpPr>
-          <p:cNvPr id="12" name="TextBox 11"/>
-          <p:cNvSpPr txBox="1"/>
-          <p:nvPr/>
-        </p:nvSpPr>
-        <p:spPr>
-          <a:xfrm>
-            <a:off x="365760" y="2743200"/>
-            <a:ext cx="2560320" cy="749808"/>
-          </a:xfrm>
-          <a:prstGeom prst="rect">
-            <a:avLst/>
-          </a:prstGeom>
-          <a:noFill/>
-        </p:spPr>
-        <p:txBody>
-          <a:bodyPr wrap="square">
-            <a:spAutoFit/>
-          </a:bodyPr>
-          <a:lstStyle/>
-          <a:p>
-            <a:pPr algn="l"/>
-            <a:r>
-              <a:rPr sz="1150" b="0" i="0">
-                <a:solidFill>
-                  <a:srgbClr val="1A1A1A"/>
-                </a:solidFill>
-              </a:rPr>
-              <a:t>▪  Vivado/Quartus 프로젝트 구성</a:t>
-            </a:r>
-          </a:p>
-        </p:txBody>
-      </p:sp>
-      <p:sp>
-        <p:nvSpPr>
-          <p:cNvPr id="13" name="TextBox 12"/>
-          <p:cNvSpPr txBox="1"/>
-          <p:nvPr/>
-        </p:nvSpPr>
-        <p:spPr>
-          <a:xfrm>
-            <a:off x="365760" y="3566160"/>
-            <a:ext cx="2560320" cy="749808"/>
-          </a:xfrm>
-          <a:prstGeom prst="rect">
-            <a:avLst/>
-          </a:prstGeom>
-          <a:noFill/>
-        </p:spPr>
-        <p:txBody>
-          <a:bodyPr wrap="square">
-            <a:spAutoFit/>
-          </a:bodyPr>
-          <a:lstStyle/>
-          <a:p>
-            <a:pPr algn="l"/>
-            <a:r>
-              <a:rPr sz="1150" b="0" i="0">
-                <a:solidFill>
-                  <a:srgbClr val="1A1A1A"/>
-                </a:solidFill>
-              </a:rPr>
-              <a:t>▪  ML-KEM-768 핸드셰이크 PoC (1:1 검증)</a:t>
-            </a:r>
-          </a:p>
-        </p:txBody>
-      </p:sp>
-      <p:sp>
-        <p:nvSpPr>
-          <p:cNvPr id="14" name="TextBox 13"/>
-          <p:cNvSpPr txBox="1"/>
-          <p:nvPr/>
-        </p:nvSpPr>
-        <p:spPr>
-          <a:xfrm>
-            <a:off x="365760" y="4389120"/>
-            <a:ext cx="2560320" cy="749808"/>
-          </a:xfrm>
-          <a:prstGeom prst="rect">
-            <a:avLst/>
-          </a:prstGeom>
-          <a:noFill/>
-        </p:spPr>
-        <p:txBody>
-          <a:bodyPr wrap="square">
-            <a:spAutoFit/>
-          </a:bodyPr>
-          <a:lstStyle/>
-          <a:p>
-            <a:pPr algn="l"/>
-            <a:r>
-              <a:rPr sz="1150" b="0" i="0">
-                <a:solidFill>
-                  <a:srgbClr val="1A1A1A"/>
-                </a:solidFill>
-              </a:rPr>
-              <a:t>▪  기본 TCP 프록시 펌웨어 구현</a:t>
-            </a:r>
-          </a:p>
-        </p:txBody>
-      </p:sp>
-      <p:sp>
-        <p:nvSpPr>
-          <p:cNvPr id="15" name="Rectangle 14"/>
-          <p:cNvSpPr/>
-          <p:nvPr/>
-        </p:nvSpPr>
-        <p:spPr>
-          <a:xfrm>
-            <a:off x="3218688" y="1325880"/>
-            <a:ext cx="2743200" cy="4937760"/>
+            <a:off x="6035040" y="1325880"/>
+            <a:ext cx="5852160" cy="4846320"/>
           </a:xfrm>
           <a:prstGeom prst="rect">
             <a:avLst/>
@@ -5113,1463 +5340,13 @@
           <a:lstStyle/>
           <a:p>
             <a:pPr algn="ctr"/>
-          </a:p>
-        </p:txBody>
-      </p:sp>
-      <p:sp>
-        <p:nvSpPr>
-          <p:cNvPr id="16" name="Rectangle 15"/>
-          <p:cNvSpPr/>
-          <p:nvPr/>
-        </p:nvSpPr>
-        <p:spPr>
-          <a:xfrm>
-            <a:off x="3218688" y="1325880"/>
-            <a:ext cx="2743200" cy="457200"/>
-          </a:xfrm>
-          <a:prstGeom prst="rect">
-            <a:avLst/>
-          </a:prstGeom>
-          <a:solidFill>
-            <a:srgbClr val="D6E4F4"/>
-          </a:solidFill>
-          <a:ln>
-            <a:noFill/>
-          </a:ln>
-        </p:spPr>
-        <p:style>
-          <a:lnRef idx="1">
-            <a:schemeClr val="accent1"/>
-          </a:lnRef>
-          <a:fillRef idx="3">
-            <a:schemeClr val="accent1"/>
-          </a:fillRef>
-          <a:effectRef idx="2">
-            <a:schemeClr val="accent1"/>
-          </a:effectRef>
-          <a:fontRef idx="minor">
-            <a:schemeClr val="lt1"/>
-          </a:fontRef>
-        </p:style>
-        <p:txBody>
-          <a:bodyPr rtlCol="0" anchor="ctr"/>
-          <a:lstStyle/>
-          <a:p>
-            <a:pPr algn="ctr"/>
-          </a:p>
-        </p:txBody>
-      </p:sp>
-      <p:sp>
-        <p:nvSpPr>
-          <p:cNvPr id="17" name="TextBox 16"/>
-          <p:cNvSpPr txBox="1"/>
-          <p:nvPr/>
-        </p:nvSpPr>
-        <p:spPr>
-          <a:xfrm>
-            <a:off x="3291840" y="1371600"/>
-            <a:ext cx="2606040" cy="384048"/>
-          </a:xfrm>
-          <a:prstGeom prst="rect">
-            <a:avLst/>
-          </a:prstGeom>
-          <a:noFill/>
-        </p:spPr>
-        <p:txBody>
-          <a:bodyPr wrap="square">
-            <a:spAutoFit/>
-          </a:bodyPr>
-          <a:lstStyle/>
-          <a:p>
-            <a:pPr algn="l"/>
-            <a:r>
-              <a:rPr sz="1100" b="1" i="0">
-                <a:solidFill>
-                  <a:srgbClr val="1E3A5F"/>
-                </a:solidFill>
-              </a:rPr>
-              <a:t>Phase 2  (3~4개월)</a:t>
-            </a:r>
-          </a:p>
-        </p:txBody>
-      </p:sp>
-      <p:sp>
-        <p:nvSpPr>
-          <p:cNvPr id="18" name="TextBox 17"/>
-          <p:cNvSpPr txBox="1"/>
-          <p:nvPr/>
-        </p:nvSpPr>
-        <p:spPr>
-          <a:xfrm>
-            <a:off x="3310128" y="1920240"/>
-            <a:ext cx="2560320" cy="749808"/>
-          </a:xfrm>
-          <a:prstGeom prst="rect">
-            <a:avLst/>
-          </a:prstGeom>
-          <a:noFill/>
-        </p:spPr>
-        <p:txBody>
-          <a:bodyPr wrap="square">
-            <a:spAutoFit/>
-          </a:bodyPr>
-          <a:lstStyle/>
-          <a:p>
-            <a:pPr algn="l"/>
-            <a:r>
-              <a:rPr sz="1150" b="0" i="0">
-                <a:solidFill>
-                  <a:srgbClr val="1A1A1A"/>
-                </a:solidFill>
-              </a:rPr>
-              <a:t>▪  1:N (10대) 세션 관리 구현 및 테스트</a:t>
-            </a:r>
-          </a:p>
-        </p:txBody>
-      </p:sp>
-      <p:sp>
-        <p:nvSpPr>
-          <p:cNvPr id="19" name="TextBox 18"/>
-          <p:cNvSpPr txBox="1"/>
-          <p:nvPr/>
-        </p:nvSpPr>
-        <p:spPr>
-          <a:xfrm>
-            <a:off x="3310128" y="2743200"/>
-            <a:ext cx="2560320" cy="749808"/>
-          </a:xfrm>
-          <a:prstGeom prst="rect">
-            <a:avLst/>
-          </a:prstGeom>
-          <a:noFill/>
-        </p:spPr>
-        <p:txBody>
-          <a:bodyPr wrap="square">
-            <a:spAutoFit/>
-          </a:bodyPr>
-          <a:lstStyle/>
-          <a:p>
-            <a:pPr algn="l"/>
-            <a:r>
-              <a:rPr sz="1150" b="0" i="0">
-                <a:solidFill>
-                  <a:srgbClr val="1A1A1A"/>
-                </a:solidFill>
-              </a:rPr>
-              <a:t>▪  AES-256-GCM 다중 채널 엔진 통합</a:t>
-            </a:r>
-          </a:p>
-        </p:txBody>
-      </p:sp>
-      <p:sp>
-        <p:nvSpPr>
-          <p:cNvPr id="20" name="TextBox 19"/>
-          <p:cNvSpPr txBox="1"/>
-          <p:nvPr/>
-        </p:nvSpPr>
-        <p:spPr>
-          <a:xfrm>
-            <a:off x="3310128" y="3566160"/>
-            <a:ext cx="2560320" cy="749808"/>
-          </a:xfrm>
-          <a:prstGeom prst="rect">
-            <a:avLst/>
-          </a:prstGeom>
-          <a:noFill/>
-        </p:spPr>
-        <p:txBody>
-          <a:bodyPr wrap="square">
-            <a:spAutoFit/>
-          </a:bodyPr>
-          <a:lstStyle/>
-          <a:p>
-            <a:pPr algn="l"/>
-            <a:r>
-              <a:rPr sz="1150" b="0" i="0">
-                <a:solidFill>
-                  <a:srgbClr val="1A1A1A"/>
-                </a:solidFill>
-              </a:rPr>
-              <a:t>▪  Host GW ↔ Device GW 프로토콜 확정</a:t>
-            </a:r>
-          </a:p>
-        </p:txBody>
-      </p:sp>
-      <p:sp>
-        <p:nvSpPr>
-          <p:cNvPr id="21" name="TextBox 20"/>
-          <p:cNvSpPr txBox="1"/>
-          <p:nvPr/>
-        </p:nvSpPr>
-        <p:spPr>
-          <a:xfrm>
-            <a:off x="3310128" y="4389120"/>
-            <a:ext cx="2560320" cy="749808"/>
-          </a:xfrm>
-          <a:prstGeom prst="rect">
-            <a:avLst/>
-          </a:prstGeom>
-          <a:noFill/>
-        </p:spPr>
-        <p:txBody>
-          <a:bodyPr wrap="square">
-            <a:spAutoFit/>
-          </a:bodyPr>
-          <a:lstStyle/>
-          <a:p>
-            <a:pPr algn="l"/>
-            <a:r>
-              <a:rPr sz="1150" b="0" i="0">
-                <a:solidFill>
-                  <a:srgbClr val="1A1A1A"/>
-                </a:solidFill>
-              </a:rPr>
-              <a:t>▪  성능 벤치마크 (처리량·레이턴시)</a:t>
-            </a:r>
-          </a:p>
-        </p:txBody>
-      </p:sp>
-      <p:sp>
-        <p:nvSpPr>
-          <p:cNvPr id="22" name="Rectangle 21"/>
-          <p:cNvSpPr/>
-          <p:nvPr/>
-        </p:nvSpPr>
-        <p:spPr>
-          <a:xfrm>
-            <a:off x="6163056" y="1325880"/>
-            <a:ext cx="2743200" cy="4937760"/>
-          </a:xfrm>
-          <a:prstGeom prst="rect">
-            <a:avLst/>
-          </a:prstGeom>
-          <a:solidFill>
-            <a:srgbClr val="F0F4F9"/>
-          </a:solidFill>
-          <a:ln w="9525">
-            <a:solidFill>
-              <a:srgbClr val="D6E4F4"/>
-            </a:solidFill>
-          </a:ln>
-        </p:spPr>
-        <p:style>
-          <a:lnRef idx="1">
-            <a:schemeClr val="accent1"/>
-          </a:lnRef>
-          <a:fillRef idx="3">
-            <a:schemeClr val="accent1"/>
-          </a:fillRef>
-          <a:effectRef idx="2">
-            <a:schemeClr val="accent1"/>
-          </a:effectRef>
-          <a:fontRef idx="minor">
-            <a:schemeClr val="lt1"/>
-          </a:fontRef>
-        </p:style>
-        <p:txBody>
-          <a:bodyPr rtlCol="0" anchor="ctr"/>
-          <a:lstStyle/>
-          <a:p>
-            <a:pPr algn="ctr"/>
-          </a:p>
-        </p:txBody>
-      </p:sp>
-      <p:sp>
-        <p:nvSpPr>
-          <p:cNvPr id="23" name="Rectangle 22"/>
-          <p:cNvSpPr/>
-          <p:nvPr/>
-        </p:nvSpPr>
-        <p:spPr>
-          <a:xfrm>
-            <a:off x="6163056" y="1325880"/>
-            <a:ext cx="2743200" cy="457200"/>
-          </a:xfrm>
-          <a:prstGeom prst="rect">
-            <a:avLst/>
-          </a:prstGeom>
-          <a:solidFill>
-            <a:srgbClr val="D6E4F4"/>
-          </a:solidFill>
-          <a:ln>
-            <a:noFill/>
-          </a:ln>
-        </p:spPr>
-        <p:style>
-          <a:lnRef idx="1">
-            <a:schemeClr val="accent1"/>
-          </a:lnRef>
-          <a:fillRef idx="3">
-            <a:schemeClr val="accent1"/>
-          </a:fillRef>
-          <a:effectRef idx="2">
-            <a:schemeClr val="accent1"/>
-          </a:effectRef>
-          <a:fontRef idx="minor">
-            <a:schemeClr val="lt1"/>
-          </a:fontRef>
-        </p:style>
-        <p:txBody>
-          <a:bodyPr rtlCol="0" anchor="ctr"/>
-          <a:lstStyle/>
-          <a:p>
-            <a:pPr algn="ctr"/>
-          </a:p>
-        </p:txBody>
-      </p:sp>
-      <p:sp>
-        <p:nvSpPr>
-          <p:cNvPr id="24" name="TextBox 23"/>
-          <p:cNvSpPr txBox="1"/>
-          <p:nvPr/>
-        </p:nvSpPr>
-        <p:spPr>
-          <a:xfrm>
-            <a:off x="6236208" y="1371600"/>
-            <a:ext cx="2606040" cy="384048"/>
-          </a:xfrm>
-          <a:prstGeom prst="rect">
-            <a:avLst/>
-          </a:prstGeom>
-          <a:noFill/>
-        </p:spPr>
-        <p:txBody>
-          <a:bodyPr wrap="square">
-            <a:spAutoFit/>
-          </a:bodyPr>
-          <a:lstStyle/>
-          <a:p>
-            <a:pPr algn="l"/>
-            <a:r>
-              <a:rPr sz="1100" b="1" i="0">
-                <a:solidFill>
-                  <a:srgbClr val="1E3A5F"/>
-                </a:solidFill>
-              </a:rPr>
-              <a:t>Phase 3  (5~6개월)</a:t>
-            </a:r>
-          </a:p>
-        </p:txBody>
-      </p:sp>
-      <p:sp>
-        <p:nvSpPr>
-          <p:cNvPr id="25" name="TextBox 24"/>
-          <p:cNvSpPr txBox="1"/>
-          <p:nvPr/>
-        </p:nvSpPr>
-        <p:spPr>
-          <a:xfrm>
-            <a:off x="6254496" y="1920240"/>
-            <a:ext cx="2560320" cy="749808"/>
-          </a:xfrm>
-          <a:prstGeom prst="rect">
-            <a:avLst/>
-          </a:prstGeom>
-          <a:noFill/>
-        </p:spPr>
-        <p:txBody>
-          <a:bodyPr wrap="square">
-            <a:spAutoFit/>
-          </a:bodyPr>
-          <a:lstStyle/>
-          <a:p>
-            <a:pPr algn="l"/>
-            <a:r>
-              <a:rPr sz="1150" b="0" i="0">
-                <a:solidFill>
-                  <a:srgbClr val="1A1A1A"/>
-                </a:solidFill>
-              </a:rPr>
-              <a:t>▪  N=100 스케일 검증 및 스트레스 테스트</a:t>
-            </a:r>
-          </a:p>
-        </p:txBody>
-      </p:sp>
-      <p:sp>
-        <p:nvSpPr>
-          <p:cNvPr id="26" name="TextBox 25"/>
-          <p:cNvSpPr txBox="1"/>
-          <p:nvPr/>
-        </p:nvSpPr>
-        <p:spPr>
-          <a:xfrm>
-            <a:off x="6254496" y="2743200"/>
-            <a:ext cx="2560320" cy="749808"/>
-          </a:xfrm>
-          <a:prstGeom prst="rect">
-            <a:avLst/>
-          </a:prstGeom>
-          <a:noFill/>
-        </p:spPr>
-        <p:txBody>
-          <a:bodyPr wrap="square">
-            <a:spAutoFit/>
-          </a:bodyPr>
-          <a:lstStyle/>
-          <a:p>
-            <a:pPr algn="l"/>
-            <a:r>
-              <a:rPr sz="1150" b="0" i="0">
-                <a:solidFill>
-                  <a:srgbClr val="1A1A1A"/>
-                </a:solidFill>
-              </a:rPr>
-              <a:t>▪  소형 Device GW PCB 설계 (Artix-7)</a:t>
-            </a:r>
-          </a:p>
-        </p:txBody>
-      </p:sp>
-      <p:sp>
-        <p:nvSpPr>
-          <p:cNvPr id="27" name="TextBox 26"/>
-          <p:cNvSpPr txBox="1"/>
-          <p:nvPr/>
-        </p:nvSpPr>
-        <p:spPr>
-          <a:xfrm>
-            <a:off x="6254496" y="3566160"/>
-            <a:ext cx="2560320" cy="749808"/>
-          </a:xfrm>
-          <a:prstGeom prst="rect">
-            <a:avLst/>
-          </a:prstGeom>
-          <a:noFill/>
-        </p:spPr>
-        <p:txBody>
-          <a:bodyPr wrap="square">
-            <a:spAutoFit/>
-          </a:bodyPr>
-          <a:lstStyle/>
-          <a:p>
-            <a:pPr algn="l"/>
-            <a:r>
-              <a:rPr sz="1150" b="0" i="0">
-                <a:solidFill>
-                  <a:srgbClr val="1A1A1A"/>
-                </a:solidFill>
-              </a:rPr>
-              <a:t>▪  기존 실제 시스템 통합 테스트</a:t>
-            </a:r>
-          </a:p>
-        </p:txBody>
-      </p:sp>
-      <p:sp>
-        <p:nvSpPr>
-          <p:cNvPr id="28" name="TextBox 27"/>
-          <p:cNvSpPr txBox="1"/>
-          <p:nvPr/>
-        </p:nvSpPr>
-        <p:spPr>
-          <a:xfrm>
-            <a:off x="6254496" y="4389120"/>
-            <a:ext cx="2560320" cy="749808"/>
-          </a:xfrm>
-          <a:prstGeom prst="rect">
-            <a:avLst/>
-          </a:prstGeom>
-          <a:noFill/>
-        </p:spPr>
-        <p:txBody>
-          <a:bodyPr wrap="square">
-            <a:spAutoFit/>
-          </a:bodyPr>
-          <a:lstStyle/>
-          <a:p>
-            <a:pPr algn="l"/>
-            <a:r>
-              <a:rPr sz="1150" b="0" i="0">
-                <a:solidFill>
-                  <a:srgbClr val="1A1A1A"/>
-                </a:solidFill>
-              </a:rPr>
-              <a:t>▪  보안 검토 및 인증 준비</a:t>
-            </a:r>
-          </a:p>
-        </p:txBody>
-      </p:sp>
-      <p:sp>
-        <p:nvSpPr>
-          <p:cNvPr id="29" name="Rectangle 28"/>
-          <p:cNvSpPr/>
-          <p:nvPr/>
-        </p:nvSpPr>
-        <p:spPr>
-          <a:xfrm>
-            <a:off x="9107424" y="1325880"/>
-            <a:ext cx="2743200" cy="4937760"/>
-          </a:xfrm>
-          <a:prstGeom prst="rect">
-            <a:avLst/>
-          </a:prstGeom>
-          <a:solidFill>
-            <a:srgbClr val="F0F4F9"/>
-          </a:solidFill>
-          <a:ln w="9525">
-            <a:solidFill>
-              <a:srgbClr val="D6E4F4"/>
-            </a:solidFill>
-          </a:ln>
-        </p:spPr>
-        <p:style>
-          <a:lnRef idx="1">
-            <a:schemeClr val="accent1"/>
-          </a:lnRef>
-          <a:fillRef idx="3">
-            <a:schemeClr val="accent1"/>
-          </a:fillRef>
-          <a:effectRef idx="2">
-            <a:schemeClr val="accent1"/>
-          </a:effectRef>
-          <a:fontRef idx="minor">
-            <a:schemeClr val="lt1"/>
-          </a:fontRef>
-        </p:style>
-        <p:txBody>
-          <a:bodyPr rtlCol="0" anchor="ctr"/>
-          <a:lstStyle/>
-          <a:p>
-            <a:pPr algn="ctr"/>
-          </a:p>
-        </p:txBody>
-      </p:sp>
-      <p:sp>
-        <p:nvSpPr>
-          <p:cNvPr id="30" name="Rectangle 29"/>
-          <p:cNvSpPr/>
-          <p:nvPr/>
-        </p:nvSpPr>
-        <p:spPr>
-          <a:xfrm>
-            <a:off x="9107424" y="1325880"/>
-            <a:ext cx="2743200" cy="457200"/>
-          </a:xfrm>
-          <a:prstGeom prst="rect">
-            <a:avLst/>
-          </a:prstGeom>
-          <a:solidFill>
-            <a:srgbClr val="D6E4F4"/>
-          </a:solidFill>
-          <a:ln>
-            <a:noFill/>
-          </a:ln>
-        </p:spPr>
-        <p:style>
-          <a:lnRef idx="1">
-            <a:schemeClr val="accent1"/>
-          </a:lnRef>
-          <a:fillRef idx="3">
-            <a:schemeClr val="accent1"/>
-          </a:fillRef>
-          <a:effectRef idx="2">
-            <a:schemeClr val="accent1"/>
-          </a:effectRef>
-          <a:fontRef idx="minor">
-            <a:schemeClr val="lt1"/>
-          </a:fontRef>
-        </p:style>
-        <p:txBody>
-          <a:bodyPr rtlCol="0" anchor="ctr"/>
-          <a:lstStyle/>
-          <a:p>
-            <a:pPr algn="ctr"/>
-          </a:p>
-        </p:txBody>
-      </p:sp>
-      <p:sp>
-        <p:nvSpPr>
-          <p:cNvPr id="31" name="TextBox 30"/>
-          <p:cNvSpPr txBox="1"/>
-          <p:nvPr/>
-        </p:nvSpPr>
-        <p:spPr>
-          <a:xfrm>
-            <a:off x="9180576" y="1371600"/>
-            <a:ext cx="2606040" cy="384048"/>
-          </a:xfrm>
-          <a:prstGeom prst="rect">
-            <a:avLst/>
-          </a:prstGeom>
-          <a:noFill/>
-        </p:spPr>
-        <p:txBody>
-          <a:bodyPr wrap="square">
-            <a:spAutoFit/>
-          </a:bodyPr>
-          <a:lstStyle/>
-          <a:p>
-            <a:pPr algn="l"/>
-            <a:r>
-              <a:rPr sz="1100" b="1" i="0">
-                <a:solidFill>
-                  <a:srgbClr val="1E3A5F"/>
-                </a:solidFill>
-              </a:rPr>
-              <a:t>Phase 4  (7~8개월)</a:t>
-            </a:r>
-          </a:p>
-        </p:txBody>
-      </p:sp>
-      <p:sp>
-        <p:nvSpPr>
-          <p:cNvPr id="32" name="TextBox 31"/>
-          <p:cNvSpPr txBox="1"/>
-          <p:nvPr/>
-        </p:nvSpPr>
-        <p:spPr>
-          <a:xfrm>
-            <a:off x="9198864" y="1920240"/>
-            <a:ext cx="2560320" cy="749808"/>
-          </a:xfrm>
-          <a:prstGeom prst="rect">
-            <a:avLst/>
-          </a:prstGeom>
-          <a:noFill/>
-        </p:spPr>
-        <p:txBody>
-          <a:bodyPr wrap="square">
-            <a:spAutoFit/>
-          </a:bodyPr>
-          <a:lstStyle/>
-          <a:p>
-            <a:pPr algn="l"/>
-            <a:r>
-              <a:rPr sz="1150" b="0" i="0">
-                <a:solidFill>
-                  <a:srgbClr val="1A1A1A"/>
-                </a:solidFill>
-              </a:rPr>
-              <a:t>▪  양산 PCB 설계 완료 / 제조 발주</a:t>
-            </a:r>
-          </a:p>
-        </p:txBody>
-      </p:sp>
-      <p:sp>
-        <p:nvSpPr>
-          <p:cNvPr id="33" name="TextBox 32"/>
-          <p:cNvSpPr txBox="1"/>
-          <p:nvPr/>
-        </p:nvSpPr>
-        <p:spPr>
-          <a:xfrm>
-            <a:off x="9198864" y="2743200"/>
-            <a:ext cx="2560320" cy="749808"/>
-          </a:xfrm>
-          <a:prstGeom prst="rect">
-            <a:avLst/>
-          </a:prstGeom>
-          <a:noFill/>
-        </p:spPr>
-        <p:txBody>
-          <a:bodyPr wrap="square">
-            <a:spAutoFit/>
-          </a:bodyPr>
-          <a:lstStyle/>
-          <a:p>
-            <a:pPr algn="l"/>
-            <a:r>
-              <a:rPr sz="1150" b="0" i="0">
-                <a:solidFill>
-                  <a:srgbClr val="1A1A1A"/>
-                </a:solidFill>
-              </a:rPr>
-              <a:t>▪  현장 파일럿 배포 (N=20 → 50 → 100)</a:t>
-            </a:r>
-          </a:p>
-        </p:txBody>
-      </p:sp>
-      <p:sp>
-        <p:nvSpPr>
-          <p:cNvPr id="34" name="TextBox 33"/>
-          <p:cNvSpPr txBox="1"/>
-          <p:nvPr/>
-        </p:nvSpPr>
-        <p:spPr>
-          <a:xfrm>
-            <a:off x="9198864" y="3566160"/>
-            <a:ext cx="2560320" cy="749808"/>
-          </a:xfrm>
-          <a:prstGeom prst="rect">
-            <a:avLst/>
-          </a:prstGeom>
-          <a:noFill/>
-        </p:spPr>
-        <p:txBody>
-          <a:bodyPr wrap="square">
-            <a:spAutoFit/>
-          </a:bodyPr>
-          <a:lstStyle/>
-          <a:p>
-            <a:pPr algn="l"/>
-            <a:r>
-              <a:rPr sz="1150" b="0" i="0">
-                <a:solidFill>
-                  <a:srgbClr val="1A1A1A"/>
-                </a:solidFill>
-              </a:rPr>
-              <a:t>▪  운용 매뉴얼 및 모니터링 도구 완성</a:t>
-            </a:r>
-          </a:p>
-        </p:txBody>
-      </p:sp>
-      <p:sp>
-        <p:nvSpPr>
-          <p:cNvPr id="35" name="TextBox 34"/>
-          <p:cNvSpPr txBox="1"/>
-          <p:nvPr/>
-        </p:nvSpPr>
-        <p:spPr>
-          <a:xfrm>
-            <a:off x="9198864" y="4389120"/>
-            <a:ext cx="2560320" cy="749808"/>
-          </a:xfrm>
-          <a:prstGeom prst="rect">
-            <a:avLst/>
-          </a:prstGeom>
-          <a:noFill/>
-        </p:spPr>
-        <p:txBody>
-          <a:bodyPr wrap="square">
-            <a:spAutoFit/>
-          </a:bodyPr>
-          <a:lstStyle/>
-          <a:p>
-            <a:pPr algn="l"/>
-            <a:r>
-              <a:rPr sz="1150" b="0" i="0">
-                <a:solidFill>
-                  <a:srgbClr val="1A1A1A"/>
-                </a:solidFill>
-              </a:rPr>
-              <a:t>▪  공식 운용 전환</a:t>
-            </a:r>
-          </a:p>
-        </p:txBody>
-      </p:sp>
-      <p:sp>
-        <p:nvSpPr>
-          <p:cNvPr id="36" name="TextBox 35"/>
-          <p:cNvSpPr txBox="1"/>
-          <p:nvPr/>
-        </p:nvSpPr>
-        <p:spPr>
-          <a:xfrm>
-            <a:off x="274320" y="6446520"/>
-            <a:ext cx="11612880" cy="365760"/>
-          </a:xfrm>
-          <a:prstGeom prst="rect">
-            <a:avLst/>
-          </a:prstGeom>
-          <a:noFill/>
-        </p:spPr>
-        <p:txBody>
-          <a:bodyPr wrap="square">
-            <a:spAutoFit/>
-          </a:bodyPr>
-          <a:lstStyle/>
-          <a:p>
-            <a:pPr algn="ctr"/>
-            <a:r>
-              <a:rPr sz="1200" b="0" i="0">
-                <a:solidFill>
-                  <a:srgbClr val="888888"/>
-                </a:solidFill>
-              </a:rPr>
-              <a:t>총 기간: 약 8개월  |  병렬 진행 가능 항목 다수</a:t>
-            </a:r>
-          </a:p>
-        </p:txBody>
-      </p:sp>
-    </p:spTree>
-  </p:cSld>
-  <p:clrMapOvr>
-    <a:masterClrMapping/>
-  </p:clrMapOvr>
-</p:sld>
-</file>
-
-<file path=ppt/slides/slide12.xml><?xml version="1.0" encoding="utf-8"?>
-<p:sld xmlns:a="http://schemas.openxmlformats.org/drawingml/2006/main" xmlns:p="http://schemas.openxmlformats.org/presentationml/2006/main" xmlns:r="http://schemas.openxmlformats.org/officeDocument/2006/relationships">
-  <p:cSld>
-    <p:spTree>
-      <p:nvGrpSpPr>
-        <p:cNvPr id="1" name=""/>
-        <p:cNvGrpSpPr/>
-        <p:nvPr/>
-      </p:nvGrpSpPr>
-      <p:grpSpPr/>
-      <p:sp>
-        <p:nvSpPr>
-          <p:cNvPr id="2" name="Rectangle 1"/>
-          <p:cNvSpPr/>
-          <p:nvPr/>
-        </p:nvSpPr>
-        <p:spPr>
-          <a:xfrm>
-            <a:off x="0" y="0"/>
-            <a:ext cx="12188952" cy="6858000"/>
-          </a:xfrm>
-          <a:prstGeom prst="rect">
-            <a:avLst/>
-          </a:prstGeom>
-          <a:solidFill>
-            <a:srgbClr val="FFFFFF"/>
-          </a:solidFill>
-          <a:ln>
-            <a:noFill/>
-          </a:ln>
-        </p:spPr>
-        <p:style>
-          <a:lnRef idx="1">
-            <a:schemeClr val="accent1"/>
-          </a:lnRef>
-          <a:fillRef idx="3">
-            <a:schemeClr val="accent1"/>
-          </a:fillRef>
-          <a:effectRef idx="2">
-            <a:schemeClr val="accent1"/>
-          </a:effectRef>
-          <a:fontRef idx="minor">
-            <a:schemeClr val="lt1"/>
-          </a:fontRef>
-        </p:style>
-        <p:txBody>
-          <a:bodyPr rtlCol="0" anchor="ctr"/>
-          <a:lstStyle/>
-          <a:p>
-            <a:pPr algn="ctr"/>
-          </a:p>
-        </p:txBody>
-      </p:sp>
-      <p:sp>
-        <p:nvSpPr>
-          <p:cNvPr id="3" name="Rectangle 2"/>
-          <p:cNvSpPr/>
-          <p:nvPr/>
-        </p:nvSpPr>
-        <p:spPr>
-          <a:xfrm>
-            <a:off x="0" y="0"/>
-            <a:ext cx="12188952" cy="73152"/>
-          </a:xfrm>
-          <a:prstGeom prst="rect">
-            <a:avLst/>
-          </a:prstGeom>
-          <a:solidFill>
-            <a:srgbClr val="1E6FBF"/>
-          </a:solidFill>
-          <a:ln>
-            <a:noFill/>
-          </a:ln>
-        </p:spPr>
-        <p:style>
-          <a:lnRef idx="1">
-            <a:schemeClr val="accent1"/>
-          </a:lnRef>
-          <a:fillRef idx="3">
-            <a:schemeClr val="accent1"/>
-          </a:fillRef>
-          <a:effectRef idx="2">
-            <a:schemeClr val="accent1"/>
-          </a:effectRef>
-          <a:fontRef idx="minor">
-            <a:schemeClr val="lt1"/>
-          </a:fontRef>
-        </p:style>
-        <p:txBody>
-          <a:bodyPr rtlCol="0" anchor="ctr"/>
-          <a:lstStyle/>
-          <a:p>
-            <a:pPr algn="ctr"/>
-          </a:p>
-        </p:txBody>
-      </p:sp>
-      <p:sp>
-        <p:nvSpPr>
-          <p:cNvPr id="4" name="Rectangle 3"/>
-          <p:cNvSpPr/>
-          <p:nvPr/>
-        </p:nvSpPr>
-        <p:spPr>
-          <a:xfrm>
-            <a:off x="0" y="73152"/>
-            <a:ext cx="12188952" cy="1097280"/>
-          </a:xfrm>
-          <a:prstGeom prst="rect">
-            <a:avLst/>
-          </a:prstGeom>
-          <a:solidFill>
-            <a:srgbClr val="F0F4F9"/>
-          </a:solidFill>
-          <a:ln>
-            <a:noFill/>
-          </a:ln>
-        </p:spPr>
-        <p:style>
-          <a:lnRef idx="1">
-            <a:schemeClr val="accent1"/>
-          </a:lnRef>
-          <a:fillRef idx="3">
-            <a:schemeClr val="accent1"/>
-          </a:fillRef>
-          <a:effectRef idx="2">
-            <a:schemeClr val="accent1"/>
-          </a:effectRef>
-          <a:fontRef idx="minor">
-            <a:schemeClr val="lt1"/>
-          </a:fontRef>
-        </p:style>
-        <p:txBody>
-          <a:bodyPr rtlCol="0" anchor="ctr"/>
-          <a:lstStyle/>
-          <a:p>
-            <a:pPr algn="ctr"/>
-          </a:p>
-        </p:txBody>
-      </p:sp>
-      <p:sp>
-        <p:nvSpPr>
-          <p:cNvPr id="5" name="TextBox 4"/>
-          <p:cNvSpPr txBox="1"/>
-          <p:nvPr/>
-        </p:nvSpPr>
-        <p:spPr>
-          <a:xfrm>
-            <a:off x="365760" y="137160"/>
-            <a:ext cx="11430000" cy="658368"/>
-          </a:xfrm>
-          <a:prstGeom prst="rect">
-            <a:avLst/>
-          </a:prstGeom>
-          <a:noFill/>
-        </p:spPr>
-        <p:txBody>
-          <a:bodyPr wrap="square">
-            <a:spAutoFit/>
-          </a:bodyPr>
-          <a:lstStyle/>
-          <a:p>
-            <a:pPr algn="l"/>
-            <a:r>
-              <a:rPr sz="2400" b="1" i="0">
-                <a:solidFill>
-                  <a:srgbClr val="1E3A5F"/>
-                </a:solidFill>
-              </a:rPr>
-              <a:t>예상 비용 및 핵심 BOM</a:t>
-            </a:r>
-          </a:p>
-        </p:txBody>
-      </p:sp>
-      <p:sp>
-        <p:nvSpPr>
-          <p:cNvPr id="6" name="TextBox 5"/>
-          <p:cNvSpPr txBox="1"/>
-          <p:nvPr/>
-        </p:nvSpPr>
-        <p:spPr>
-          <a:xfrm>
-            <a:off x="365760" y="749808"/>
-            <a:ext cx="11430000" cy="384048"/>
-          </a:xfrm>
-          <a:prstGeom prst="rect">
-            <a:avLst/>
-          </a:prstGeom>
-          <a:noFill/>
-        </p:spPr>
-        <p:txBody>
-          <a:bodyPr wrap="square">
-            <a:spAutoFit/>
-          </a:bodyPr>
-          <a:lstStyle/>
-          <a:p>
-            <a:pPr algn="l"/>
-            <a:r>
-              <a:rPr sz="1200" b="0" i="1">
-                <a:solidFill>
-                  <a:srgbClr val="888888"/>
-                </a:solidFill>
-              </a:rPr>
-              <a:t>개략 견적 (참고용)</a:t>
-            </a:r>
-          </a:p>
-        </p:txBody>
-      </p:sp>
-      <p:sp>
-        <p:nvSpPr>
-          <p:cNvPr id="7" name="Rectangle 6"/>
-          <p:cNvSpPr/>
-          <p:nvPr/>
-        </p:nvSpPr>
-        <p:spPr>
-          <a:xfrm>
-            <a:off x="0" y="1170432"/>
-            <a:ext cx="12188952" cy="36576"/>
-          </a:xfrm>
-          <a:prstGeom prst="rect">
-            <a:avLst/>
-          </a:prstGeom>
-          <a:solidFill>
-            <a:srgbClr val="D6E4F4"/>
-          </a:solidFill>
-          <a:ln>
-            <a:noFill/>
-          </a:ln>
-        </p:spPr>
-        <p:style>
-          <a:lnRef idx="1">
-            <a:schemeClr val="accent1"/>
-          </a:lnRef>
-          <a:fillRef idx="3">
-            <a:schemeClr val="accent1"/>
-          </a:fillRef>
-          <a:effectRef idx="2">
-            <a:schemeClr val="accent1"/>
-          </a:effectRef>
-          <a:fontRef idx="minor">
-            <a:schemeClr val="lt1"/>
-          </a:fontRef>
-        </p:style>
-        <p:txBody>
-          <a:bodyPr rtlCol="0" anchor="ctr"/>
-          <a:lstStyle/>
-          <a:p>
-            <a:pPr algn="ctr"/>
-          </a:p>
-        </p:txBody>
-      </p:sp>
-      <p:sp>
-        <p:nvSpPr>
-          <p:cNvPr id="8" name="Rectangle 7"/>
-          <p:cNvSpPr/>
-          <p:nvPr/>
-        </p:nvSpPr>
-        <p:spPr>
-          <a:xfrm>
-            <a:off x="274320" y="1325880"/>
-            <a:ext cx="5669280" cy="4846320"/>
-          </a:xfrm>
-          <a:prstGeom prst="rect">
-            <a:avLst/>
-          </a:prstGeom>
-          <a:solidFill>
-            <a:srgbClr val="F0F4F9"/>
-          </a:solidFill>
-          <a:ln w="9525">
-            <a:solidFill>
-              <a:srgbClr val="D6E4F4"/>
-            </a:solidFill>
-          </a:ln>
-        </p:spPr>
-        <p:style>
-          <a:lnRef idx="1">
-            <a:schemeClr val="accent1"/>
-          </a:lnRef>
-          <a:fillRef idx="3">
-            <a:schemeClr val="accent1"/>
-          </a:fillRef>
-          <a:effectRef idx="2">
-            <a:schemeClr val="accent1"/>
-          </a:effectRef>
-          <a:fontRef idx="minor">
-            <a:schemeClr val="lt1"/>
-          </a:fontRef>
-        </p:style>
-        <p:txBody>
-          <a:bodyPr rtlCol="0" anchor="ctr"/>
-          <a:lstStyle/>
-          <a:p>
-            <a:pPr algn="ctr"/>
-          </a:p>
-        </p:txBody>
-      </p:sp>
-      <p:sp>
-        <p:nvSpPr>
-          <p:cNvPr id="9" name="TextBox 8"/>
-          <p:cNvSpPr txBox="1"/>
-          <p:nvPr/>
-        </p:nvSpPr>
-        <p:spPr>
-          <a:xfrm>
-            <a:off x="384048" y="1435607"/>
-            <a:ext cx="5440680" cy="365760"/>
-          </a:xfrm>
-          <a:prstGeom prst="rect">
-            <a:avLst/>
-          </a:prstGeom>
-          <a:noFill/>
-        </p:spPr>
-        <p:txBody>
-          <a:bodyPr wrap="square">
-            <a:spAutoFit/>
-          </a:bodyPr>
-          <a:lstStyle/>
-          <a:p>
-            <a:pPr algn="l"/>
-            <a:r>
-              <a:rPr sz="1300" b="1" i="0">
-                <a:solidFill>
-                  <a:srgbClr val="1E3A5F"/>
-                </a:solidFill>
-              </a:rPr>
-              <a:t>비용 구성</a:t>
-            </a:r>
-          </a:p>
-        </p:txBody>
-      </p:sp>
-      <p:sp>
-        <p:nvSpPr>
-          <p:cNvPr id="10" name="TextBox 9"/>
-          <p:cNvSpPr txBox="1"/>
-          <p:nvPr/>
-        </p:nvSpPr>
-        <p:spPr>
-          <a:xfrm>
-            <a:off x="347472" y="1837943"/>
-            <a:ext cx="5486400" cy="347472"/>
-          </a:xfrm>
-          <a:prstGeom prst="rect">
-            <a:avLst/>
-          </a:prstGeom>
-          <a:noFill/>
-        </p:spPr>
-        <p:txBody>
-          <a:bodyPr wrap="square">
-            <a:spAutoFit/>
-          </a:bodyPr>
-          <a:lstStyle/>
-          <a:p>
-            <a:pPr algn="l"/>
-            <a:r>
-              <a:rPr sz="1250" b="0" i="0">
-                <a:solidFill>
-                  <a:srgbClr val="1A1A1A"/>
-                </a:solidFill>
-              </a:rPr>
-              <a:t>  ▪ Xiphera xQlave IP 라이선스</a:t>
-            </a:r>
-          </a:p>
-        </p:txBody>
-      </p:sp>
-      <p:sp>
-        <p:nvSpPr>
-          <p:cNvPr id="11" name="TextBox 10"/>
-          <p:cNvSpPr txBox="1"/>
-          <p:nvPr/>
-        </p:nvSpPr>
-        <p:spPr>
-          <a:xfrm>
-            <a:off x="347472" y="2167127"/>
-            <a:ext cx="5486400" cy="347472"/>
-          </a:xfrm>
-          <a:prstGeom prst="rect">
-            <a:avLst/>
-          </a:prstGeom>
-          <a:noFill/>
-        </p:spPr>
-        <p:txBody>
-          <a:bodyPr wrap="square">
-            <a:spAutoFit/>
-          </a:bodyPr>
-          <a:lstStyle/>
-          <a:p>
-            <a:pPr algn="l"/>
-            <a:r>
-              <a:rPr sz="1200" b="0" i="0">
-                <a:solidFill>
-                  <a:srgbClr val="888888"/>
-                </a:solidFill>
-              </a:rPr>
-              <a:t>    – KEM + DSA + HASH 번들: 문의 필요 (통상 $20k~$80k NRE)</a:t>
-            </a:r>
-          </a:p>
-        </p:txBody>
-      </p:sp>
-      <p:sp>
-        <p:nvSpPr>
-          <p:cNvPr id="12" name="TextBox 11"/>
-          <p:cNvSpPr txBox="1"/>
-          <p:nvPr/>
-        </p:nvSpPr>
-        <p:spPr>
-          <a:xfrm>
-            <a:off x="347472" y="2496311"/>
-            <a:ext cx="5486400" cy="347472"/>
-          </a:xfrm>
-          <a:prstGeom prst="rect">
-            <a:avLst/>
-          </a:prstGeom>
-          <a:noFill/>
-        </p:spPr>
-        <p:txBody>
-          <a:bodyPr wrap="square">
-            <a:spAutoFit/>
-          </a:bodyPr>
-          <a:lstStyle/>
-          <a:p>
-            <a:pPr algn="l"/>
-            <a:r>
-              <a:rPr sz="1250" b="0" i="0">
-                <a:solidFill>
-                  <a:srgbClr val="1A1A1A"/>
-                </a:solidFill>
-              </a:rPr>
-              <a:t>  ▪ Host Gateway FPGA (AMD Alveo U250급)</a:t>
-            </a:r>
-          </a:p>
-        </p:txBody>
-      </p:sp>
-      <p:sp>
-        <p:nvSpPr>
-          <p:cNvPr id="13" name="TextBox 12"/>
-          <p:cNvSpPr txBox="1"/>
-          <p:nvPr/>
-        </p:nvSpPr>
-        <p:spPr>
-          <a:xfrm>
-            <a:off x="347472" y="2825495"/>
-            <a:ext cx="5486400" cy="347472"/>
-          </a:xfrm>
-          <a:prstGeom prst="rect">
-            <a:avLst/>
-          </a:prstGeom>
-          <a:noFill/>
-        </p:spPr>
-        <p:txBody>
-          <a:bodyPr wrap="square">
-            <a:spAutoFit/>
-          </a:bodyPr>
-          <a:lstStyle/>
-          <a:p>
-            <a:pPr algn="l"/>
-            <a:r>
-              <a:rPr sz="1200" b="0" i="0">
-                <a:solidFill>
-                  <a:srgbClr val="888888"/>
-                </a:solidFill>
-              </a:rPr>
-              <a:t>    – 약 $3,000~$5,000 / 대 (수량 할인 가능)</a:t>
-            </a:r>
-          </a:p>
-        </p:txBody>
-      </p:sp>
-      <p:sp>
-        <p:nvSpPr>
-          <p:cNvPr id="14" name="TextBox 13"/>
-          <p:cNvSpPr txBox="1"/>
-          <p:nvPr/>
-        </p:nvSpPr>
-        <p:spPr>
-          <a:xfrm>
-            <a:off x="347472" y="3154679"/>
-            <a:ext cx="5486400" cy="347472"/>
-          </a:xfrm>
-          <a:prstGeom prst="rect">
-            <a:avLst/>
-          </a:prstGeom>
-          <a:noFill/>
-        </p:spPr>
-        <p:txBody>
-          <a:bodyPr wrap="square">
-            <a:spAutoFit/>
-          </a:bodyPr>
-          <a:lstStyle/>
-          <a:p>
-            <a:pPr algn="l"/>
-            <a:r>
-              <a:rPr sz="1250" b="0" i="0">
-                <a:solidFill>
-                  <a:srgbClr val="1A1A1A"/>
-                </a:solidFill>
-              </a:rPr>
-              <a:t>  ▪ Device Gateway FPGA 모듈 (Artix-7 기반)</a:t>
-            </a:r>
-          </a:p>
-        </p:txBody>
-      </p:sp>
-      <p:sp>
-        <p:nvSpPr>
-          <p:cNvPr id="15" name="TextBox 14"/>
-          <p:cNvSpPr txBox="1"/>
-          <p:nvPr/>
-        </p:nvSpPr>
-        <p:spPr>
-          <a:xfrm>
-            <a:off x="347472" y="3483863"/>
-            <a:ext cx="5486400" cy="347472"/>
-          </a:xfrm>
-          <a:prstGeom prst="rect">
-            <a:avLst/>
-          </a:prstGeom>
-          <a:noFill/>
-        </p:spPr>
-        <p:txBody>
-          <a:bodyPr wrap="square">
-            <a:spAutoFit/>
-          </a:bodyPr>
-          <a:lstStyle/>
-          <a:p>
-            <a:pPr algn="l"/>
-            <a:r>
-              <a:rPr sz="1200" b="0" i="0">
-                <a:solidFill>
-                  <a:srgbClr val="888888"/>
-                </a:solidFill>
-              </a:rPr>
-              <a:t>    – BOM 부품: FPGA $30~$60 + PHY $5 + 기타 $10</a:t>
-            </a:r>
-          </a:p>
-        </p:txBody>
-      </p:sp>
-      <p:sp>
-        <p:nvSpPr>
-          <p:cNvPr id="16" name="TextBox 15"/>
-          <p:cNvSpPr txBox="1"/>
-          <p:nvPr/>
-        </p:nvSpPr>
-        <p:spPr>
-          <a:xfrm>
-            <a:off x="347472" y="3813047"/>
-            <a:ext cx="5486400" cy="347472"/>
-          </a:xfrm>
-          <a:prstGeom prst="rect">
-            <a:avLst/>
-          </a:prstGeom>
-          <a:noFill/>
-        </p:spPr>
-        <p:txBody>
-          <a:bodyPr wrap="square">
-            <a:spAutoFit/>
-          </a:bodyPr>
-          <a:lstStyle/>
-          <a:p>
-            <a:pPr algn="l"/>
-            <a:r>
-              <a:rPr sz="1200" b="0" i="0">
-                <a:solidFill>
-                  <a:srgbClr val="888888"/>
-                </a:solidFill>
-              </a:rPr>
-              <a:t>    – PCB 설계 + 제조 + 조립: 약 $50~$100 / 대 (100대 기준)</a:t>
-            </a:r>
-          </a:p>
-        </p:txBody>
-      </p:sp>
-      <p:sp>
-        <p:nvSpPr>
-          <p:cNvPr id="17" name="TextBox 16"/>
-          <p:cNvSpPr txBox="1"/>
-          <p:nvPr/>
-        </p:nvSpPr>
-        <p:spPr>
-          <a:xfrm>
-            <a:off x="347472" y="4142231"/>
-            <a:ext cx="5486400" cy="347472"/>
-          </a:xfrm>
-          <a:prstGeom prst="rect">
-            <a:avLst/>
-          </a:prstGeom>
-          <a:noFill/>
-        </p:spPr>
-        <p:txBody>
-          <a:bodyPr wrap="square">
-            <a:spAutoFit/>
-          </a:bodyPr>
-          <a:lstStyle/>
-          <a:p>
-            <a:pPr algn="l"/>
-            <a:r>
-              <a:rPr sz="1250" b="0" i="0">
-                <a:solidFill>
-                  <a:srgbClr val="1A1A1A"/>
-                </a:solidFill>
-              </a:rPr>
-              <a:t>  ▪ 개발 공수 (8개월)</a:t>
-            </a:r>
-          </a:p>
-        </p:txBody>
-      </p:sp>
-      <p:sp>
-        <p:nvSpPr>
-          <p:cNvPr id="18" name="TextBox 17"/>
-          <p:cNvSpPr txBox="1"/>
-          <p:nvPr/>
-        </p:nvSpPr>
-        <p:spPr>
-          <a:xfrm>
-            <a:off x="347472" y="4471416"/>
-            <a:ext cx="5486400" cy="347472"/>
-          </a:xfrm>
-          <a:prstGeom prst="rect">
-            <a:avLst/>
-          </a:prstGeom>
-          <a:noFill/>
-        </p:spPr>
-        <p:txBody>
-          <a:bodyPr wrap="square">
-            <a:spAutoFit/>
-          </a:bodyPr>
-          <a:lstStyle/>
-          <a:p>
-            <a:pPr algn="l"/>
-            <a:r>
-              <a:rPr sz="1200" b="0" i="0">
-                <a:solidFill>
-                  <a:srgbClr val="888888"/>
-                </a:solidFill>
-              </a:rPr>
-              <a:t>    – FPGA 엔지니어 2명 + 펌웨어 1명 + 테스트 1명</a:t>
-            </a:r>
-          </a:p>
-        </p:txBody>
-      </p:sp>
-      <p:sp>
-        <p:nvSpPr>
-          <p:cNvPr id="19" name="Rectangle 18"/>
-          <p:cNvSpPr/>
-          <p:nvPr/>
-        </p:nvSpPr>
-        <p:spPr>
-          <a:xfrm>
-            <a:off x="6035040" y="1325880"/>
-            <a:ext cx="5852160" cy="4846320"/>
-          </a:xfrm>
-          <a:prstGeom prst="rect">
-            <a:avLst/>
-          </a:prstGeom>
-          <a:solidFill>
-            <a:srgbClr val="F0F4F9"/>
-          </a:solidFill>
-          <a:ln w="9525">
-            <a:solidFill>
-              <a:srgbClr val="D6E4F4"/>
-            </a:solidFill>
-          </a:ln>
-        </p:spPr>
-        <p:style>
-          <a:lnRef idx="1">
-            <a:schemeClr val="accent1"/>
-          </a:lnRef>
-          <a:fillRef idx="3">
-            <a:schemeClr val="accent1"/>
-          </a:fillRef>
-          <a:effectRef idx="2">
-            <a:schemeClr val="accent1"/>
-          </a:effectRef>
-          <a:fontRef idx="minor">
-            <a:schemeClr val="lt1"/>
-          </a:fontRef>
-        </p:style>
-        <p:txBody>
-          <a:bodyPr rtlCol="0" anchor="ctr"/>
-          <a:lstStyle/>
-          <a:p>
-            <a:pPr algn="ctr"/>
-          </a:p>
-        </p:txBody>
-      </p:sp>
-      <p:sp>
-        <p:nvSpPr>
-          <p:cNvPr id="20" name="TextBox 19"/>
+            <a:endParaRPr/>
+          </a:p>
+        </p:txBody>
+      </p:sp>
+      <p:sp>
+        <p:nvSpPr>
+          <p:cNvPr id="22" name="TextBox 21"/>
           <p:cNvSpPr txBox="1"/>
           <p:nvPr/>
         </p:nvSpPr>
@@ -6596,14 +5373,14 @@
                   <a:srgbClr val="1E3A5F"/>
                 </a:solidFill>
               </a:rPr>
-              <a:t>핵심 부품 목록</a:t>
-            </a:r>
-          </a:p>
-        </p:txBody>
-      </p:sp>
-      <p:sp>
-        <p:nvSpPr>
-          <p:cNvPr id="21" name="TextBox 20"/>
+              <a:t>보안 표준 준수</a:t>
+            </a:r>
+          </a:p>
+        </p:txBody>
+      </p:sp>
+      <p:sp>
+        <p:nvSpPr>
+          <p:cNvPr id="23" name="TextBox 22"/>
           <p:cNvSpPr txBox="1"/>
           <p:nvPr/>
         </p:nvSpPr>
@@ -6630,14 +5407,14 @@
                   <a:srgbClr val="1A1A1A"/>
                 </a:solidFill>
               </a:rPr>
-              <a:t>  ▪ Host Gateway (1대)</a:t>
-            </a:r>
-          </a:p>
-        </p:txBody>
-      </p:sp>
-      <p:sp>
-        <p:nvSpPr>
-          <p:cNvPr id="22" name="TextBox 21"/>
+              <a:t>  ▪ NIST FIPS 203 (ML-KEM) 준수 구현</a:t>
+            </a:r>
+          </a:p>
+        </p:txBody>
+      </p:sp>
+      <p:sp>
+        <p:nvSpPr>
+          <p:cNvPr id="24" name="TextBox 23"/>
           <p:cNvSpPr txBox="1"/>
           <p:nvPr/>
         </p:nvSpPr>
@@ -6664,14 +5441,14 @@
                   <a:srgbClr val="888888"/>
                 </a:solidFill>
               </a:rPr>
-              <a:t>    – AMD/Xilinx Alveo U250 FPGA 보드</a:t>
-            </a:r>
-          </a:p>
-        </p:txBody>
-      </p:sp>
-      <p:sp>
-        <p:nvSpPr>
-          <p:cNvPr id="23" name="TextBox 22"/>
+              <a:t>    – xQlave IP: CAVP 테스트 벡터 통과</a:t>
+            </a:r>
+          </a:p>
+        </p:txBody>
+      </p:sp>
+      <p:sp>
+        <p:nvSpPr>
+          <p:cNvPr id="25" name="TextBox 24"/>
           <p:cNvSpPr txBox="1"/>
           <p:nvPr/>
         </p:nvSpPr>
@@ -6693,19 +5470,19 @@
           <a:p>
             <a:pPr algn="l"/>
             <a:r>
-              <a:rPr sz="1200" b="0" i="0">
-                <a:solidFill>
-                  <a:srgbClr val="888888"/>
-                </a:solidFill>
-              </a:rPr>
-              <a:t>    – xQlave IP 코어 (KEM/DSA/HASH)</a:t>
-            </a:r>
-          </a:p>
-        </p:txBody>
-      </p:sp>
-      <p:sp>
-        <p:nvSpPr>
-          <p:cNvPr id="24" name="TextBox 23"/>
+              <a:rPr sz="1250" b="0" i="0">
+                <a:solidFill>
+                  <a:srgbClr val="1A1A1A"/>
+                </a:solidFill>
+              </a:rPr>
+              <a:t>  ▪ 부채널 공격(SCA) 방어</a:t>
+            </a:r>
+          </a:p>
+        </p:txBody>
+      </p:sp>
+      <p:sp>
+        <p:nvSpPr>
+          <p:cNvPr id="26" name="TextBox 25"/>
           <p:cNvSpPr txBox="1"/>
           <p:nvPr/>
         </p:nvSpPr>
@@ -6732,14 +5509,14 @@
                   <a:srgbClr val="888888"/>
                 </a:solidFill>
               </a:rPr>
-              <a:t>    – QSFP28 트랜시버 × 4</a:t>
-            </a:r>
-          </a:p>
-        </p:txBody>
-      </p:sp>
-      <p:sp>
-        <p:nvSpPr>
-          <p:cNvPr id="25" name="TextBox 24"/>
+              <a:t>    – xQlave: 타이밍 불변(constant-time) 설계</a:t>
+            </a:r>
+          </a:p>
+        </p:txBody>
+      </p:sp>
+      <p:sp>
+        <p:nvSpPr>
+          <p:cNvPr id="27" name="TextBox 26"/>
           <p:cNvSpPr txBox="1"/>
           <p:nvPr/>
         </p:nvSpPr>
@@ -6761,19 +5538,19 @@
           <a:p>
             <a:pPr algn="l"/>
             <a:r>
-              <a:rPr sz="1250" b="0" i="0">
-                <a:solidFill>
-                  <a:srgbClr val="1A1A1A"/>
-                </a:solidFill>
-              </a:rPr>
-              <a:t>  ▪ Device Gateway (×100대)</a:t>
-            </a:r>
-          </a:p>
-        </p:txBody>
-      </p:sp>
-      <p:sp>
-        <p:nvSpPr>
-          <p:cNvPr id="26" name="TextBox 25"/>
+              <a:rPr sz="1200" b="0" i="0">
+                <a:solidFill>
+                  <a:srgbClr val="888888"/>
+                </a:solidFill>
+              </a:rPr>
+              <a:t>    – 전력 분석 대응 마스킹 옵션 제공</a:t>
+            </a:r>
+          </a:p>
+        </p:txBody>
+      </p:sp>
+      <p:sp>
+        <p:nvSpPr>
+          <p:cNvPr id="28" name="TextBox 27"/>
           <p:cNvSpPr txBox="1"/>
           <p:nvPr/>
         </p:nvSpPr>
@@ -6795,19 +5572,19 @@
           <a:p>
             <a:pPr algn="l"/>
             <a:r>
-              <a:rPr sz="1200" b="0" i="0">
-                <a:solidFill>
-                  <a:srgbClr val="888888"/>
-                </a:solidFill>
-              </a:rPr>
-              <a:t>    – Artix-7 FPGA 칩 (XC7A100T 등)</a:t>
-            </a:r>
-          </a:p>
-        </p:txBody>
-      </p:sp>
-      <p:sp>
-        <p:nvSpPr>
-          <p:cNvPr id="27" name="TextBox 26"/>
+              <a:rPr sz="1250" b="0" i="0">
+                <a:solidFill>
+                  <a:srgbClr val="1A1A1A"/>
+                </a:solidFill>
+              </a:rPr>
+              <a:t>  ▪ 펌웨어 보안</a:t>
+            </a:r>
+          </a:p>
+        </p:txBody>
+      </p:sp>
+      <p:sp>
+        <p:nvSpPr>
+          <p:cNvPr id="29" name="TextBox 28"/>
           <p:cNvSpPr txBox="1"/>
           <p:nvPr/>
         </p:nvSpPr>
@@ -6834,14 +5611,14 @@
                   <a:srgbClr val="888888"/>
                 </a:solidFill>
               </a:rPr>
-              <a:t>    – GbE PHY 칩 (Marvell 88E1111 등)</a:t>
-            </a:r>
-          </a:p>
-        </p:txBody>
-      </p:sp>
-      <p:sp>
-        <p:nvSpPr>
-          <p:cNvPr id="28" name="TextBox 27"/>
+              <a:t>    – FPGA 비트스트림 서명 검증 (안전한 부팅)</a:t>
+            </a:r>
+          </a:p>
+        </p:txBody>
+      </p:sp>
+      <p:sp>
+        <p:nvSpPr>
+          <p:cNvPr id="30" name="TextBox 29"/>
           <p:cNvSpPr txBox="1"/>
           <p:nvPr/>
         </p:nvSpPr>
@@ -6868,14 +5645,14 @@
                   <a:srgbClr val="888888"/>
                 </a:solidFill>
               </a:rPr>
-              <a:t>    – 인터페이스 커넥터 (RJ45 × 2)</a:t>
-            </a:r>
-          </a:p>
-        </p:txBody>
-      </p:sp>
-      <p:sp>
-        <p:nvSpPr>
-          <p:cNvPr id="29" name="TextBox 28"/>
+              <a:t>    – 원격 업데이트: TLS 1.3 + ML-DSA 서명 필수</a:t>
+            </a:r>
+          </a:p>
+        </p:txBody>
+      </p:sp>
+      <p:sp>
+        <p:nvSpPr>
+          <p:cNvPr id="31" name="TextBox 30"/>
           <p:cNvSpPr txBox="1"/>
           <p:nvPr/>
         </p:nvSpPr>
@@ -6897,19 +5674,19 @@
           <a:p>
             <a:pPr algn="l"/>
             <a:r>
-              <a:rPr sz="1200" b="0" i="0">
-                <a:solidFill>
-                  <a:srgbClr val="888888"/>
-                </a:solidFill>
-              </a:rPr>
-              <a:t>    – 32MB Flash (펌웨어 저장)</a:t>
-            </a:r>
-          </a:p>
-        </p:txBody>
-      </p:sp>
-      <p:sp>
-        <p:nvSpPr>
-          <p:cNvPr id="30" name="TextBox 29"/>
+              <a:rPr sz="1250" b="0" i="0">
+                <a:solidFill>
+                  <a:srgbClr val="1A1A1A"/>
+                </a:solidFill>
+              </a:rPr>
+              <a:t>  ▪ 물리 보안</a:t>
+            </a:r>
+          </a:p>
+        </p:txBody>
+      </p:sp>
+      <p:sp>
+        <p:nvSpPr>
+          <p:cNvPr id="32" name="TextBox 31"/>
           <p:cNvSpPr txBox="1"/>
           <p:nvPr/>
         </p:nvSpPr>
@@ -6936,1136 +5713,6 @@
                   <a:srgbClr val="888888"/>
                 </a:solidFill>
               </a:rPr>
-              <a:t>    – 소형 PCB (50×80mm 예상)</a:t>
-            </a:r>
-          </a:p>
-        </p:txBody>
-      </p:sp>
-    </p:spTree>
-  </p:cSld>
-  <p:clrMapOvr>
-    <a:masterClrMapping/>
-  </p:clrMapOvr>
-</p:sld>
-</file>
-
-<file path=ppt/slides/slide13.xml><?xml version="1.0" encoding="utf-8"?>
-<p:sld xmlns:a="http://schemas.openxmlformats.org/drawingml/2006/main" xmlns:p="http://schemas.openxmlformats.org/presentationml/2006/main" xmlns:r="http://schemas.openxmlformats.org/officeDocument/2006/relationships">
-  <p:cSld>
-    <p:spTree>
-      <p:nvGrpSpPr>
-        <p:cNvPr id="1" name=""/>
-        <p:cNvGrpSpPr/>
-        <p:nvPr/>
-      </p:nvGrpSpPr>
-      <p:grpSpPr/>
-      <p:sp>
-        <p:nvSpPr>
-          <p:cNvPr id="2" name="Rectangle 1"/>
-          <p:cNvSpPr/>
-          <p:nvPr/>
-        </p:nvSpPr>
-        <p:spPr>
-          <a:xfrm>
-            <a:off x="0" y="0"/>
-            <a:ext cx="12188952" cy="6858000"/>
-          </a:xfrm>
-          <a:prstGeom prst="rect">
-            <a:avLst/>
-          </a:prstGeom>
-          <a:solidFill>
-            <a:srgbClr val="FFFFFF"/>
-          </a:solidFill>
-          <a:ln>
-            <a:noFill/>
-          </a:ln>
-        </p:spPr>
-        <p:style>
-          <a:lnRef idx="1">
-            <a:schemeClr val="accent1"/>
-          </a:lnRef>
-          <a:fillRef idx="3">
-            <a:schemeClr val="accent1"/>
-          </a:fillRef>
-          <a:effectRef idx="2">
-            <a:schemeClr val="accent1"/>
-          </a:effectRef>
-          <a:fontRef idx="minor">
-            <a:schemeClr val="lt1"/>
-          </a:fontRef>
-        </p:style>
-        <p:txBody>
-          <a:bodyPr rtlCol="0" anchor="ctr"/>
-          <a:lstStyle/>
-          <a:p>
-            <a:pPr algn="ctr"/>
-          </a:p>
-        </p:txBody>
-      </p:sp>
-      <p:sp>
-        <p:nvSpPr>
-          <p:cNvPr id="3" name="Rectangle 2"/>
-          <p:cNvSpPr/>
-          <p:nvPr/>
-        </p:nvSpPr>
-        <p:spPr>
-          <a:xfrm>
-            <a:off x="0" y="0"/>
-            <a:ext cx="12188952" cy="73152"/>
-          </a:xfrm>
-          <a:prstGeom prst="rect">
-            <a:avLst/>
-          </a:prstGeom>
-          <a:solidFill>
-            <a:srgbClr val="1E6FBF"/>
-          </a:solidFill>
-          <a:ln>
-            <a:noFill/>
-          </a:ln>
-        </p:spPr>
-        <p:style>
-          <a:lnRef idx="1">
-            <a:schemeClr val="accent1"/>
-          </a:lnRef>
-          <a:fillRef idx="3">
-            <a:schemeClr val="accent1"/>
-          </a:fillRef>
-          <a:effectRef idx="2">
-            <a:schemeClr val="accent1"/>
-          </a:effectRef>
-          <a:fontRef idx="minor">
-            <a:schemeClr val="lt1"/>
-          </a:fontRef>
-        </p:style>
-        <p:txBody>
-          <a:bodyPr rtlCol="0" anchor="ctr"/>
-          <a:lstStyle/>
-          <a:p>
-            <a:pPr algn="ctr"/>
-          </a:p>
-        </p:txBody>
-      </p:sp>
-      <p:sp>
-        <p:nvSpPr>
-          <p:cNvPr id="4" name="Rectangle 3"/>
-          <p:cNvSpPr/>
-          <p:nvPr/>
-        </p:nvSpPr>
-        <p:spPr>
-          <a:xfrm>
-            <a:off x="0" y="73152"/>
-            <a:ext cx="12188952" cy="1097280"/>
-          </a:xfrm>
-          <a:prstGeom prst="rect">
-            <a:avLst/>
-          </a:prstGeom>
-          <a:solidFill>
-            <a:srgbClr val="F0F4F9"/>
-          </a:solidFill>
-          <a:ln>
-            <a:noFill/>
-          </a:ln>
-        </p:spPr>
-        <p:style>
-          <a:lnRef idx="1">
-            <a:schemeClr val="accent1"/>
-          </a:lnRef>
-          <a:fillRef idx="3">
-            <a:schemeClr val="accent1"/>
-          </a:fillRef>
-          <a:effectRef idx="2">
-            <a:schemeClr val="accent1"/>
-          </a:effectRef>
-          <a:fontRef idx="minor">
-            <a:schemeClr val="lt1"/>
-          </a:fontRef>
-        </p:style>
-        <p:txBody>
-          <a:bodyPr rtlCol="0" anchor="ctr"/>
-          <a:lstStyle/>
-          <a:p>
-            <a:pPr algn="ctr"/>
-          </a:p>
-        </p:txBody>
-      </p:sp>
-      <p:sp>
-        <p:nvSpPr>
-          <p:cNvPr id="5" name="TextBox 4"/>
-          <p:cNvSpPr txBox="1"/>
-          <p:nvPr/>
-        </p:nvSpPr>
-        <p:spPr>
-          <a:xfrm>
-            <a:off x="365760" y="137160"/>
-            <a:ext cx="11430000" cy="658368"/>
-          </a:xfrm>
-          <a:prstGeom prst="rect">
-            <a:avLst/>
-          </a:prstGeom>
-          <a:noFill/>
-        </p:spPr>
-        <p:txBody>
-          <a:bodyPr wrap="square">
-            <a:spAutoFit/>
-          </a:bodyPr>
-          <a:lstStyle/>
-          <a:p>
-            <a:pPr algn="l"/>
-            <a:r>
-              <a:rPr sz="2400" b="1" i="0">
-                <a:solidFill>
-                  <a:srgbClr val="1E3A5F"/>
-                </a:solidFill>
-              </a:rPr>
-              <a:t>보안 고려사항 및 위협 모델</a:t>
-            </a:r>
-          </a:p>
-        </p:txBody>
-      </p:sp>
-      <p:sp>
-        <p:nvSpPr>
-          <p:cNvPr id="6" name="TextBox 5"/>
-          <p:cNvSpPr txBox="1"/>
-          <p:nvPr/>
-        </p:nvSpPr>
-        <p:spPr>
-          <a:xfrm>
-            <a:off x="365760" y="749808"/>
-            <a:ext cx="11430000" cy="384048"/>
-          </a:xfrm>
-          <a:prstGeom prst="rect">
-            <a:avLst/>
-          </a:prstGeom>
-          <a:noFill/>
-        </p:spPr>
-        <p:txBody>
-          <a:bodyPr wrap="square">
-            <a:spAutoFit/>
-          </a:bodyPr>
-          <a:lstStyle/>
-          <a:p>
-            <a:pPr algn="l"/>
-            <a:r>
-              <a:rPr sz="1200" b="0" i="1">
-                <a:solidFill>
-                  <a:srgbClr val="888888"/>
-                </a:solidFill>
-              </a:rPr>
-              <a:t>Security Considerations</a:t>
-            </a:r>
-          </a:p>
-        </p:txBody>
-      </p:sp>
-      <p:sp>
-        <p:nvSpPr>
-          <p:cNvPr id="7" name="Rectangle 6"/>
-          <p:cNvSpPr/>
-          <p:nvPr/>
-        </p:nvSpPr>
-        <p:spPr>
-          <a:xfrm>
-            <a:off x="0" y="1170432"/>
-            <a:ext cx="12188952" cy="36576"/>
-          </a:xfrm>
-          <a:prstGeom prst="rect">
-            <a:avLst/>
-          </a:prstGeom>
-          <a:solidFill>
-            <a:srgbClr val="D6E4F4"/>
-          </a:solidFill>
-          <a:ln>
-            <a:noFill/>
-          </a:ln>
-        </p:spPr>
-        <p:style>
-          <a:lnRef idx="1">
-            <a:schemeClr val="accent1"/>
-          </a:lnRef>
-          <a:fillRef idx="3">
-            <a:schemeClr val="accent1"/>
-          </a:fillRef>
-          <a:effectRef idx="2">
-            <a:schemeClr val="accent1"/>
-          </a:effectRef>
-          <a:fontRef idx="minor">
-            <a:schemeClr val="lt1"/>
-          </a:fontRef>
-        </p:style>
-        <p:txBody>
-          <a:bodyPr rtlCol="0" anchor="ctr"/>
-          <a:lstStyle/>
-          <a:p>
-            <a:pPr algn="ctr"/>
-          </a:p>
-        </p:txBody>
-      </p:sp>
-      <p:sp>
-        <p:nvSpPr>
-          <p:cNvPr id="8" name="Rectangle 7"/>
-          <p:cNvSpPr/>
-          <p:nvPr/>
-        </p:nvSpPr>
-        <p:spPr>
-          <a:xfrm>
-            <a:off x="274320" y="1325880"/>
-            <a:ext cx="5669280" cy="4846320"/>
-          </a:xfrm>
-          <a:prstGeom prst="rect">
-            <a:avLst/>
-          </a:prstGeom>
-          <a:solidFill>
-            <a:srgbClr val="F0F4F9"/>
-          </a:solidFill>
-          <a:ln w="9525">
-            <a:solidFill>
-              <a:srgbClr val="D6E4F4"/>
-            </a:solidFill>
-          </a:ln>
-        </p:spPr>
-        <p:style>
-          <a:lnRef idx="1">
-            <a:schemeClr val="accent1"/>
-          </a:lnRef>
-          <a:fillRef idx="3">
-            <a:schemeClr val="accent1"/>
-          </a:fillRef>
-          <a:effectRef idx="2">
-            <a:schemeClr val="accent1"/>
-          </a:effectRef>
-          <a:fontRef idx="minor">
-            <a:schemeClr val="lt1"/>
-          </a:fontRef>
-        </p:style>
-        <p:txBody>
-          <a:bodyPr rtlCol="0" anchor="ctr"/>
-          <a:lstStyle/>
-          <a:p>
-            <a:pPr algn="ctr"/>
-          </a:p>
-        </p:txBody>
-      </p:sp>
-      <p:sp>
-        <p:nvSpPr>
-          <p:cNvPr id="9" name="TextBox 8"/>
-          <p:cNvSpPr txBox="1"/>
-          <p:nvPr/>
-        </p:nvSpPr>
-        <p:spPr>
-          <a:xfrm>
-            <a:off x="384048" y="1435607"/>
-            <a:ext cx="5440680" cy="365760"/>
-          </a:xfrm>
-          <a:prstGeom prst="rect">
-            <a:avLst/>
-          </a:prstGeom>
-          <a:noFill/>
-        </p:spPr>
-        <p:txBody>
-          <a:bodyPr wrap="square">
-            <a:spAutoFit/>
-          </a:bodyPr>
-          <a:lstStyle/>
-          <a:p>
-            <a:pPr algn="l"/>
-            <a:r>
-              <a:rPr sz="1300" b="1" i="0">
-                <a:solidFill>
-                  <a:srgbClr val="1E3A5F"/>
-                </a:solidFill>
-              </a:rPr>
-              <a:t>위협 및 대응</a:t>
-            </a:r>
-          </a:p>
-        </p:txBody>
-      </p:sp>
-      <p:sp>
-        <p:nvSpPr>
-          <p:cNvPr id="10" name="TextBox 9"/>
-          <p:cNvSpPr txBox="1"/>
-          <p:nvPr/>
-        </p:nvSpPr>
-        <p:spPr>
-          <a:xfrm>
-            <a:off x="347472" y="1837943"/>
-            <a:ext cx="5486400" cy="347472"/>
-          </a:xfrm>
-          <a:prstGeom prst="rect">
-            <a:avLst/>
-          </a:prstGeom>
-          <a:noFill/>
-        </p:spPr>
-        <p:txBody>
-          <a:bodyPr wrap="square">
-            <a:spAutoFit/>
-          </a:bodyPr>
-          <a:lstStyle/>
-          <a:p>
-            <a:pPr algn="l"/>
-            <a:r>
-              <a:rPr sz="1250" b="0" i="0">
-                <a:solidFill>
-                  <a:srgbClr val="1A1A1A"/>
-                </a:solidFill>
-              </a:rPr>
-              <a:t>  ▪ 통신 구간 도청 (Man-in-the-Middle)</a:t>
-            </a:r>
-          </a:p>
-        </p:txBody>
-      </p:sp>
-      <p:sp>
-        <p:nvSpPr>
-          <p:cNvPr id="11" name="TextBox 10"/>
-          <p:cNvSpPr txBox="1"/>
-          <p:nvPr/>
-        </p:nvSpPr>
-        <p:spPr>
-          <a:xfrm>
-            <a:off x="347472" y="2167127"/>
-            <a:ext cx="5486400" cy="347472"/>
-          </a:xfrm>
-          <a:prstGeom prst="rect">
-            <a:avLst/>
-          </a:prstGeom>
-          <a:noFill/>
-        </p:spPr>
-        <p:txBody>
-          <a:bodyPr wrap="square">
-            <a:spAutoFit/>
-          </a:bodyPr>
-          <a:lstStyle/>
-          <a:p>
-            <a:pPr algn="l"/>
-            <a:r>
-              <a:rPr sz="1200" b="0" i="0">
-                <a:solidFill>
-                  <a:srgbClr val="888888"/>
-                </a:solidFill>
-              </a:rPr>
-              <a:t>    – ML-KEM 키 교환: 양자 컴퓨터로도 해독 불가 (NIST 표준)</a:t>
-            </a:r>
-          </a:p>
-        </p:txBody>
-      </p:sp>
-      <p:sp>
-        <p:nvSpPr>
-          <p:cNvPr id="12" name="TextBox 11"/>
-          <p:cNvSpPr txBox="1"/>
-          <p:nvPr/>
-        </p:nvSpPr>
-        <p:spPr>
-          <a:xfrm>
-            <a:off x="347472" y="2496311"/>
-            <a:ext cx="5486400" cy="347472"/>
-          </a:xfrm>
-          <a:prstGeom prst="rect">
-            <a:avLst/>
-          </a:prstGeom>
-          <a:noFill/>
-        </p:spPr>
-        <p:txBody>
-          <a:bodyPr wrap="square">
-            <a:spAutoFit/>
-          </a:bodyPr>
-          <a:lstStyle/>
-          <a:p>
-            <a:pPr algn="l"/>
-            <a:r>
-              <a:rPr sz="1200" b="0" i="0">
-                <a:solidFill>
-                  <a:srgbClr val="888888"/>
-                </a:solidFill>
-              </a:rPr>
-              <a:t>    – AES-256-GCM: 무결성 + 기밀성 동시 보장</a:t>
-            </a:r>
-          </a:p>
-        </p:txBody>
-      </p:sp>
-      <p:sp>
-        <p:nvSpPr>
-          <p:cNvPr id="13" name="TextBox 12"/>
-          <p:cNvSpPr txBox="1"/>
-          <p:nvPr/>
-        </p:nvSpPr>
-        <p:spPr>
-          <a:xfrm>
-            <a:off x="347472" y="2825495"/>
-            <a:ext cx="5486400" cy="347472"/>
-          </a:xfrm>
-          <a:prstGeom prst="rect">
-            <a:avLst/>
-          </a:prstGeom>
-          <a:noFill/>
-        </p:spPr>
-        <p:txBody>
-          <a:bodyPr wrap="square">
-            <a:spAutoFit/>
-          </a:bodyPr>
-          <a:lstStyle/>
-          <a:p>
-            <a:pPr algn="l"/>
-            <a:r>
-              <a:rPr sz="1250" b="0" i="0">
-                <a:solidFill>
-                  <a:srgbClr val="1A1A1A"/>
-                </a:solidFill>
-              </a:rPr>
-              <a:t>  ▪ 재전송 공격 (Replay Attack)</a:t>
-            </a:r>
-          </a:p>
-        </p:txBody>
-      </p:sp>
-      <p:sp>
-        <p:nvSpPr>
-          <p:cNvPr id="14" name="TextBox 13"/>
-          <p:cNvSpPr txBox="1"/>
-          <p:nvPr/>
-        </p:nvSpPr>
-        <p:spPr>
-          <a:xfrm>
-            <a:off x="347472" y="3154679"/>
-            <a:ext cx="5486400" cy="347472"/>
-          </a:xfrm>
-          <a:prstGeom prst="rect">
-            <a:avLst/>
-          </a:prstGeom>
-          <a:noFill/>
-        </p:spPr>
-        <p:txBody>
-          <a:bodyPr wrap="square">
-            <a:spAutoFit/>
-          </a:bodyPr>
-          <a:lstStyle/>
-          <a:p>
-            <a:pPr algn="l"/>
-            <a:r>
-              <a:rPr sz="1200" b="0" i="0">
-                <a:solidFill>
-                  <a:srgbClr val="888888"/>
-                </a:solidFill>
-              </a:rPr>
-              <a:t>    – 각 패킷에 단조 증가 시퀀스 번호 + GCM 인증 태그</a:t>
-            </a:r>
-          </a:p>
-        </p:txBody>
-      </p:sp>
-      <p:sp>
-        <p:nvSpPr>
-          <p:cNvPr id="15" name="TextBox 14"/>
-          <p:cNvSpPr txBox="1"/>
-          <p:nvPr/>
-        </p:nvSpPr>
-        <p:spPr>
-          <a:xfrm>
-            <a:off x="347472" y="3483863"/>
-            <a:ext cx="5486400" cy="347472"/>
-          </a:xfrm>
-          <a:prstGeom prst="rect">
-            <a:avLst/>
-          </a:prstGeom>
-          <a:noFill/>
-        </p:spPr>
-        <p:txBody>
-          <a:bodyPr wrap="square">
-            <a:spAutoFit/>
-          </a:bodyPr>
-          <a:lstStyle/>
-          <a:p>
-            <a:pPr algn="l"/>
-            <a:r>
-              <a:rPr sz="1250" b="0" i="0">
-                <a:solidFill>
-                  <a:srgbClr val="1A1A1A"/>
-                </a:solidFill>
-              </a:rPr>
-              <a:t>  ▪ 게이트웨이 물리적 탈취</a:t>
-            </a:r>
-          </a:p>
-        </p:txBody>
-      </p:sp>
-      <p:sp>
-        <p:nvSpPr>
-          <p:cNvPr id="16" name="TextBox 15"/>
-          <p:cNvSpPr txBox="1"/>
-          <p:nvPr/>
-        </p:nvSpPr>
-        <p:spPr>
-          <a:xfrm>
-            <a:off x="347472" y="3813047"/>
-            <a:ext cx="5486400" cy="347472"/>
-          </a:xfrm>
-          <a:prstGeom prst="rect">
-            <a:avLst/>
-          </a:prstGeom>
-          <a:noFill/>
-        </p:spPr>
-        <p:txBody>
-          <a:bodyPr wrap="square">
-            <a:spAutoFit/>
-          </a:bodyPr>
-          <a:lstStyle/>
-          <a:p>
-            <a:pPr algn="l"/>
-            <a:r>
-              <a:rPr sz="1200" b="0" i="0">
-                <a:solidFill>
-                  <a:srgbClr val="888888"/>
-                </a:solidFill>
-              </a:rPr>
-              <a:t>    – FPGA Bitstream 암호화 (AES-256 device key)</a:t>
-            </a:r>
-          </a:p>
-        </p:txBody>
-      </p:sp>
-      <p:sp>
-        <p:nvSpPr>
-          <p:cNvPr id="17" name="TextBox 16"/>
-          <p:cNvSpPr txBox="1"/>
-          <p:nvPr/>
-        </p:nvSpPr>
-        <p:spPr>
-          <a:xfrm>
-            <a:off x="347472" y="4142231"/>
-            <a:ext cx="5486400" cy="347472"/>
-          </a:xfrm>
-          <a:prstGeom prst="rect">
-            <a:avLst/>
-          </a:prstGeom>
-          <a:noFill/>
-        </p:spPr>
-        <p:txBody>
-          <a:bodyPr wrap="square">
-            <a:spAutoFit/>
-          </a:bodyPr>
-          <a:lstStyle/>
-          <a:p>
-            <a:pPr algn="l"/>
-            <a:r>
-              <a:rPr sz="1200" b="0" i="0">
-                <a:solidFill>
-                  <a:srgbClr val="888888"/>
-                </a:solidFill>
-              </a:rPr>
-              <a:t>    – 세션 키: BRAM 비휘발성 저장 금지, 전원 차단 시 자동 소거</a:t>
-            </a:r>
-          </a:p>
-        </p:txBody>
-      </p:sp>
-      <p:sp>
-        <p:nvSpPr>
-          <p:cNvPr id="18" name="TextBox 17"/>
-          <p:cNvSpPr txBox="1"/>
-          <p:nvPr/>
-        </p:nvSpPr>
-        <p:spPr>
-          <a:xfrm>
-            <a:off x="347472" y="4471416"/>
-            <a:ext cx="5486400" cy="347472"/>
-          </a:xfrm>
-          <a:prstGeom prst="rect">
-            <a:avLst/>
-          </a:prstGeom>
-          <a:noFill/>
-        </p:spPr>
-        <p:txBody>
-          <a:bodyPr wrap="square">
-            <a:spAutoFit/>
-          </a:bodyPr>
-          <a:lstStyle/>
-          <a:p>
-            <a:pPr algn="l"/>
-            <a:r>
-              <a:rPr sz="1250" b="0" i="0">
-                <a:solidFill>
-                  <a:srgbClr val="1A1A1A"/>
-                </a:solidFill>
-              </a:rPr>
-              <a:t>  ▪ 키 관리 위험</a:t>
-            </a:r>
-          </a:p>
-        </p:txBody>
-      </p:sp>
-      <p:sp>
-        <p:nvSpPr>
-          <p:cNvPr id="19" name="TextBox 18"/>
-          <p:cNvSpPr txBox="1"/>
-          <p:nvPr/>
-        </p:nvSpPr>
-        <p:spPr>
-          <a:xfrm>
-            <a:off x="347472" y="4800600"/>
-            <a:ext cx="5486400" cy="347472"/>
-          </a:xfrm>
-          <a:prstGeom prst="rect">
-            <a:avLst/>
-          </a:prstGeom>
-          <a:noFill/>
-        </p:spPr>
-        <p:txBody>
-          <a:bodyPr wrap="square">
-            <a:spAutoFit/>
-          </a:bodyPr>
-          <a:lstStyle/>
-          <a:p>
-            <a:pPr algn="l"/>
-            <a:r>
-              <a:rPr sz="1200" b="0" i="0">
-                <a:solidFill>
-                  <a:srgbClr val="888888"/>
-                </a:solidFill>
-              </a:rPr>
-              <a:t>    – PFS: 세션마다 신규 KEM 수행</a:t>
-            </a:r>
-          </a:p>
-        </p:txBody>
-      </p:sp>
-      <p:sp>
-        <p:nvSpPr>
-          <p:cNvPr id="20" name="TextBox 19"/>
-          <p:cNvSpPr txBox="1"/>
-          <p:nvPr/>
-        </p:nvSpPr>
-        <p:spPr>
-          <a:xfrm>
-            <a:off x="347472" y="5129784"/>
-            <a:ext cx="5486400" cy="347472"/>
-          </a:xfrm>
-          <a:prstGeom prst="rect">
-            <a:avLst/>
-          </a:prstGeom>
-          <a:noFill/>
-        </p:spPr>
-        <p:txBody>
-          <a:bodyPr wrap="square">
-            <a:spAutoFit/>
-          </a:bodyPr>
-          <a:lstStyle/>
-          <a:p>
-            <a:pPr algn="l"/>
-            <a:r>
-              <a:rPr sz="1200" b="0" i="0">
-                <a:solidFill>
-                  <a:srgbClr val="888888"/>
-                </a:solidFill>
-              </a:rPr>
-              <a:t>    – 정기 재핸드셰이크 (1시간 또는 1GB 데이터마다)</a:t>
-            </a:r>
-          </a:p>
-        </p:txBody>
-      </p:sp>
-      <p:sp>
-        <p:nvSpPr>
-          <p:cNvPr id="21" name="Rectangle 20"/>
-          <p:cNvSpPr/>
-          <p:nvPr/>
-        </p:nvSpPr>
-        <p:spPr>
-          <a:xfrm>
-            <a:off x="6035040" y="1325880"/>
-            <a:ext cx="5852160" cy="4846320"/>
-          </a:xfrm>
-          <a:prstGeom prst="rect">
-            <a:avLst/>
-          </a:prstGeom>
-          <a:solidFill>
-            <a:srgbClr val="F0F4F9"/>
-          </a:solidFill>
-          <a:ln w="9525">
-            <a:solidFill>
-              <a:srgbClr val="D6E4F4"/>
-            </a:solidFill>
-          </a:ln>
-        </p:spPr>
-        <p:style>
-          <a:lnRef idx="1">
-            <a:schemeClr val="accent1"/>
-          </a:lnRef>
-          <a:fillRef idx="3">
-            <a:schemeClr val="accent1"/>
-          </a:fillRef>
-          <a:effectRef idx="2">
-            <a:schemeClr val="accent1"/>
-          </a:effectRef>
-          <a:fontRef idx="minor">
-            <a:schemeClr val="lt1"/>
-          </a:fontRef>
-        </p:style>
-        <p:txBody>
-          <a:bodyPr rtlCol="0" anchor="ctr"/>
-          <a:lstStyle/>
-          <a:p>
-            <a:pPr algn="ctr"/>
-          </a:p>
-        </p:txBody>
-      </p:sp>
-      <p:sp>
-        <p:nvSpPr>
-          <p:cNvPr id="22" name="TextBox 21"/>
-          <p:cNvSpPr txBox="1"/>
-          <p:nvPr/>
-        </p:nvSpPr>
-        <p:spPr>
-          <a:xfrm>
-            <a:off x="6144768" y="1435607"/>
-            <a:ext cx="5623560" cy="365760"/>
-          </a:xfrm>
-          <a:prstGeom prst="rect">
-            <a:avLst/>
-          </a:prstGeom>
-          <a:noFill/>
-        </p:spPr>
-        <p:txBody>
-          <a:bodyPr wrap="square">
-            <a:spAutoFit/>
-          </a:bodyPr>
-          <a:lstStyle/>
-          <a:p>
-            <a:pPr algn="l"/>
-            <a:r>
-              <a:rPr sz="1300" b="1" i="0">
-                <a:solidFill>
-                  <a:srgbClr val="1E3A5F"/>
-                </a:solidFill>
-              </a:rPr>
-              <a:t>보안 표준 준수</a:t>
-            </a:r>
-          </a:p>
-        </p:txBody>
-      </p:sp>
-      <p:sp>
-        <p:nvSpPr>
-          <p:cNvPr id="23" name="TextBox 22"/>
-          <p:cNvSpPr txBox="1"/>
-          <p:nvPr/>
-        </p:nvSpPr>
-        <p:spPr>
-          <a:xfrm>
-            <a:off x="6108192" y="1837943"/>
-            <a:ext cx="5669280" cy="347472"/>
-          </a:xfrm>
-          <a:prstGeom prst="rect">
-            <a:avLst/>
-          </a:prstGeom>
-          <a:noFill/>
-        </p:spPr>
-        <p:txBody>
-          <a:bodyPr wrap="square">
-            <a:spAutoFit/>
-          </a:bodyPr>
-          <a:lstStyle/>
-          <a:p>
-            <a:pPr algn="l"/>
-            <a:r>
-              <a:rPr sz="1250" b="0" i="0">
-                <a:solidFill>
-                  <a:srgbClr val="1A1A1A"/>
-                </a:solidFill>
-              </a:rPr>
-              <a:t>  ▪ NIST FIPS 203 (ML-KEM) 준수 구현</a:t>
-            </a:r>
-          </a:p>
-        </p:txBody>
-      </p:sp>
-      <p:sp>
-        <p:nvSpPr>
-          <p:cNvPr id="24" name="TextBox 23"/>
-          <p:cNvSpPr txBox="1"/>
-          <p:nvPr/>
-        </p:nvSpPr>
-        <p:spPr>
-          <a:xfrm>
-            <a:off x="6108192" y="2167127"/>
-            <a:ext cx="5669280" cy="347472"/>
-          </a:xfrm>
-          <a:prstGeom prst="rect">
-            <a:avLst/>
-          </a:prstGeom>
-          <a:noFill/>
-        </p:spPr>
-        <p:txBody>
-          <a:bodyPr wrap="square">
-            <a:spAutoFit/>
-          </a:bodyPr>
-          <a:lstStyle/>
-          <a:p>
-            <a:pPr algn="l"/>
-            <a:r>
-              <a:rPr sz="1200" b="0" i="0">
-                <a:solidFill>
-                  <a:srgbClr val="888888"/>
-                </a:solidFill>
-              </a:rPr>
-              <a:t>    – xQlave IP: CAVP 테스트 벡터 통과</a:t>
-            </a:r>
-          </a:p>
-        </p:txBody>
-      </p:sp>
-      <p:sp>
-        <p:nvSpPr>
-          <p:cNvPr id="25" name="TextBox 24"/>
-          <p:cNvSpPr txBox="1"/>
-          <p:nvPr/>
-        </p:nvSpPr>
-        <p:spPr>
-          <a:xfrm>
-            <a:off x="6108192" y="2496311"/>
-            <a:ext cx="5669280" cy="347472"/>
-          </a:xfrm>
-          <a:prstGeom prst="rect">
-            <a:avLst/>
-          </a:prstGeom>
-          <a:noFill/>
-        </p:spPr>
-        <p:txBody>
-          <a:bodyPr wrap="square">
-            <a:spAutoFit/>
-          </a:bodyPr>
-          <a:lstStyle/>
-          <a:p>
-            <a:pPr algn="l"/>
-            <a:r>
-              <a:rPr sz="1250" b="0" i="0">
-                <a:solidFill>
-                  <a:srgbClr val="1A1A1A"/>
-                </a:solidFill>
-              </a:rPr>
-              <a:t>  ▪ 부채널 공격(SCA) 방어</a:t>
-            </a:r>
-          </a:p>
-        </p:txBody>
-      </p:sp>
-      <p:sp>
-        <p:nvSpPr>
-          <p:cNvPr id="26" name="TextBox 25"/>
-          <p:cNvSpPr txBox="1"/>
-          <p:nvPr/>
-        </p:nvSpPr>
-        <p:spPr>
-          <a:xfrm>
-            <a:off x="6108192" y="2825495"/>
-            <a:ext cx="5669280" cy="347472"/>
-          </a:xfrm>
-          <a:prstGeom prst="rect">
-            <a:avLst/>
-          </a:prstGeom>
-          <a:noFill/>
-        </p:spPr>
-        <p:txBody>
-          <a:bodyPr wrap="square">
-            <a:spAutoFit/>
-          </a:bodyPr>
-          <a:lstStyle/>
-          <a:p>
-            <a:pPr algn="l"/>
-            <a:r>
-              <a:rPr sz="1200" b="0" i="0">
-                <a:solidFill>
-                  <a:srgbClr val="888888"/>
-                </a:solidFill>
-              </a:rPr>
-              <a:t>    – xQlave: 타이밍 불변(constant-time) 설계</a:t>
-            </a:r>
-          </a:p>
-        </p:txBody>
-      </p:sp>
-      <p:sp>
-        <p:nvSpPr>
-          <p:cNvPr id="27" name="TextBox 26"/>
-          <p:cNvSpPr txBox="1"/>
-          <p:nvPr/>
-        </p:nvSpPr>
-        <p:spPr>
-          <a:xfrm>
-            <a:off x="6108192" y="3154679"/>
-            <a:ext cx="5669280" cy="347472"/>
-          </a:xfrm>
-          <a:prstGeom prst="rect">
-            <a:avLst/>
-          </a:prstGeom>
-          <a:noFill/>
-        </p:spPr>
-        <p:txBody>
-          <a:bodyPr wrap="square">
-            <a:spAutoFit/>
-          </a:bodyPr>
-          <a:lstStyle/>
-          <a:p>
-            <a:pPr algn="l"/>
-            <a:r>
-              <a:rPr sz="1200" b="0" i="0">
-                <a:solidFill>
-                  <a:srgbClr val="888888"/>
-                </a:solidFill>
-              </a:rPr>
-              <a:t>    – 전력 분석 대응 마스킹 옵션 제공</a:t>
-            </a:r>
-          </a:p>
-        </p:txBody>
-      </p:sp>
-      <p:sp>
-        <p:nvSpPr>
-          <p:cNvPr id="28" name="TextBox 27"/>
-          <p:cNvSpPr txBox="1"/>
-          <p:nvPr/>
-        </p:nvSpPr>
-        <p:spPr>
-          <a:xfrm>
-            <a:off x="6108192" y="3483863"/>
-            <a:ext cx="5669280" cy="347472"/>
-          </a:xfrm>
-          <a:prstGeom prst="rect">
-            <a:avLst/>
-          </a:prstGeom>
-          <a:noFill/>
-        </p:spPr>
-        <p:txBody>
-          <a:bodyPr wrap="square">
-            <a:spAutoFit/>
-          </a:bodyPr>
-          <a:lstStyle/>
-          <a:p>
-            <a:pPr algn="l"/>
-            <a:r>
-              <a:rPr sz="1250" b="0" i="0">
-                <a:solidFill>
-                  <a:srgbClr val="1A1A1A"/>
-                </a:solidFill>
-              </a:rPr>
-              <a:t>  ▪ 펌웨어 보안</a:t>
-            </a:r>
-          </a:p>
-        </p:txBody>
-      </p:sp>
-      <p:sp>
-        <p:nvSpPr>
-          <p:cNvPr id="29" name="TextBox 28"/>
-          <p:cNvSpPr txBox="1"/>
-          <p:nvPr/>
-        </p:nvSpPr>
-        <p:spPr>
-          <a:xfrm>
-            <a:off x="6108192" y="3813047"/>
-            <a:ext cx="5669280" cy="347472"/>
-          </a:xfrm>
-          <a:prstGeom prst="rect">
-            <a:avLst/>
-          </a:prstGeom>
-          <a:noFill/>
-        </p:spPr>
-        <p:txBody>
-          <a:bodyPr wrap="square">
-            <a:spAutoFit/>
-          </a:bodyPr>
-          <a:lstStyle/>
-          <a:p>
-            <a:pPr algn="l"/>
-            <a:r>
-              <a:rPr sz="1200" b="0" i="0">
-                <a:solidFill>
-                  <a:srgbClr val="888888"/>
-                </a:solidFill>
-              </a:rPr>
-              <a:t>    – FPGA 비트스트림 서명 검증 (안전한 부팅)</a:t>
-            </a:r>
-          </a:p>
-        </p:txBody>
-      </p:sp>
-      <p:sp>
-        <p:nvSpPr>
-          <p:cNvPr id="30" name="TextBox 29"/>
-          <p:cNvSpPr txBox="1"/>
-          <p:nvPr/>
-        </p:nvSpPr>
-        <p:spPr>
-          <a:xfrm>
-            <a:off x="6108192" y="4142231"/>
-            <a:ext cx="5669280" cy="347472"/>
-          </a:xfrm>
-          <a:prstGeom prst="rect">
-            <a:avLst/>
-          </a:prstGeom>
-          <a:noFill/>
-        </p:spPr>
-        <p:txBody>
-          <a:bodyPr wrap="square">
-            <a:spAutoFit/>
-          </a:bodyPr>
-          <a:lstStyle/>
-          <a:p>
-            <a:pPr algn="l"/>
-            <a:r>
-              <a:rPr sz="1200" b="0" i="0">
-                <a:solidFill>
-                  <a:srgbClr val="888888"/>
-                </a:solidFill>
-              </a:rPr>
-              <a:t>    – 원격 업데이트: TLS 1.3 + ML-DSA 서명 필수</a:t>
-            </a:r>
-          </a:p>
-        </p:txBody>
-      </p:sp>
-      <p:sp>
-        <p:nvSpPr>
-          <p:cNvPr id="31" name="TextBox 30"/>
-          <p:cNvSpPr txBox="1"/>
-          <p:nvPr/>
-        </p:nvSpPr>
-        <p:spPr>
-          <a:xfrm>
-            <a:off x="6108192" y="4471416"/>
-            <a:ext cx="5669280" cy="347472"/>
-          </a:xfrm>
-          <a:prstGeom prst="rect">
-            <a:avLst/>
-          </a:prstGeom>
-          <a:noFill/>
-        </p:spPr>
-        <p:txBody>
-          <a:bodyPr wrap="square">
-            <a:spAutoFit/>
-          </a:bodyPr>
-          <a:lstStyle/>
-          <a:p>
-            <a:pPr algn="l"/>
-            <a:r>
-              <a:rPr sz="1250" b="0" i="0">
-                <a:solidFill>
-                  <a:srgbClr val="1A1A1A"/>
-                </a:solidFill>
-              </a:rPr>
-              <a:t>  ▪ 물리 보안</a:t>
-            </a:r>
-          </a:p>
-        </p:txBody>
-      </p:sp>
-      <p:sp>
-        <p:nvSpPr>
-          <p:cNvPr id="32" name="TextBox 31"/>
-          <p:cNvSpPr txBox="1"/>
-          <p:nvPr/>
-        </p:nvSpPr>
-        <p:spPr>
-          <a:xfrm>
-            <a:off x="6108192" y="4800600"/>
-            <a:ext cx="5669280" cy="347472"/>
-          </a:xfrm>
-          <a:prstGeom prst="rect">
-            <a:avLst/>
-          </a:prstGeom>
-          <a:noFill/>
-        </p:spPr>
-        <p:txBody>
-          <a:bodyPr wrap="square">
-            <a:spAutoFit/>
-          </a:bodyPr>
-          <a:lstStyle/>
-          <a:p>
-            <a:pPr algn="l"/>
-            <a:r>
-              <a:rPr sz="1200" b="0" i="0">
-                <a:solidFill>
-                  <a:srgbClr val="888888"/>
-                </a:solidFill>
-              </a:rPr>
               <a:t>    – Anti-tamper 감지 핀 → 트리거 시 키 자동 소거</a:t>
             </a:r>
           </a:p>
@@ -8101,1688 +5748,6 @@
                 </a:solidFill>
               </a:rPr>
               <a:t>    – 케이스 개봉 감지 스위치 옵션</a:t>
-            </a:r>
-          </a:p>
-        </p:txBody>
-      </p:sp>
-    </p:spTree>
-  </p:cSld>
-  <p:clrMapOvr>
-    <a:masterClrMapping/>
-  </p:clrMapOvr>
-</p:sld>
-</file>
-
-<file path=ppt/slides/slide14.xml><?xml version="1.0" encoding="utf-8"?>
-<p:sld xmlns:a="http://schemas.openxmlformats.org/drawingml/2006/main" xmlns:p="http://schemas.openxmlformats.org/presentationml/2006/main" xmlns:r="http://schemas.openxmlformats.org/officeDocument/2006/relationships">
-  <p:cSld>
-    <p:spTree>
-      <p:nvGrpSpPr>
-        <p:cNvPr id="1" name=""/>
-        <p:cNvGrpSpPr/>
-        <p:nvPr/>
-      </p:nvGrpSpPr>
-      <p:grpSpPr/>
-      <p:sp>
-        <p:nvSpPr>
-          <p:cNvPr id="2" name="Rectangle 1"/>
-          <p:cNvSpPr/>
-          <p:nvPr/>
-        </p:nvSpPr>
-        <p:spPr>
-          <a:xfrm>
-            <a:off x="0" y="0"/>
-            <a:ext cx="12188952" cy="6858000"/>
-          </a:xfrm>
-          <a:prstGeom prst="rect">
-            <a:avLst/>
-          </a:prstGeom>
-          <a:solidFill>
-            <a:srgbClr val="FFFFFF"/>
-          </a:solidFill>
-          <a:ln>
-            <a:noFill/>
-          </a:ln>
-        </p:spPr>
-        <p:style>
-          <a:lnRef idx="1">
-            <a:schemeClr val="accent1"/>
-          </a:lnRef>
-          <a:fillRef idx="3">
-            <a:schemeClr val="accent1"/>
-          </a:fillRef>
-          <a:effectRef idx="2">
-            <a:schemeClr val="accent1"/>
-          </a:effectRef>
-          <a:fontRef idx="minor">
-            <a:schemeClr val="lt1"/>
-          </a:fontRef>
-        </p:style>
-        <p:txBody>
-          <a:bodyPr rtlCol="0" anchor="ctr"/>
-          <a:lstStyle/>
-          <a:p>
-            <a:pPr algn="ctr"/>
-          </a:p>
-        </p:txBody>
-      </p:sp>
-      <p:sp>
-        <p:nvSpPr>
-          <p:cNvPr id="3" name="Rectangle 2"/>
-          <p:cNvSpPr/>
-          <p:nvPr/>
-        </p:nvSpPr>
-        <p:spPr>
-          <a:xfrm>
-            <a:off x="0" y="0"/>
-            <a:ext cx="12188952" cy="73152"/>
-          </a:xfrm>
-          <a:prstGeom prst="rect">
-            <a:avLst/>
-          </a:prstGeom>
-          <a:solidFill>
-            <a:srgbClr val="1E6FBF"/>
-          </a:solidFill>
-          <a:ln>
-            <a:noFill/>
-          </a:ln>
-        </p:spPr>
-        <p:style>
-          <a:lnRef idx="1">
-            <a:schemeClr val="accent1"/>
-          </a:lnRef>
-          <a:fillRef idx="3">
-            <a:schemeClr val="accent1"/>
-          </a:fillRef>
-          <a:effectRef idx="2">
-            <a:schemeClr val="accent1"/>
-          </a:effectRef>
-          <a:fontRef idx="minor">
-            <a:schemeClr val="lt1"/>
-          </a:fontRef>
-        </p:style>
-        <p:txBody>
-          <a:bodyPr rtlCol="0" anchor="ctr"/>
-          <a:lstStyle/>
-          <a:p>
-            <a:pPr algn="ctr"/>
-          </a:p>
-        </p:txBody>
-      </p:sp>
-      <p:sp>
-        <p:nvSpPr>
-          <p:cNvPr id="4" name="Rectangle 3"/>
-          <p:cNvSpPr/>
-          <p:nvPr/>
-        </p:nvSpPr>
-        <p:spPr>
-          <a:xfrm>
-            <a:off x="0" y="73152"/>
-            <a:ext cx="12188952" cy="1097280"/>
-          </a:xfrm>
-          <a:prstGeom prst="rect">
-            <a:avLst/>
-          </a:prstGeom>
-          <a:solidFill>
-            <a:srgbClr val="F0F4F9"/>
-          </a:solidFill>
-          <a:ln>
-            <a:noFill/>
-          </a:ln>
-        </p:spPr>
-        <p:style>
-          <a:lnRef idx="1">
-            <a:schemeClr val="accent1"/>
-          </a:lnRef>
-          <a:fillRef idx="3">
-            <a:schemeClr val="accent1"/>
-          </a:fillRef>
-          <a:effectRef idx="2">
-            <a:schemeClr val="accent1"/>
-          </a:effectRef>
-          <a:fontRef idx="minor">
-            <a:schemeClr val="lt1"/>
-          </a:fontRef>
-        </p:style>
-        <p:txBody>
-          <a:bodyPr rtlCol="0" anchor="ctr"/>
-          <a:lstStyle/>
-          <a:p>
-            <a:pPr algn="ctr"/>
-          </a:p>
-        </p:txBody>
-      </p:sp>
-      <p:sp>
-        <p:nvSpPr>
-          <p:cNvPr id="5" name="TextBox 4"/>
-          <p:cNvSpPr txBox="1"/>
-          <p:nvPr/>
-        </p:nvSpPr>
-        <p:spPr>
-          <a:xfrm>
-            <a:off x="365760" y="137160"/>
-            <a:ext cx="11430000" cy="658368"/>
-          </a:xfrm>
-          <a:prstGeom prst="rect">
-            <a:avLst/>
-          </a:prstGeom>
-          <a:noFill/>
-        </p:spPr>
-        <p:txBody>
-          <a:bodyPr wrap="square">
-            <a:spAutoFit/>
-          </a:bodyPr>
-          <a:lstStyle/>
-          <a:p>
-            <a:pPr algn="l"/>
-            <a:r>
-              <a:rPr sz="2400" b="1" i="0">
-                <a:solidFill>
-                  <a:srgbClr val="1E3A5F"/>
-                </a:solidFill>
-              </a:rPr>
-              <a:t>기대 효과 및 결론</a:t>
-            </a:r>
-          </a:p>
-        </p:txBody>
-      </p:sp>
-      <p:sp>
-        <p:nvSpPr>
-          <p:cNvPr id="6" name="TextBox 5"/>
-          <p:cNvSpPr txBox="1"/>
-          <p:nvPr/>
-        </p:nvSpPr>
-        <p:spPr>
-          <a:xfrm>
-            <a:off x="365760" y="749808"/>
-            <a:ext cx="11430000" cy="384048"/>
-          </a:xfrm>
-          <a:prstGeom prst="rect">
-            <a:avLst/>
-          </a:prstGeom>
-          <a:noFill/>
-        </p:spPr>
-        <p:txBody>
-          <a:bodyPr wrap="square">
-            <a:spAutoFit/>
-          </a:bodyPr>
-          <a:lstStyle/>
-          <a:p>
-            <a:pPr algn="l"/>
-            <a:r>
-              <a:rPr sz="1200" b="0" i="1">
-                <a:solidFill>
-                  <a:srgbClr val="888888"/>
-                </a:solidFill>
-              </a:rPr>
-              <a:t>Summary &amp; Benefits</a:t>
-            </a:r>
-          </a:p>
-        </p:txBody>
-      </p:sp>
-      <p:sp>
-        <p:nvSpPr>
-          <p:cNvPr id="7" name="Rectangle 6"/>
-          <p:cNvSpPr/>
-          <p:nvPr/>
-        </p:nvSpPr>
-        <p:spPr>
-          <a:xfrm>
-            <a:off x="0" y="1170432"/>
-            <a:ext cx="12188952" cy="36576"/>
-          </a:xfrm>
-          <a:prstGeom prst="rect">
-            <a:avLst/>
-          </a:prstGeom>
-          <a:solidFill>
-            <a:srgbClr val="D6E4F4"/>
-          </a:solidFill>
-          <a:ln>
-            <a:noFill/>
-          </a:ln>
-        </p:spPr>
-        <p:style>
-          <a:lnRef idx="1">
-            <a:schemeClr val="accent1"/>
-          </a:lnRef>
-          <a:fillRef idx="3">
-            <a:schemeClr val="accent1"/>
-          </a:fillRef>
-          <a:effectRef idx="2">
-            <a:schemeClr val="accent1"/>
-          </a:effectRef>
-          <a:fontRef idx="minor">
-            <a:schemeClr val="lt1"/>
-          </a:fontRef>
-        </p:style>
-        <p:txBody>
-          <a:bodyPr rtlCol="0" anchor="ctr"/>
-          <a:lstStyle/>
-          <a:p>
-            <a:pPr algn="ctr"/>
-          </a:p>
-        </p:txBody>
-      </p:sp>
-      <p:sp>
-        <p:nvSpPr>
-          <p:cNvPr id="8" name="Rectangle 7"/>
-          <p:cNvSpPr/>
-          <p:nvPr/>
-        </p:nvSpPr>
-        <p:spPr>
-          <a:xfrm>
-            <a:off x="274320" y="1325880"/>
-            <a:ext cx="2743200" cy="2834640"/>
-          </a:xfrm>
-          <a:prstGeom prst="rect">
-            <a:avLst/>
-          </a:prstGeom>
-          <a:solidFill>
-            <a:srgbClr val="F0F4F9"/>
-          </a:solidFill>
-          <a:ln w="9525">
-            <a:solidFill>
-              <a:srgbClr val="D6E4F4"/>
-            </a:solidFill>
-          </a:ln>
-        </p:spPr>
-        <p:style>
-          <a:lnRef idx="1">
-            <a:schemeClr val="accent1"/>
-          </a:lnRef>
-          <a:fillRef idx="3">
-            <a:schemeClr val="accent1"/>
-          </a:fillRef>
-          <a:effectRef idx="2">
-            <a:schemeClr val="accent1"/>
-          </a:effectRef>
-          <a:fontRef idx="minor">
-            <a:schemeClr val="lt1"/>
-          </a:fontRef>
-        </p:style>
-        <p:txBody>
-          <a:bodyPr rtlCol="0" anchor="ctr"/>
-          <a:lstStyle/>
-          <a:p>
-            <a:pPr algn="ctr"/>
-          </a:p>
-        </p:txBody>
-      </p:sp>
-      <p:sp>
-        <p:nvSpPr>
-          <p:cNvPr id="9" name="Rectangle 8"/>
-          <p:cNvSpPr/>
-          <p:nvPr/>
-        </p:nvSpPr>
-        <p:spPr>
-          <a:xfrm>
-            <a:off x="274320" y="1325880"/>
-            <a:ext cx="2743200" cy="457200"/>
-          </a:xfrm>
-          <a:prstGeom prst="rect">
-            <a:avLst/>
-          </a:prstGeom>
-          <a:solidFill>
-            <a:srgbClr val="D6E4F4"/>
-          </a:solidFill>
-          <a:ln>
-            <a:noFill/>
-          </a:ln>
-        </p:spPr>
-        <p:style>
-          <a:lnRef idx="1">
-            <a:schemeClr val="accent1"/>
-          </a:lnRef>
-          <a:fillRef idx="3">
-            <a:schemeClr val="accent1"/>
-          </a:fillRef>
-          <a:effectRef idx="2">
-            <a:schemeClr val="accent1"/>
-          </a:effectRef>
-          <a:fontRef idx="minor">
-            <a:schemeClr val="lt1"/>
-          </a:fontRef>
-        </p:style>
-        <p:txBody>
-          <a:bodyPr rtlCol="0" anchor="ctr"/>
-          <a:lstStyle/>
-          <a:p>
-            <a:pPr algn="ctr"/>
-          </a:p>
-        </p:txBody>
-      </p:sp>
-      <p:sp>
-        <p:nvSpPr>
-          <p:cNvPr id="10" name="TextBox 9"/>
-          <p:cNvSpPr txBox="1"/>
-          <p:nvPr/>
-        </p:nvSpPr>
-        <p:spPr>
-          <a:xfrm>
-            <a:off x="365760" y="1371600"/>
-            <a:ext cx="2606040" cy="384048"/>
-          </a:xfrm>
-          <a:prstGeom prst="rect">
-            <a:avLst/>
-          </a:prstGeom>
-          <a:noFill/>
-        </p:spPr>
-        <p:txBody>
-          <a:bodyPr wrap="square">
-            <a:spAutoFit/>
-          </a:bodyPr>
-          <a:lstStyle/>
-          <a:p>
-            <a:pPr algn="l"/>
-            <a:r>
-              <a:rPr sz="1300" b="1" i="0">
-                <a:solidFill>
-                  <a:srgbClr val="1E3A5F"/>
-                </a:solidFill>
-              </a:rPr>
-              <a:t>양자내성 보안</a:t>
-            </a:r>
-          </a:p>
-        </p:txBody>
-      </p:sp>
-      <p:sp>
-        <p:nvSpPr>
-          <p:cNvPr id="11" name="TextBox 10"/>
-          <p:cNvSpPr txBox="1"/>
-          <p:nvPr/>
-        </p:nvSpPr>
-        <p:spPr>
-          <a:xfrm>
-            <a:off x="365760" y="1920240"/>
-            <a:ext cx="2560320" cy="1188720"/>
-          </a:xfrm>
-          <a:prstGeom prst="rect">
-            <a:avLst/>
-          </a:prstGeom>
-          <a:noFill/>
-        </p:spPr>
-        <p:txBody>
-          <a:bodyPr wrap="square">
-            <a:spAutoFit/>
-          </a:bodyPr>
-          <a:lstStyle/>
-          <a:p>
-            <a:pPr algn="ctr"/>
-            <a:r>
-              <a:rPr sz="1300" b="0" i="0">
-                <a:solidFill>
-                  <a:srgbClr val="1A1A1A"/>
-                </a:solidFill>
-              </a:rPr>
-              <a:t>ML-KEM 기반 PQC 적용으로
-미래 양자 컴퓨터 위협
-완전 대응</a:t>
-            </a:r>
-          </a:p>
-        </p:txBody>
-      </p:sp>
-      <p:sp>
-        <p:nvSpPr>
-          <p:cNvPr id="12" name="Rectangle 11"/>
-          <p:cNvSpPr/>
-          <p:nvPr/>
-        </p:nvSpPr>
-        <p:spPr>
-          <a:xfrm>
-            <a:off x="3218688" y="1325880"/>
-            <a:ext cx="2743200" cy="2834640"/>
-          </a:xfrm>
-          <a:prstGeom prst="rect">
-            <a:avLst/>
-          </a:prstGeom>
-          <a:solidFill>
-            <a:srgbClr val="F0F4F9"/>
-          </a:solidFill>
-          <a:ln w="9525">
-            <a:solidFill>
-              <a:srgbClr val="D6E4F4"/>
-            </a:solidFill>
-          </a:ln>
-        </p:spPr>
-        <p:style>
-          <a:lnRef idx="1">
-            <a:schemeClr val="accent1"/>
-          </a:lnRef>
-          <a:fillRef idx="3">
-            <a:schemeClr val="accent1"/>
-          </a:fillRef>
-          <a:effectRef idx="2">
-            <a:schemeClr val="accent1"/>
-          </a:effectRef>
-          <a:fontRef idx="minor">
-            <a:schemeClr val="lt1"/>
-          </a:fontRef>
-        </p:style>
-        <p:txBody>
-          <a:bodyPr rtlCol="0" anchor="ctr"/>
-          <a:lstStyle/>
-          <a:p>
-            <a:pPr algn="ctr"/>
-          </a:p>
-        </p:txBody>
-      </p:sp>
-      <p:sp>
-        <p:nvSpPr>
-          <p:cNvPr id="13" name="Rectangle 12"/>
-          <p:cNvSpPr/>
-          <p:nvPr/>
-        </p:nvSpPr>
-        <p:spPr>
-          <a:xfrm>
-            <a:off x="3218688" y="1325880"/>
-            <a:ext cx="2743200" cy="457200"/>
-          </a:xfrm>
-          <a:prstGeom prst="rect">
-            <a:avLst/>
-          </a:prstGeom>
-          <a:solidFill>
-            <a:srgbClr val="D6E4F4"/>
-          </a:solidFill>
-          <a:ln>
-            <a:noFill/>
-          </a:ln>
-        </p:spPr>
-        <p:style>
-          <a:lnRef idx="1">
-            <a:schemeClr val="accent1"/>
-          </a:lnRef>
-          <a:fillRef idx="3">
-            <a:schemeClr val="accent1"/>
-          </a:fillRef>
-          <a:effectRef idx="2">
-            <a:schemeClr val="accent1"/>
-          </a:effectRef>
-          <a:fontRef idx="minor">
-            <a:schemeClr val="lt1"/>
-          </a:fontRef>
-        </p:style>
-        <p:txBody>
-          <a:bodyPr rtlCol="0" anchor="ctr"/>
-          <a:lstStyle/>
-          <a:p>
-            <a:pPr algn="ctr"/>
-          </a:p>
-        </p:txBody>
-      </p:sp>
-      <p:sp>
-        <p:nvSpPr>
-          <p:cNvPr id="14" name="TextBox 13"/>
-          <p:cNvSpPr txBox="1"/>
-          <p:nvPr/>
-        </p:nvSpPr>
-        <p:spPr>
-          <a:xfrm>
-            <a:off x="3310128" y="1371600"/>
-            <a:ext cx="2606040" cy="384048"/>
-          </a:xfrm>
-          <a:prstGeom prst="rect">
-            <a:avLst/>
-          </a:prstGeom>
-          <a:noFill/>
-        </p:spPr>
-        <p:txBody>
-          <a:bodyPr wrap="square">
-            <a:spAutoFit/>
-          </a:bodyPr>
-          <a:lstStyle/>
-          <a:p>
-            <a:pPr algn="l"/>
-            <a:r>
-              <a:rPr sz="1300" b="1" i="0">
-                <a:solidFill>
-                  <a:srgbClr val="1E3A5F"/>
-                </a:solidFill>
-              </a:rPr>
-              <a:t>고성능</a:t>
-            </a:r>
-          </a:p>
-        </p:txBody>
-      </p:sp>
-      <p:sp>
-        <p:nvSpPr>
-          <p:cNvPr id="15" name="TextBox 14"/>
-          <p:cNvSpPr txBox="1"/>
-          <p:nvPr/>
-        </p:nvSpPr>
-        <p:spPr>
-          <a:xfrm>
-            <a:off x="3310128" y="1920240"/>
-            <a:ext cx="2560320" cy="1188720"/>
-          </a:xfrm>
-          <a:prstGeom prst="rect">
-            <a:avLst/>
-          </a:prstGeom>
-          <a:noFill/>
-        </p:spPr>
-        <p:txBody>
-          <a:bodyPr wrap="square">
-            <a:spAutoFit/>
-          </a:bodyPr>
-          <a:lstStyle/>
-          <a:p>
-            <a:pPr algn="ctr"/>
-            <a:r>
-              <a:rPr sz="1300" b="0" i="0">
-                <a:solidFill>
-                  <a:srgbClr val="1A1A1A"/>
-                </a:solidFill>
-              </a:rPr>
-              <a:t>FPGA 하드웨어 가속:
-레이턴시 &lt; 100 μs
-처리량 10 Gbps+</a:t>
-            </a:r>
-          </a:p>
-        </p:txBody>
-      </p:sp>
-      <p:sp>
-        <p:nvSpPr>
-          <p:cNvPr id="16" name="Rectangle 15"/>
-          <p:cNvSpPr/>
-          <p:nvPr/>
-        </p:nvSpPr>
-        <p:spPr>
-          <a:xfrm>
-            <a:off x="6163056" y="1325880"/>
-            <a:ext cx="2743200" cy="2834640"/>
-          </a:xfrm>
-          <a:prstGeom prst="rect">
-            <a:avLst/>
-          </a:prstGeom>
-          <a:solidFill>
-            <a:srgbClr val="F0F4F9"/>
-          </a:solidFill>
-          <a:ln w="9525">
-            <a:solidFill>
-              <a:srgbClr val="D6E4F4"/>
-            </a:solidFill>
-          </a:ln>
-        </p:spPr>
-        <p:style>
-          <a:lnRef idx="1">
-            <a:schemeClr val="accent1"/>
-          </a:lnRef>
-          <a:fillRef idx="3">
-            <a:schemeClr val="accent1"/>
-          </a:fillRef>
-          <a:effectRef idx="2">
-            <a:schemeClr val="accent1"/>
-          </a:effectRef>
-          <a:fontRef idx="minor">
-            <a:schemeClr val="lt1"/>
-          </a:fontRef>
-        </p:style>
-        <p:txBody>
-          <a:bodyPr rtlCol="0" anchor="ctr"/>
-          <a:lstStyle/>
-          <a:p>
-            <a:pPr algn="ctr"/>
-          </a:p>
-        </p:txBody>
-      </p:sp>
-      <p:sp>
-        <p:nvSpPr>
-          <p:cNvPr id="17" name="Rectangle 16"/>
-          <p:cNvSpPr/>
-          <p:nvPr/>
-        </p:nvSpPr>
-        <p:spPr>
-          <a:xfrm>
-            <a:off x="6163056" y="1325880"/>
-            <a:ext cx="2743200" cy="457200"/>
-          </a:xfrm>
-          <a:prstGeom prst="rect">
-            <a:avLst/>
-          </a:prstGeom>
-          <a:solidFill>
-            <a:srgbClr val="D6E4F4"/>
-          </a:solidFill>
-          <a:ln>
-            <a:noFill/>
-          </a:ln>
-        </p:spPr>
-        <p:style>
-          <a:lnRef idx="1">
-            <a:schemeClr val="accent1"/>
-          </a:lnRef>
-          <a:fillRef idx="3">
-            <a:schemeClr val="accent1"/>
-          </a:fillRef>
-          <a:effectRef idx="2">
-            <a:schemeClr val="accent1"/>
-          </a:effectRef>
-          <a:fontRef idx="minor">
-            <a:schemeClr val="lt1"/>
-          </a:fontRef>
-        </p:style>
-        <p:txBody>
-          <a:bodyPr rtlCol="0" anchor="ctr"/>
-          <a:lstStyle/>
-          <a:p>
-            <a:pPr algn="ctr"/>
-          </a:p>
-        </p:txBody>
-      </p:sp>
-      <p:sp>
-        <p:nvSpPr>
-          <p:cNvPr id="18" name="TextBox 17"/>
-          <p:cNvSpPr txBox="1"/>
-          <p:nvPr/>
-        </p:nvSpPr>
-        <p:spPr>
-          <a:xfrm>
-            <a:off x="6254496" y="1371600"/>
-            <a:ext cx="2606040" cy="384048"/>
-          </a:xfrm>
-          <a:prstGeom prst="rect">
-            <a:avLst/>
-          </a:prstGeom>
-          <a:noFill/>
-        </p:spPr>
-        <p:txBody>
-          <a:bodyPr wrap="square">
-            <a:spAutoFit/>
-          </a:bodyPr>
-          <a:lstStyle/>
-          <a:p>
-            <a:pPr algn="l"/>
-            <a:r>
-              <a:rPr sz="1300" b="1" i="0">
-                <a:solidFill>
-                  <a:srgbClr val="1E3A5F"/>
-                </a:solidFill>
-              </a:rPr>
-              <a:t>무수정 호환</a:t>
-            </a:r>
-          </a:p>
-        </p:txBody>
-      </p:sp>
-      <p:sp>
-        <p:nvSpPr>
-          <p:cNvPr id="19" name="TextBox 18"/>
-          <p:cNvSpPr txBox="1"/>
-          <p:nvPr/>
-        </p:nvSpPr>
-        <p:spPr>
-          <a:xfrm>
-            <a:off x="6254496" y="1920240"/>
-            <a:ext cx="2560320" cy="1188720"/>
-          </a:xfrm>
-          <a:prstGeom prst="rect">
-            <a:avLst/>
-          </a:prstGeom>
-          <a:noFill/>
-        </p:spPr>
-        <p:txBody>
-          <a:bodyPr wrap="square">
-            <a:spAutoFit/>
-          </a:bodyPr>
-          <a:lstStyle/>
-          <a:p>
-            <a:pPr algn="ctr"/>
-            <a:r>
-              <a:rPr sz="1300" b="0" i="0">
-                <a:solidFill>
-                  <a:srgbClr val="1A1A1A"/>
-                </a:solidFill>
-              </a:rPr>
-              <a:t>기존 PC/디바이스
-SW·FW·코드 일체
-수정 불필요</a:t>
-            </a:r>
-          </a:p>
-        </p:txBody>
-      </p:sp>
-      <p:sp>
-        <p:nvSpPr>
-          <p:cNvPr id="20" name="Rectangle 19"/>
-          <p:cNvSpPr/>
-          <p:nvPr/>
-        </p:nvSpPr>
-        <p:spPr>
-          <a:xfrm>
-            <a:off x="9107424" y="1325880"/>
-            <a:ext cx="2743200" cy="2834640"/>
-          </a:xfrm>
-          <a:prstGeom prst="rect">
-            <a:avLst/>
-          </a:prstGeom>
-          <a:solidFill>
-            <a:srgbClr val="F0F4F9"/>
-          </a:solidFill>
-          <a:ln w="9525">
-            <a:solidFill>
-              <a:srgbClr val="D6E4F4"/>
-            </a:solidFill>
-          </a:ln>
-        </p:spPr>
-        <p:style>
-          <a:lnRef idx="1">
-            <a:schemeClr val="accent1"/>
-          </a:lnRef>
-          <a:fillRef idx="3">
-            <a:schemeClr val="accent1"/>
-          </a:fillRef>
-          <a:effectRef idx="2">
-            <a:schemeClr val="accent1"/>
-          </a:effectRef>
-          <a:fontRef idx="minor">
-            <a:schemeClr val="lt1"/>
-          </a:fontRef>
-        </p:style>
-        <p:txBody>
-          <a:bodyPr rtlCol="0" anchor="ctr"/>
-          <a:lstStyle/>
-          <a:p>
-            <a:pPr algn="ctr"/>
-          </a:p>
-        </p:txBody>
-      </p:sp>
-      <p:sp>
-        <p:nvSpPr>
-          <p:cNvPr id="21" name="Rectangle 20"/>
-          <p:cNvSpPr/>
-          <p:nvPr/>
-        </p:nvSpPr>
-        <p:spPr>
-          <a:xfrm>
-            <a:off x="9107424" y="1325880"/>
-            <a:ext cx="2743200" cy="457200"/>
-          </a:xfrm>
-          <a:prstGeom prst="rect">
-            <a:avLst/>
-          </a:prstGeom>
-          <a:solidFill>
-            <a:srgbClr val="D6E4F4"/>
-          </a:solidFill>
-          <a:ln>
-            <a:noFill/>
-          </a:ln>
-        </p:spPr>
-        <p:style>
-          <a:lnRef idx="1">
-            <a:schemeClr val="accent1"/>
-          </a:lnRef>
-          <a:fillRef idx="3">
-            <a:schemeClr val="accent1"/>
-          </a:fillRef>
-          <a:effectRef idx="2">
-            <a:schemeClr val="accent1"/>
-          </a:effectRef>
-          <a:fontRef idx="minor">
-            <a:schemeClr val="lt1"/>
-          </a:fontRef>
-        </p:style>
-        <p:txBody>
-          <a:bodyPr rtlCol="0" anchor="ctr"/>
-          <a:lstStyle/>
-          <a:p>
-            <a:pPr algn="ctr"/>
-          </a:p>
-        </p:txBody>
-      </p:sp>
-      <p:sp>
-        <p:nvSpPr>
-          <p:cNvPr id="22" name="TextBox 21"/>
-          <p:cNvSpPr txBox="1"/>
-          <p:nvPr/>
-        </p:nvSpPr>
-        <p:spPr>
-          <a:xfrm>
-            <a:off x="9198864" y="1371600"/>
-            <a:ext cx="2606040" cy="384048"/>
-          </a:xfrm>
-          <a:prstGeom prst="rect">
-            <a:avLst/>
-          </a:prstGeom>
-          <a:noFill/>
-        </p:spPr>
-        <p:txBody>
-          <a:bodyPr wrap="square">
-            <a:spAutoFit/>
-          </a:bodyPr>
-          <a:lstStyle/>
-          <a:p>
-            <a:pPr algn="l"/>
-            <a:r>
-              <a:rPr sz="1300" b="1" i="0">
-                <a:solidFill>
-                  <a:srgbClr val="1E3A5F"/>
-                </a:solidFill>
-              </a:rPr>
-              <a:t>확장성</a:t>
-            </a:r>
-          </a:p>
-        </p:txBody>
-      </p:sp>
-      <p:sp>
-        <p:nvSpPr>
-          <p:cNvPr id="23" name="TextBox 22"/>
-          <p:cNvSpPr txBox="1"/>
-          <p:nvPr/>
-        </p:nvSpPr>
-        <p:spPr>
-          <a:xfrm>
-            <a:off x="9198864" y="1920240"/>
-            <a:ext cx="2560320" cy="1188720"/>
-          </a:xfrm>
-          <a:prstGeom prst="rect">
-            <a:avLst/>
-          </a:prstGeom>
-          <a:noFill/>
-        </p:spPr>
-        <p:txBody>
-          <a:bodyPr wrap="square">
-            <a:spAutoFit/>
-          </a:bodyPr>
-          <a:lstStyle/>
-          <a:p>
-            <a:pPr algn="ctr"/>
-            <a:r>
-              <a:rPr sz="1300" b="0" i="0">
-                <a:solidFill>
-                  <a:srgbClr val="1A1A1A"/>
-                </a:solidFill>
-              </a:rPr>
-              <a:t>1:100 동시 운용
-추가 GW 증설로
-무한 확장 가능</a:t>
-            </a:r>
-          </a:p>
-        </p:txBody>
-      </p:sp>
-      <p:sp>
-        <p:nvSpPr>
-          <p:cNvPr id="24" name="Rectangle 23"/>
-          <p:cNvSpPr/>
-          <p:nvPr/>
-        </p:nvSpPr>
-        <p:spPr>
-          <a:xfrm>
-            <a:off x="274320" y="4343400"/>
-            <a:ext cx="11612880" cy="2103120"/>
-          </a:xfrm>
-          <a:prstGeom prst="rect">
-            <a:avLst/>
-          </a:prstGeom>
-          <a:solidFill>
-            <a:srgbClr val="F0F4F9"/>
-          </a:solidFill>
-          <a:ln w="9525">
-            <a:solidFill>
-              <a:srgbClr val="1E6FBF"/>
-            </a:solidFill>
-          </a:ln>
-        </p:spPr>
-        <p:style>
-          <a:lnRef idx="1">
-            <a:schemeClr val="accent1"/>
-          </a:lnRef>
-          <a:fillRef idx="3">
-            <a:schemeClr val="accent1"/>
-          </a:fillRef>
-          <a:effectRef idx="2">
-            <a:schemeClr val="accent1"/>
-          </a:effectRef>
-          <a:fontRef idx="minor">
-            <a:schemeClr val="lt1"/>
-          </a:fontRef>
-        </p:style>
-        <p:txBody>
-          <a:bodyPr rtlCol="0" anchor="ctr"/>
-          <a:lstStyle/>
-          <a:p>
-            <a:pPr algn="ctr"/>
-          </a:p>
-        </p:txBody>
-      </p:sp>
-      <p:sp>
-        <p:nvSpPr>
-          <p:cNvPr id="25" name="TextBox 24"/>
-          <p:cNvSpPr txBox="1"/>
-          <p:nvPr/>
-        </p:nvSpPr>
-        <p:spPr>
-          <a:xfrm>
-            <a:off x="457200" y="4407408"/>
-            <a:ext cx="11430000" cy="384048"/>
-          </a:xfrm>
-          <a:prstGeom prst="rect">
-            <a:avLst/>
-          </a:prstGeom>
-          <a:noFill/>
-        </p:spPr>
-        <p:txBody>
-          <a:bodyPr wrap="square">
-            <a:spAutoFit/>
-          </a:bodyPr>
-          <a:lstStyle/>
-          <a:p>
-            <a:pPr algn="l"/>
-            <a:r>
-              <a:rPr sz="1400" b="1" i="0">
-                <a:solidFill>
-                  <a:srgbClr val="1E3A5F"/>
-                </a:solidFill>
-              </a:rPr>
-              <a:t>결론</a:t>
-            </a:r>
-          </a:p>
-        </p:txBody>
-      </p:sp>
-      <p:sp>
-        <p:nvSpPr>
-          <p:cNvPr id="26" name="TextBox 25"/>
-          <p:cNvSpPr txBox="1"/>
-          <p:nvPr/>
-        </p:nvSpPr>
-        <p:spPr>
-          <a:xfrm>
-            <a:off x="457200" y="4846320"/>
-            <a:ext cx="11338560" cy="1463040"/>
-          </a:xfrm>
-          <a:prstGeom prst="rect">
-            <a:avLst/>
-          </a:prstGeom>
-          <a:noFill/>
-        </p:spPr>
-        <p:txBody>
-          <a:bodyPr wrap="square">
-            <a:spAutoFit/>
-          </a:bodyPr>
-          <a:lstStyle/>
-          <a:p>
-            <a:pPr algn="l"/>
-            <a:r>
-              <a:rPr sz="1300" b="0" i="0">
-                <a:solidFill>
-                  <a:srgbClr val="1A1A1A"/>
-                </a:solidFill>
-              </a:rPr>
-              <a:t>Xiphera xQlave FPGA IP를 활용한 투명 PQC 게이트웨이는 기존 TCP 통신 시스템을 일체 수정하지 않고도 NIST 표준 양자내성암호를 적용할 수 있는 가장 현실적인 방법입니다. Host 측 고성능 FPGA와 Device 측 소형 FPGA 조합으로 1:100 환경을 효율적으로 지원하며, 하드웨어 가속을 통해 성능 저하 없이 엔터프라이즈급 보안을 제공합니다.</a:t>
-            </a:r>
-          </a:p>
-        </p:txBody>
-      </p:sp>
-    </p:spTree>
-  </p:cSld>
-  <p:clrMapOvr>
-    <a:masterClrMapping/>
-  </p:clrMapOvr>
-</p:sld>
-</file>
-
-<file path=ppt/slides/slide15.xml><?xml version="1.0" encoding="utf-8"?>
-<p:sld xmlns:a="http://schemas.openxmlformats.org/drawingml/2006/main" xmlns:p="http://schemas.openxmlformats.org/presentationml/2006/main" xmlns:r="http://schemas.openxmlformats.org/officeDocument/2006/relationships">
-  <p:cSld>
-    <p:spTree>
-      <p:nvGrpSpPr>
-        <p:cNvPr id="1" name=""/>
-        <p:cNvGrpSpPr/>
-        <p:nvPr/>
-      </p:nvGrpSpPr>
-      <p:grpSpPr/>
-      <p:sp>
-        <p:nvSpPr>
-          <p:cNvPr id="2" name="Rectangle 1"/>
-          <p:cNvSpPr/>
-          <p:nvPr/>
-        </p:nvSpPr>
-        <p:spPr>
-          <a:xfrm>
-            <a:off x="0" y="0"/>
-            <a:ext cx="12188952" cy="6858000"/>
-          </a:xfrm>
-          <a:prstGeom prst="rect">
-            <a:avLst/>
-          </a:prstGeom>
-          <a:solidFill>
-            <a:srgbClr val="FFFFFF"/>
-          </a:solidFill>
-          <a:ln>
-            <a:noFill/>
-          </a:ln>
-        </p:spPr>
-        <p:style>
-          <a:lnRef idx="1">
-            <a:schemeClr val="accent1"/>
-          </a:lnRef>
-          <a:fillRef idx="3">
-            <a:schemeClr val="accent1"/>
-          </a:fillRef>
-          <a:effectRef idx="2">
-            <a:schemeClr val="accent1"/>
-          </a:effectRef>
-          <a:fontRef idx="minor">
-            <a:schemeClr val="lt1"/>
-          </a:fontRef>
-        </p:style>
-        <p:txBody>
-          <a:bodyPr rtlCol="0" anchor="ctr"/>
-          <a:lstStyle/>
-          <a:p>
-            <a:pPr algn="ctr"/>
-          </a:p>
-        </p:txBody>
-      </p:sp>
-      <p:sp>
-        <p:nvSpPr>
-          <p:cNvPr id="3" name="Rectangle 2"/>
-          <p:cNvSpPr/>
-          <p:nvPr/>
-        </p:nvSpPr>
-        <p:spPr>
-          <a:xfrm>
-            <a:off x="0" y="0"/>
-            <a:ext cx="12188952" cy="91440"/>
-          </a:xfrm>
-          <a:prstGeom prst="rect">
-            <a:avLst/>
-          </a:prstGeom>
-          <a:solidFill>
-            <a:srgbClr val="1E6FBF"/>
-          </a:solidFill>
-          <a:ln>
-            <a:noFill/>
-          </a:ln>
-        </p:spPr>
-        <p:style>
-          <a:lnRef idx="1">
-            <a:schemeClr val="accent1"/>
-          </a:lnRef>
-          <a:fillRef idx="3">
-            <a:schemeClr val="accent1"/>
-          </a:fillRef>
-          <a:effectRef idx="2">
-            <a:schemeClr val="accent1"/>
-          </a:effectRef>
-          <a:fontRef idx="minor">
-            <a:schemeClr val="lt1"/>
-          </a:fontRef>
-        </p:style>
-        <p:txBody>
-          <a:bodyPr rtlCol="0" anchor="ctr"/>
-          <a:lstStyle/>
-          <a:p>
-            <a:pPr algn="ctr"/>
-          </a:p>
-        </p:txBody>
-      </p:sp>
-      <p:sp>
-        <p:nvSpPr>
-          <p:cNvPr id="4" name="Rectangle 3"/>
-          <p:cNvSpPr/>
-          <p:nvPr/>
-        </p:nvSpPr>
-        <p:spPr>
-          <a:xfrm>
-            <a:off x="0" y="6766560"/>
-            <a:ext cx="12188952" cy="91440"/>
-          </a:xfrm>
-          <a:prstGeom prst="rect">
-            <a:avLst/>
-          </a:prstGeom>
-          <a:solidFill>
-            <a:srgbClr val="1E6FBF"/>
-          </a:solidFill>
-          <a:ln>
-            <a:noFill/>
-          </a:ln>
-        </p:spPr>
-        <p:style>
-          <a:lnRef idx="1">
-            <a:schemeClr val="accent1"/>
-          </a:lnRef>
-          <a:fillRef idx="3">
-            <a:schemeClr val="accent1"/>
-          </a:fillRef>
-          <a:effectRef idx="2">
-            <a:schemeClr val="accent1"/>
-          </a:effectRef>
-          <a:fontRef idx="minor">
-            <a:schemeClr val="lt1"/>
-          </a:fontRef>
-        </p:style>
-        <p:txBody>
-          <a:bodyPr rtlCol="0" anchor="ctr"/>
-          <a:lstStyle/>
-          <a:p>
-            <a:pPr algn="ctr"/>
-          </a:p>
-        </p:txBody>
-      </p:sp>
-      <p:sp>
-        <p:nvSpPr>
-          <p:cNvPr id="5" name="TextBox 4"/>
-          <p:cNvSpPr txBox="1"/>
-          <p:nvPr/>
-        </p:nvSpPr>
-        <p:spPr>
-          <a:xfrm>
-            <a:off x="457200" y="1463040"/>
-            <a:ext cx="11247120" cy="1280160"/>
-          </a:xfrm>
-          <a:prstGeom prst="rect">
-            <a:avLst/>
-          </a:prstGeom>
-          <a:noFill/>
-        </p:spPr>
-        <p:txBody>
-          <a:bodyPr wrap="square">
-            <a:spAutoFit/>
-          </a:bodyPr>
-          <a:lstStyle/>
-          <a:p>
-            <a:pPr algn="ctr"/>
-            <a:r>
-              <a:rPr sz="7200" b="1" i="0">
-                <a:solidFill>
-                  <a:srgbClr val="1E3A5F"/>
-                </a:solidFill>
-              </a:rPr>
-              <a:t>Q &amp; A</a:t>
-            </a:r>
-          </a:p>
-        </p:txBody>
-      </p:sp>
-      <p:sp>
-        <p:nvSpPr>
-          <p:cNvPr id="6" name="Rectangle 5"/>
-          <p:cNvSpPr/>
-          <p:nvPr/>
-        </p:nvSpPr>
-        <p:spPr>
-          <a:xfrm>
-            <a:off x="457200" y="3383280"/>
-            <a:ext cx="5120640" cy="2560320"/>
-          </a:xfrm>
-          <a:prstGeom prst="rect">
-            <a:avLst/>
-          </a:prstGeom>
-          <a:solidFill>
-            <a:srgbClr val="F0F4F9"/>
-          </a:solidFill>
-          <a:ln w="9525">
-            <a:solidFill>
-              <a:srgbClr val="D6E4F4"/>
-            </a:solidFill>
-          </a:ln>
-        </p:spPr>
-        <p:style>
-          <a:lnRef idx="1">
-            <a:schemeClr val="accent1"/>
-          </a:lnRef>
-          <a:fillRef idx="3">
-            <a:schemeClr val="accent1"/>
-          </a:fillRef>
-          <a:effectRef idx="2">
-            <a:schemeClr val="accent1"/>
-          </a:effectRef>
-          <a:fontRef idx="minor">
-            <a:schemeClr val="lt1"/>
-          </a:fontRef>
-        </p:style>
-        <p:txBody>
-          <a:bodyPr rtlCol="0" anchor="ctr"/>
-          <a:lstStyle/>
-          <a:p>
-            <a:pPr algn="ctr"/>
-          </a:p>
-        </p:txBody>
-      </p:sp>
-      <p:sp>
-        <p:nvSpPr>
-          <p:cNvPr id="7" name="TextBox 6"/>
-          <p:cNvSpPr txBox="1"/>
-          <p:nvPr/>
-        </p:nvSpPr>
-        <p:spPr>
-          <a:xfrm>
-            <a:off x="594360" y="3456432"/>
-            <a:ext cx="4846320" cy="411480"/>
-          </a:xfrm>
-          <a:prstGeom prst="rect">
-            <a:avLst/>
-          </a:prstGeom>
-          <a:noFill/>
-        </p:spPr>
-        <p:txBody>
-          <a:bodyPr wrap="square">
-            <a:spAutoFit/>
-          </a:bodyPr>
-          <a:lstStyle/>
-          <a:p>
-            <a:pPr algn="l"/>
-            <a:r>
-              <a:rPr sz="1300" b="1" i="0">
-                <a:solidFill>
-                  <a:srgbClr val="1E3A5F"/>
-                </a:solidFill>
-              </a:rPr>
-              <a:t>참고 자료</a:t>
-            </a:r>
-          </a:p>
-        </p:txBody>
-      </p:sp>
-      <p:sp>
-        <p:nvSpPr>
-          <p:cNvPr id="8" name="TextBox 7"/>
-          <p:cNvSpPr txBox="1"/>
-          <p:nvPr/>
-        </p:nvSpPr>
-        <p:spPr>
-          <a:xfrm>
-            <a:off x="594360" y="3931920"/>
-            <a:ext cx="4846320" cy="365760"/>
-          </a:xfrm>
-          <a:prstGeom prst="rect">
-            <a:avLst/>
-          </a:prstGeom>
-          <a:noFill/>
-        </p:spPr>
-        <p:txBody>
-          <a:bodyPr wrap="square">
-            <a:spAutoFit/>
-          </a:bodyPr>
-          <a:lstStyle/>
-          <a:p>
-            <a:pPr algn="l"/>
-            <a:r>
-              <a:rPr sz="1150" b="0" i="0">
-                <a:solidFill>
-                  <a:srgbClr val="1A1A1A"/>
-                </a:solidFill>
-              </a:rPr>
-              <a:t>▪  NIST FIPS 203 (ML-KEM) – 2024.08</a:t>
-            </a:r>
-          </a:p>
-        </p:txBody>
-      </p:sp>
-      <p:sp>
-        <p:nvSpPr>
-          <p:cNvPr id="9" name="TextBox 8"/>
-          <p:cNvSpPr txBox="1"/>
-          <p:nvPr/>
-        </p:nvSpPr>
-        <p:spPr>
-          <a:xfrm>
-            <a:off x="594360" y="4334256"/>
-            <a:ext cx="4846320" cy="365760"/>
-          </a:xfrm>
-          <a:prstGeom prst="rect">
-            <a:avLst/>
-          </a:prstGeom>
-          <a:noFill/>
-        </p:spPr>
-        <p:txBody>
-          <a:bodyPr wrap="square">
-            <a:spAutoFit/>
-          </a:bodyPr>
-          <a:lstStyle/>
-          <a:p>
-            <a:pPr algn="l"/>
-            <a:r>
-              <a:rPr sz="1150" b="0" i="0">
-                <a:solidFill>
-                  <a:srgbClr val="1A1A1A"/>
-                </a:solidFill>
-              </a:rPr>
-              <a:t>▪  Xiphera xQlave 제품 페이지: xiphera.com</a:t>
-            </a:r>
-          </a:p>
-        </p:txBody>
-      </p:sp>
-      <p:sp>
-        <p:nvSpPr>
-          <p:cNvPr id="10" name="TextBox 9"/>
-          <p:cNvSpPr txBox="1"/>
-          <p:nvPr/>
-        </p:nvSpPr>
-        <p:spPr>
-          <a:xfrm>
-            <a:off x="594360" y="4736592"/>
-            <a:ext cx="4846320" cy="365760"/>
-          </a:xfrm>
-          <a:prstGeom prst="rect">
-            <a:avLst/>
-          </a:prstGeom>
-          <a:noFill/>
-        </p:spPr>
-        <p:txBody>
-          <a:bodyPr wrap="square">
-            <a:spAutoFit/>
-          </a:bodyPr>
-          <a:lstStyle/>
-          <a:p>
-            <a:pPr algn="l"/>
-            <a:r>
-              <a:rPr sz="1150" b="0" i="0">
-                <a:solidFill>
-                  <a:srgbClr val="1A1A1A"/>
-                </a:solidFill>
-              </a:rPr>
-              <a:t>▪  CRYSTALS-Kyber 논문 (Bos et al., 2018)</a:t>
-            </a:r>
-          </a:p>
-        </p:txBody>
-      </p:sp>
-      <p:sp>
-        <p:nvSpPr>
-          <p:cNvPr id="11" name="TextBox 10"/>
-          <p:cNvSpPr txBox="1"/>
-          <p:nvPr/>
-        </p:nvSpPr>
-        <p:spPr>
-          <a:xfrm>
-            <a:off x="594360" y="5138928"/>
-            <a:ext cx="4846320" cy="365760"/>
-          </a:xfrm>
-          <a:prstGeom prst="rect">
-            <a:avLst/>
-          </a:prstGeom>
-          <a:noFill/>
-        </p:spPr>
-        <p:txBody>
-          <a:bodyPr wrap="square">
-            <a:spAutoFit/>
-          </a:bodyPr>
-          <a:lstStyle/>
-          <a:p>
-            <a:pPr algn="l"/>
-            <a:r>
-              <a:rPr sz="1150" b="0" i="0">
-                <a:solidFill>
-                  <a:srgbClr val="1A1A1A"/>
-                </a:solidFill>
-              </a:rPr>
-              <a:t>▪  AMD/Xilinx Alveo U250 데이터시트</a:t>
-            </a:r>
-          </a:p>
-        </p:txBody>
-      </p:sp>
-      <p:sp>
-        <p:nvSpPr>
-          <p:cNvPr id="12" name="TextBox 11"/>
-          <p:cNvSpPr txBox="1"/>
-          <p:nvPr/>
-        </p:nvSpPr>
-        <p:spPr>
-          <a:xfrm>
-            <a:off x="594360" y="5541264"/>
-            <a:ext cx="4846320" cy="365760"/>
-          </a:xfrm>
-          <a:prstGeom prst="rect">
-            <a:avLst/>
-          </a:prstGeom>
-          <a:noFill/>
-        </p:spPr>
-        <p:txBody>
-          <a:bodyPr wrap="square">
-            <a:spAutoFit/>
-          </a:bodyPr>
-          <a:lstStyle/>
-          <a:p>
-            <a:pPr algn="l"/>
-            <a:r>
-              <a:rPr sz="1150" b="0" i="0">
-                <a:solidFill>
-                  <a:srgbClr val="1A1A1A"/>
-                </a:solidFill>
-              </a:rPr>
-              <a:t>▪  liboqs – Open Quantum Safe 프로젝트</a:t>
-            </a:r>
-          </a:p>
-        </p:txBody>
-      </p:sp>
-      <p:sp>
-        <p:nvSpPr>
-          <p:cNvPr id="13" name="Rectangle 12"/>
-          <p:cNvSpPr/>
-          <p:nvPr/>
-        </p:nvSpPr>
-        <p:spPr>
-          <a:xfrm>
-            <a:off x="6583680" y="3383280"/>
-            <a:ext cx="5120640" cy="2560320"/>
-          </a:xfrm>
-          <a:prstGeom prst="rect">
-            <a:avLst/>
-          </a:prstGeom>
-          <a:solidFill>
-            <a:srgbClr val="F0F4F9"/>
-          </a:solidFill>
-          <a:ln w="9525">
-            <a:solidFill>
-              <a:srgbClr val="D6E4F4"/>
-            </a:solidFill>
-          </a:ln>
-        </p:spPr>
-        <p:style>
-          <a:lnRef idx="1">
-            <a:schemeClr val="accent1"/>
-          </a:lnRef>
-          <a:fillRef idx="3">
-            <a:schemeClr val="accent1"/>
-          </a:fillRef>
-          <a:effectRef idx="2">
-            <a:schemeClr val="accent1"/>
-          </a:effectRef>
-          <a:fontRef idx="minor">
-            <a:schemeClr val="lt1"/>
-          </a:fontRef>
-        </p:style>
-        <p:txBody>
-          <a:bodyPr rtlCol="0" anchor="ctr"/>
-          <a:lstStyle/>
-          <a:p>
-            <a:pPr algn="ctr"/>
-          </a:p>
-        </p:txBody>
-      </p:sp>
-      <p:sp>
-        <p:nvSpPr>
-          <p:cNvPr id="14" name="TextBox 13"/>
-          <p:cNvSpPr txBox="1"/>
-          <p:nvPr/>
-        </p:nvSpPr>
-        <p:spPr>
-          <a:xfrm>
-            <a:off x="6720840" y="3456432"/>
-            <a:ext cx="4846320" cy="411480"/>
-          </a:xfrm>
-          <a:prstGeom prst="rect">
-            <a:avLst/>
-          </a:prstGeom>
-          <a:noFill/>
-        </p:spPr>
-        <p:txBody>
-          <a:bodyPr wrap="square">
-            <a:spAutoFit/>
-          </a:bodyPr>
-          <a:lstStyle/>
-          <a:p>
-            <a:pPr algn="l"/>
-            <a:r>
-              <a:rPr sz="1300" b="1" i="0">
-                <a:solidFill>
-                  <a:srgbClr val="1E3A5F"/>
-                </a:solidFill>
-              </a:rPr>
-              <a:t>다음 단계</a:t>
-            </a:r>
-          </a:p>
-        </p:txBody>
-      </p:sp>
-      <p:sp>
-        <p:nvSpPr>
-          <p:cNvPr id="15" name="TextBox 14"/>
-          <p:cNvSpPr txBox="1"/>
-          <p:nvPr/>
-        </p:nvSpPr>
-        <p:spPr>
-          <a:xfrm>
-            <a:off x="6720840" y="3931920"/>
-            <a:ext cx="4846320" cy="365760"/>
-          </a:xfrm>
-          <a:prstGeom prst="rect">
-            <a:avLst/>
-          </a:prstGeom>
-          <a:noFill/>
-        </p:spPr>
-        <p:txBody>
-          <a:bodyPr wrap="square">
-            <a:spAutoFit/>
-          </a:bodyPr>
-          <a:lstStyle/>
-          <a:p>
-            <a:pPr algn="l"/>
-            <a:r>
-              <a:rPr sz="1150" b="0" i="0">
-                <a:solidFill>
-                  <a:srgbClr val="1A1A1A"/>
-                </a:solidFill>
-              </a:rPr>
-              <a:t>▶  Xiphera 영업 문의 및 IP 데모 요청</a:t>
-            </a:r>
-          </a:p>
-        </p:txBody>
-      </p:sp>
-      <p:sp>
-        <p:nvSpPr>
-          <p:cNvPr id="16" name="TextBox 15"/>
-          <p:cNvSpPr txBox="1"/>
-          <p:nvPr/>
-        </p:nvSpPr>
-        <p:spPr>
-          <a:xfrm>
-            <a:off x="6720840" y="4334256"/>
-            <a:ext cx="4846320" cy="365760"/>
-          </a:xfrm>
-          <a:prstGeom prst="rect">
-            <a:avLst/>
-          </a:prstGeom>
-          <a:noFill/>
-        </p:spPr>
-        <p:txBody>
-          <a:bodyPr wrap="square">
-            <a:spAutoFit/>
-          </a:bodyPr>
-          <a:lstStyle/>
-          <a:p>
-            <a:pPr algn="l"/>
-            <a:r>
-              <a:rPr sz="1150" b="0" i="0">
-                <a:solidFill>
-                  <a:srgbClr val="1A1A1A"/>
-                </a:solidFill>
-              </a:rPr>
-              <a:t>▶  FPGA 평가 보드 선정 및 발주</a:t>
-            </a:r>
-          </a:p>
-        </p:txBody>
-      </p:sp>
-      <p:sp>
-        <p:nvSpPr>
-          <p:cNvPr id="17" name="TextBox 16"/>
-          <p:cNvSpPr txBox="1"/>
-          <p:nvPr/>
-        </p:nvSpPr>
-        <p:spPr>
-          <a:xfrm>
-            <a:off x="6720840" y="4736592"/>
-            <a:ext cx="4846320" cy="365760"/>
-          </a:xfrm>
-          <a:prstGeom prst="rect">
-            <a:avLst/>
-          </a:prstGeom>
-          <a:noFill/>
-        </p:spPr>
-        <p:txBody>
-          <a:bodyPr wrap="square">
-            <a:spAutoFit/>
-          </a:bodyPr>
-          <a:lstStyle/>
-          <a:p>
-            <a:pPr algn="l"/>
-            <a:r>
-              <a:rPr sz="1150" b="0" i="0">
-                <a:solidFill>
-                  <a:srgbClr val="1A1A1A"/>
-                </a:solidFill>
-              </a:rPr>
-              <a:t>▶  PoC 환경 구성 (1:1 프로토타입)</a:t>
-            </a:r>
-          </a:p>
-        </p:txBody>
-      </p:sp>
-      <p:sp>
-        <p:nvSpPr>
-          <p:cNvPr id="18" name="TextBox 17"/>
-          <p:cNvSpPr txBox="1"/>
-          <p:nvPr/>
-        </p:nvSpPr>
-        <p:spPr>
-          <a:xfrm>
-            <a:off x="6720840" y="5138928"/>
-            <a:ext cx="4846320" cy="365760"/>
-          </a:xfrm>
-          <a:prstGeom prst="rect">
-            <a:avLst/>
-          </a:prstGeom>
-          <a:noFill/>
-        </p:spPr>
-        <p:txBody>
-          <a:bodyPr wrap="square">
-            <a:spAutoFit/>
-          </a:bodyPr>
-          <a:lstStyle/>
-          <a:p>
-            <a:pPr algn="l"/>
-            <a:r>
-              <a:rPr sz="1150" b="0" i="0">
-                <a:solidFill>
-                  <a:srgbClr val="1A1A1A"/>
-                </a:solidFill>
-              </a:rPr>
-              <a:t>▶  내부 보안 요구사항 확정</a:t>
-            </a:r>
-          </a:p>
-        </p:txBody>
-      </p:sp>
-      <p:sp>
-        <p:nvSpPr>
-          <p:cNvPr id="19" name="TextBox 18"/>
-          <p:cNvSpPr txBox="1"/>
-          <p:nvPr/>
-        </p:nvSpPr>
-        <p:spPr>
-          <a:xfrm>
-            <a:off x="6720840" y="5541264"/>
-            <a:ext cx="4846320" cy="365760"/>
-          </a:xfrm>
-          <a:prstGeom prst="rect">
-            <a:avLst/>
-          </a:prstGeom>
-          <a:noFill/>
-        </p:spPr>
-        <p:txBody>
-          <a:bodyPr wrap="square">
-            <a:spAutoFit/>
-          </a:bodyPr>
-          <a:lstStyle/>
-          <a:p>
-            <a:pPr algn="l"/>
-            <a:r>
-              <a:rPr sz="1150" b="0" i="0">
-                <a:solidFill>
-                  <a:srgbClr val="1A1A1A"/>
-                </a:solidFill>
-              </a:rPr>
-              <a:t>▶  Phase 1 킥오프 일정 협의</a:t>
             </a:r>
           </a:p>
         </p:txBody>
@@ -9796,7 +5761,7 @@
 </file>
 
 <file path=ppt/slides/slide2.xml><?xml version="1.0" encoding="utf-8"?>
-<p:sld xmlns:a="http://schemas.openxmlformats.org/drawingml/2006/main" xmlns:p="http://schemas.openxmlformats.org/presentationml/2006/main" xmlns:r="http://schemas.openxmlformats.org/officeDocument/2006/relationships">
+<p:sld xmlns:a="http://schemas.openxmlformats.org/drawingml/2006/main" xmlns:r="http://schemas.openxmlformats.org/officeDocument/2006/relationships" xmlns:p="http://schemas.openxmlformats.org/presentationml/2006/main">
   <p:cSld>
     <p:spTree>
       <p:nvGrpSpPr>
@@ -9804,7 +5769,14 @@
         <p:cNvGrpSpPr/>
         <p:nvPr/>
       </p:nvGrpSpPr>
-      <p:grpSpPr/>
+      <p:grpSpPr>
+        <a:xfrm>
+          <a:off x="0" y="0"/>
+          <a:ext cx="0" cy="0"/>
+          <a:chOff x="0" y="0"/>
+          <a:chExt cx="0" cy="0"/>
+        </a:xfrm>
+      </p:grpSpPr>
       <p:sp>
         <p:nvSpPr>
           <p:cNvPr id="2" name="Rectangle 1"/>
@@ -9845,6 +5817,7 @@
           <a:lstStyle/>
           <a:p>
             <a:pPr algn="ctr"/>
+            <a:endParaRPr/>
           </a:p>
         </p:txBody>
       </p:sp>
@@ -9888,6 +5861,7 @@
           <a:lstStyle/>
           <a:p>
             <a:pPr algn="ctr"/>
+            <a:endParaRPr/>
           </a:p>
         </p:txBody>
       </p:sp>
@@ -9931,6 +5905,7 @@
           <a:lstStyle/>
           <a:p>
             <a:pPr algn="ctr"/>
+            <a:endParaRPr/>
           </a:p>
         </p:txBody>
       </p:sp>
@@ -9992,12 +5967,28 @@
           <a:p>
             <a:pPr algn="l"/>
             <a:r>
-              <a:rPr sz="1200" b="0" i="1">
+              <a:rPr sz="1200" b="0" i="1" dirty="0">
                 <a:solidFill>
                   <a:srgbClr val="888888"/>
                 </a:solidFill>
               </a:rPr>
-              <a:t>Why PQC on Hardware?</a:t>
+              <a:t>Why </a:t>
+            </a:r>
+            <a:r>
+              <a:rPr sz="1200" b="0" i="1" dirty="0" err="1">
+                <a:solidFill>
+                  <a:srgbClr val="888888"/>
+                </a:solidFill>
+              </a:rPr>
+              <a:t>PQC</a:t>
+            </a:r>
+            <a:r>
+              <a:rPr sz="1200" b="0" i="1" dirty="0">
+                <a:solidFill>
+                  <a:srgbClr val="888888"/>
+                </a:solidFill>
+              </a:rPr>
+              <a:t> on Hardware?</a:t>
             </a:r>
           </a:p>
         </p:txBody>
@@ -10042,6 +6033,7 @@
           <a:lstStyle/>
           <a:p>
             <a:pPr algn="ctr"/>
+            <a:endParaRPr/>
           </a:p>
         </p:txBody>
       </p:sp>
@@ -10087,6 +6079,7 @@
           <a:lstStyle/>
           <a:p>
             <a:pPr algn="ctr"/>
+            <a:endParaRPr/>
           </a:p>
         </p:txBody>
       </p:sp>
@@ -10235,96 +6228,129 @@
         <p:spPr>
           <a:xfrm>
             <a:off x="347472" y="2825495"/>
-            <a:ext cx="5212080" cy="347472"/>
-          </a:xfrm>
-          <a:prstGeom prst="rect">
-            <a:avLst/>
-          </a:prstGeom>
-          <a:noFill/>
-        </p:spPr>
-        <p:txBody>
-          <a:bodyPr wrap="square">
-            <a:spAutoFit/>
-          </a:bodyPr>
-          <a:lstStyle/>
-          <a:p>
-            <a:pPr algn="l"/>
-            <a:r>
-              <a:rPr sz="1250" b="0" i="0">
+            <a:ext cx="5212080" cy="284693"/>
+          </a:xfrm>
+          <a:prstGeom prst="rect">
+            <a:avLst/>
+          </a:prstGeom>
+          <a:noFill/>
+        </p:spPr>
+        <p:txBody>
+          <a:bodyPr wrap="square">
+            <a:spAutoFit/>
+          </a:bodyPr>
+          <a:lstStyle/>
+          <a:p>
+            <a:pPr algn="l"/>
+            <a:r>
+              <a:rPr sz="1250" b="0" i="0" dirty="0">
                 <a:solidFill>
                   <a:srgbClr val="1A1A1A"/>
                 </a:solidFill>
               </a:rPr>
-              <a:t>  ▪ 기존 TCP 통신 장비·소프트웨어 교체 없이 보안 강화 필요</a:t>
-            </a:r>
-          </a:p>
-        </p:txBody>
-      </p:sp>
-      <p:sp>
-        <p:nvSpPr>
-          <p:cNvPr id="14" name="TextBox 13"/>
-          <p:cNvSpPr txBox="1"/>
-          <p:nvPr/>
-        </p:nvSpPr>
-        <p:spPr>
-          <a:xfrm>
-            <a:off x="347472" y="3154679"/>
-            <a:ext cx="5212080" cy="347472"/>
-          </a:xfrm>
-          <a:prstGeom prst="rect">
-            <a:avLst/>
-          </a:prstGeom>
-          <a:noFill/>
-        </p:spPr>
-        <p:txBody>
-          <a:bodyPr wrap="square">
-            <a:spAutoFit/>
-          </a:bodyPr>
-          <a:lstStyle/>
-          <a:p>
-            <a:pPr algn="l"/>
-            <a:r>
-              <a:rPr sz="1200" b="0" i="0">
-                <a:solidFill>
-                  <a:srgbClr val="888888"/>
-                </a:solidFill>
-              </a:rPr>
-              <a:t>    – 임베디드/산업용 장치: 펌웨어 업데이트 제약 多</a:t>
-            </a:r>
-          </a:p>
-        </p:txBody>
-      </p:sp>
-      <p:sp>
-        <p:nvSpPr>
-          <p:cNvPr id="15" name="TextBox 14"/>
-          <p:cNvSpPr txBox="1"/>
-          <p:nvPr/>
-        </p:nvSpPr>
-        <p:spPr>
-          <a:xfrm>
-            <a:off x="347472" y="3483863"/>
-            <a:ext cx="5212080" cy="347472"/>
-          </a:xfrm>
-          <a:prstGeom prst="rect">
-            <a:avLst/>
-          </a:prstGeom>
-          <a:noFill/>
-        </p:spPr>
-        <p:txBody>
-          <a:bodyPr wrap="square">
-            <a:spAutoFit/>
-          </a:bodyPr>
-          <a:lstStyle/>
-          <a:p>
-            <a:pPr algn="l"/>
-            <a:r>
-              <a:rPr sz="1200" b="0" i="0">
-                <a:solidFill>
-                  <a:srgbClr val="888888"/>
-                </a:solidFill>
-              </a:rPr>
-              <a:t>    – 운영 중단 없이 점진적 보안 업그레이드 요구</a:t>
-            </a:r>
+              <a:t>  ▪ </a:t>
+            </a:r>
+            <a:r>
+              <a:rPr sz="1250" b="0" i="0" dirty="0" err="1">
+                <a:solidFill>
+                  <a:srgbClr val="1A1A1A"/>
+                </a:solidFill>
+              </a:rPr>
+              <a:t>기존</a:t>
+            </a:r>
+            <a:r>
+              <a:rPr sz="1250" b="0" i="0" dirty="0">
+                <a:solidFill>
+                  <a:srgbClr val="1A1A1A"/>
+                </a:solidFill>
+              </a:rPr>
+              <a:t> </a:t>
+            </a:r>
+            <a:r>
+              <a:rPr lang="ko-KR" altLang="en-US" sz="1250" dirty="0">
+                <a:solidFill>
+                  <a:srgbClr val="1A1A1A"/>
+                </a:solidFill>
+              </a:rPr>
+              <a:t>검증된 </a:t>
+            </a:r>
+            <a:r>
+              <a:rPr sz="1250" b="0" i="0" dirty="0" err="1">
+                <a:solidFill>
+                  <a:srgbClr val="1A1A1A"/>
+                </a:solidFill>
+              </a:rPr>
+              <a:t>소프트웨어</a:t>
+            </a:r>
+            <a:r>
+              <a:rPr sz="1250" b="0" i="0" dirty="0">
+                <a:solidFill>
+                  <a:srgbClr val="1A1A1A"/>
+                </a:solidFill>
+              </a:rPr>
+              <a:t> </a:t>
+            </a:r>
+            <a:r>
+              <a:rPr sz="1250" b="0" i="0" dirty="0" err="1">
+                <a:solidFill>
+                  <a:srgbClr val="1A1A1A"/>
+                </a:solidFill>
+              </a:rPr>
+              <a:t>교체</a:t>
+            </a:r>
+            <a:r>
+              <a:rPr sz="1250" b="0" i="0" dirty="0">
+                <a:solidFill>
+                  <a:srgbClr val="1A1A1A"/>
+                </a:solidFill>
+              </a:rPr>
+              <a:t> </a:t>
+            </a:r>
+            <a:r>
+              <a:rPr sz="1250" b="0" i="0" dirty="0" err="1">
+                <a:solidFill>
+                  <a:srgbClr val="1A1A1A"/>
+                </a:solidFill>
+              </a:rPr>
+              <a:t>없이</a:t>
+            </a:r>
+            <a:r>
+              <a:rPr sz="1250" b="0" i="0" dirty="0">
+                <a:solidFill>
+                  <a:srgbClr val="1A1A1A"/>
+                </a:solidFill>
+              </a:rPr>
+              <a:t> </a:t>
+            </a:r>
+            <a:r>
+              <a:rPr sz="1250" b="0" i="0" dirty="0" err="1">
+                <a:solidFill>
+                  <a:srgbClr val="1A1A1A"/>
+                </a:solidFill>
+              </a:rPr>
+              <a:t>보안</a:t>
+            </a:r>
+            <a:r>
+              <a:rPr sz="1250" b="0" i="0" dirty="0">
+                <a:solidFill>
+                  <a:srgbClr val="1A1A1A"/>
+                </a:solidFill>
+              </a:rPr>
+              <a:t> </a:t>
+            </a:r>
+            <a:r>
+              <a:rPr sz="1250" b="0" i="0" dirty="0" err="1">
+                <a:solidFill>
+                  <a:srgbClr val="1A1A1A"/>
+                </a:solidFill>
+              </a:rPr>
+              <a:t>강화</a:t>
+            </a:r>
+            <a:endParaRPr sz="1250" b="0" i="0" dirty="0">
+              <a:solidFill>
+                <a:srgbClr val="1A1A1A"/>
+              </a:solidFill>
+            </a:endParaRPr>
           </a:p>
         </p:txBody>
       </p:sp>
@@ -10370,6 +6396,7 @@
           <a:lstStyle/>
           <a:p>
             <a:pPr algn="ctr"/>
+            <a:endParaRPr/>
           </a:p>
         </p:txBody>
       </p:sp>
@@ -10619,6 +6646,7 @@
           <a:lstStyle/>
           <a:p>
             <a:pPr algn="ctr"/>
+            <a:endParaRPr/>
           </a:p>
         </p:txBody>
       </p:sp>
@@ -10631,28 +6659,161 @@
         <p:spPr>
           <a:xfrm>
             <a:off x="457200" y="4160520"/>
-            <a:ext cx="11247120" cy="502920"/>
-          </a:xfrm>
-          <a:prstGeom prst="rect">
-            <a:avLst/>
-          </a:prstGeom>
-          <a:noFill/>
-        </p:spPr>
-        <p:txBody>
-          <a:bodyPr wrap="square">
-            <a:spAutoFit/>
-          </a:bodyPr>
-          <a:lstStyle/>
-          <a:p>
-            <a:pPr algn="l"/>
-            <a:r>
-              <a:rPr sz="1300" b="1" i="0">
+            <a:ext cx="11247120" cy="292388"/>
+          </a:xfrm>
+          <a:prstGeom prst="rect">
+            <a:avLst/>
+          </a:prstGeom>
+          <a:noFill/>
+        </p:spPr>
+        <p:txBody>
+          <a:bodyPr wrap="square">
+            <a:spAutoFit/>
+          </a:bodyPr>
+          <a:lstStyle/>
+          <a:p>
+            <a:pPr algn="l"/>
+            <a:r>
+              <a:rPr sz="1300" b="1" i="0" dirty="0" err="1">
                 <a:solidFill>
                   <a:srgbClr val="1E6FBF"/>
                 </a:solidFill>
               </a:rPr>
-              <a:t>핵심 원칙: 기존 시스템은 일체 손대지 않고, 통신 경로 중간에 PQC 하드웨어 게이트웨이를 삽입</a:t>
-            </a:r>
+              <a:t>핵심</a:t>
+            </a:r>
+            <a:r>
+              <a:rPr sz="1300" b="1" i="0" dirty="0">
+                <a:solidFill>
+                  <a:srgbClr val="1E6FBF"/>
+                </a:solidFill>
+              </a:rPr>
+              <a:t> </a:t>
+            </a:r>
+            <a:r>
+              <a:rPr sz="1300" b="1" i="0" dirty="0" err="1">
+                <a:solidFill>
+                  <a:srgbClr val="1E6FBF"/>
+                </a:solidFill>
+              </a:rPr>
+              <a:t>원칙</a:t>
+            </a:r>
+            <a:r>
+              <a:rPr sz="1300" b="1" i="0" dirty="0">
+                <a:solidFill>
+                  <a:srgbClr val="1E6FBF"/>
+                </a:solidFill>
+              </a:rPr>
+              <a:t>: </a:t>
+            </a:r>
+            <a:r>
+              <a:rPr sz="1300" b="1" i="0" dirty="0" err="1">
+                <a:solidFill>
+                  <a:srgbClr val="1E6FBF"/>
+                </a:solidFill>
+              </a:rPr>
+              <a:t>통신</a:t>
+            </a:r>
+            <a:r>
+              <a:rPr sz="1300" b="1" i="0" dirty="0">
+                <a:solidFill>
+                  <a:srgbClr val="1E6FBF"/>
+                </a:solidFill>
+              </a:rPr>
+              <a:t> </a:t>
+            </a:r>
+            <a:r>
+              <a:rPr sz="1300" b="1" i="0" dirty="0" err="1">
+                <a:solidFill>
+                  <a:srgbClr val="1E6FBF"/>
+                </a:solidFill>
+              </a:rPr>
+              <a:t>경로</a:t>
+            </a:r>
+            <a:r>
+              <a:rPr sz="1300" b="1" i="0" dirty="0">
+                <a:solidFill>
+                  <a:srgbClr val="1E6FBF"/>
+                </a:solidFill>
+              </a:rPr>
+              <a:t> </a:t>
+            </a:r>
+            <a:r>
+              <a:rPr sz="1300" b="1" i="0" dirty="0" err="1">
+                <a:solidFill>
+                  <a:srgbClr val="1E6FBF"/>
+                </a:solidFill>
+              </a:rPr>
+              <a:t>중간에</a:t>
+            </a:r>
+            <a:r>
+              <a:rPr sz="1300" b="1" i="0" dirty="0">
+                <a:solidFill>
+                  <a:srgbClr val="1E6FBF"/>
+                </a:solidFill>
+              </a:rPr>
+              <a:t> </a:t>
+            </a:r>
+            <a:r>
+              <a:rPr sz="1300" b="1" i="0" dirty="0" err="1">
+                <a:solidFill>
+                  <a:srgbClr val="1E6FBF"/>
+                </a:solidFill>
+              </a:rPr>
+              <a:t>PQC</a:t>
+            </a:r>
+            <a:r>
+              <a:rPr sz="1300" b="1" i="0" dirty="0">
+                <a:solidFill>
+                  <a:srgbClr val="1E6FBF"/>
+                </a:solidFill>
+              </a:rPr>
+              <a:t> </a:t>
+            </a:r>
+            <a:r>
+              <a:rPr sz="1300" b="1" i="0" dirty="0" err="1">
+                <a:solidFill>
+                  <a:srgbClr val="1E6FBF"/>
+                </a:solidFill>
+              </a:rPr>
+              <a:t>하드웨어</a:t>
+            </a:r>
+            <a:r>
+              <a:rPr sz="1300" b="1" i="0" dirty="0">
+                <a:solidFill>
+                  <a:srgbClr val="1E6FBF"/>
+                </a:solidFill>
+              </a:rPr>
+              <a:t> </a:t>
+            </a:r>
+            <a:r>
+              <a:rPr sz="1300" b="1" i="0" dirty="0" err="1">
+                <a:solidFill>
+                  <a:srgbClr val="1E6FBF"/>
+                </a:solidFill>
+              </a:rPr>
+              <a:t>게이트웨이를</a:t>
+            </a:r>
+            <a:r>
+              <a:rPr sz="1300" b="1" i="0" dirty="0">
+                <a:solidFill>
+                  <a:srgbClr val="1E6FBF"/>
+                </a:solidFill>
+              </a:rPr>
+              <a:t> </a:t>
+            </a:r>
+            <a:r>
+              <a:rPr sz="1300" b="1" i="0" dirty="0" err="1">
+                <a:solidFill>
+                  <a:srgbClr val="1E6FBF"/>
+                </a:solidFill>
+              </a:rPr>
+              <a:t>삽입</a:t>
+            </a:r>
+            <a:endParaRPr sz="1300" b="1" i="0" dirty="0">
+              <a:solidFill>
+                <a:srgbClr val="1E6FBF"/>
+              </a:solidFill>
+            </a:endParaRPr>
           </a:p>
         </p:txBody>
       </p:sp>
@@ -10665,7 +6826,7 @@
 </file>
 
 <file path=ppt/slides/slide3.xml><?xml version="1.0" encoding="utf-8"?>
-<p:sld xmlns:a="http://schemas.openxmlformats.org/drawingml/2006/main" xmlns:p="http://schemas.openxmlformats.org/presentationml/2006/main" xmlns:r="http://schemas.openxmlformats.org/officeDocument/2006/relationships">
+<p:sld xmlns:a="http://schemas.openxmlformats.org/drawingml/2006/main" xmlns:r="http://schemas.openxmlformats.org/officeDocument/2006/relationships" xmlns:p="http://schemas.openxmlformats.org/presentationml/2006/main">
   <p:cSld>
     <p:spTree>
       <p:nvGrpSpPr>
@@ -10673,7 +6834,14 @@
         <p:cNvGrpSpPr/>
         <p:nvPr/>
       </p:nvGrpSpPr>
-      <p:grpSpPr/>
+      <p:grpSpPr>
+        <a:xfrm>
+          <a:off x="0" y="0"/>
+          <a:ext cx="0" cy="0"/>
+          <a:chOff x="0" y="0"/>
+          <a:chExt cx="0" cy="0"/>
+        </a:xfrm>
+      </p:grpSpPr>
       <p:sp>
         <p:nvSpPr>
           <p:cNvPr id="2" name="Rectangle 1"/>
@@ -10714,6 +6882,7 @@
           <a:lstStyle/>
           <a:p>
             <a:pPr algn="ctr"/>
+            <a:endParaRPr/>
           </a:p>
         </p:txBody>
       </p:sp>
@@ -10757,6 +6926,7 @@
           <a:lstStyle/>
           <a:p>
             <a:pPr algn="ctr"/>
+            <a:endParaRPr/>
           </a:p>
         </p:txBody>
       </p:sp>
@@ -10800,6 +6970,7 @@
           <a:lstStyle/>
           <a:p>
             <a:pPr algn="ctr"/>
+            <a:endParaRPr/>
           </a:p>
         </p:txBody>
       </p:sp>
@@ -10911,6 +7082,7 @@
           <a:lstStyle/>
           <a:p>
             <a:pPr algn="ctr"/>
+            <a:endParaRPr/>
           </a:p>
         </p:txBody>
       </p:sp>
@@ -10956,6 +7128,7 @@
           <a:lstStyle/>
           <a:p>
             <a:pPr algn="ctr"/>
+            <a:endParaRPr/>
           </a:p>
         </p:txBody>
       </p:sp>
@@ -10968,7 +7141,7 @@
         <p:spPr>
           <a:xfrm>
             <a:off x="274320" y="1554480"/>
-            <a:ext cx="1645920" cy="1097280"/>
+            <a:ext cx="1645920" cy="461665"/>
           </a:xfrm>
           <a:prstGeom prst="rect">
             <a:avLst/>
@@ -10983,14 +7156,53 @@
           <a:p>
             <a:pPr algn="ctr"/>
             <a:r>
-              <a:rPr sz="1200" b="1" i="0">
+              <a:rPr sz="1200" b="1" i="0" dirty="0">
                 <a:solidFill>
                   <a:srgbClr val="1E3A5F"/>
                 </a:solidFill>
               </a:rPr>
               <a:t>PC
-(기존 SW
-무수정)</a:t>
+(</a:t>
+            </a:r>
+            <a:r>
+              <a:rPr sz="1200" b="1" i="0" dirty="0" err="1">
+                <a:solidFill>
+                  <a:srgbClr val="1E3A5F"/>
+                </a:solidFill>
+              </a:rPr>
+              <a:t>기존</a:t>
+            </a:r>
+            <a:r>
+              <a:rPr sz="1200" b="1" i="0" dirty="0">
+                <a:solidFill>
+                  <a:srgbClr val="1E3A5F"/>
+                </a:solidFill>
+              </a:rPr>
+              <a:t> SW</a:t>
+            </a:r>
+            <a:r>
+              <a:rPr lang="en-US" sz="1200" b="1" i="0" dirty="0">
+                <a:solidFill>
+                  <a:srgbClr val="1E3A5F"/>
+                </a:solidFill>
+              </a:rPr>
+              <a:t> </a:t>
+            </a:r>
+            <a:r>
+              <a:rPr sz="1200" b="1" i="0" dirty="0" err="1">
+                <a:solidFill>
+                  <a:srgbClr val="1E3A5F"/>
+                </a:solidFill>
+              </a:rPr>
+              <a:t>무수정</a:t>
+            </a:r>
+            <a:r>
+              <a:rPr sz="1200" b="1" i="0" dirty="0">
+                <a:solidFill>
+                  <a:srgbClr val="1E3A5F"/>
+                </a:solidFill>
+              </a:rPr>
+              <a:t>)</a:t>
             </a:r>
           </a:p>
         </p:txBody>
@@ -11105,6 +7317,7 @@
           <a:lstStyle/>
           <a:p>
             <a:pPr algn="ctr"/>
+            <a:endParaRPr/>
           </a:p>
         </p:txBody>
       </p:sp>
@@ -11254,6 +7467,7 @@
           <a:lstStyle/>
           <a:p>
             <a:pPr algn="ctr"/>
+            <a:endParaRPr/>
           </a:p>
         </p:txBody>
       </p:sp>
@@ -11402,6 +7616,7 @@
           <a:lstStyle/>
           <a:p>
             <a:pPr algn="ctr"/>
+            <a:endParaRPr/>
           </a:p>
         </p:txBody>
       </p:sp>
@@ -11483,6 +7698,7 @@
           <a:lstStyle/>
           <a:p>
             <a:pPr algn="ctr"/>
+            <a:endParaRPr/>
           </a:p>
         </p:txBody>
       </p:sp>
@@ -11562,6 +7778,7 @@
           <a:lstStyle/>
           <a:p>
             <a:pPr algn="ctr"/>
+            <a:endParaRPr/>
           </a:p>
         </p:txBody>
       </p:sp>
@@ -11641,6 +7858,7 @@
           <a:lstStyle/>
           <a:p>
             <a:pPr algn="ctr"/>
+            <a:endParaRPr/>
           </a:p>
         </p:txBody>
       </p:sp>
@@ -11721,7 +7939,7 @@
         <p:spPr>
           <a:xfrm>
             <a:off x="274320" y="3108960"/>
-            <a:ext cx="11612880" cy="1828800"/>
+            <a:ext cx="6474823" cy="1828800"/>
           </a:xfrm>
           <a:prstGeom prst="rect">
             <a:avLst/>
@@ -11754,6 +7972,7 @@
           <a:lstStyle/>
           <a:p>
             <a:pPr algn="ctr"/>
+            <a:endParaRPr/>
           </a:p>
         </p:txBody>
       </p:sp>
@@ -11936,7 +8155,7 @@
 </file>
 
 <file path=ppt/slides/slide4.xml><?xml version="1.0" encoding="utf-8"?>
-<p:sld xmlns:a="http://schemas.openxmlformats.org/drawingml/2006/main" xmlns:p="http://schemas.openxmlformats.org/presentationml/2006/main" xmlns:r="http://schemas.openxmlformats.org/officeDocument/2006/relationships">
+<p:sld xmlns:a="http://schemas.openxmlformats.org/drawingml/2006/main" xmlns:r="http://schemas.openxmlformats.org/officeDocument/2006/relationships" xmlns:p="http://schemas.openxmlformats.org/presentationml/2006/main">
   <p:cSld>
     <p:spTree>
       <p:nvGrpSpPr>
@@ -11944,7 +8163,14 @@
         <p:cNvGrpSpPr/>
         <p:nvPr/>
       </p:nvGrpSpPr>
-      <p:grpSpPr/>
+      <p:grpSpPr>
+        <a:xfrm>
+          <a:off x="0" y="0"/>
+          <a:ext cx="0" cy="0"/>
+          <a:chOff x="0" y="0"/>
+          <a:chExt cx="0" cy="0"/>
+        </a:xfrm>
+      </p:grpSpPr>
       <p:sp>
         <p:nvSpPr>
           <p:cNvPr id="2" name="Rectangle 1"/>
@@ -11985,6 +8211,7 @@
           <a:lstStyle/>
           <a:p>
             <a:pPr algn="ctr"/>
+            <a:endParaRPr/>
           </a:p>
         </p:txBody>
       </p:sp>
@@ -12028,6 +8255,7 @@
           <a:lstStyle/>
           <a:p>
             <a:pPr algn="ctr"/>
+            <a:endParaRPr/>
           </a:p>
         </p:txBody>
       </p:sp>
@@ -12071,6 +8299,7 @@
           <a:lstStyle/>
           <a:p>
             <a:pPr algn="ctr"/>
+            <a:endParaRPr/>
           </a:p>
         </p:txBody>
       </p:sp>
@@ -12083,28 +8312,65 @@
         <p:spPr>
           <a:xfrm>
             <a:off x="365760" y="137160"/>
-            <a:ext cx="11430000" cy="658368"/>
-          </a:xfrm>
-          <a:prstGeom prst="rect">
-            <a:avLst/>
-          </a:prstGeom>
-          <a:noFill/>
-        </p:spPr>
-        <p:txBody>
-          <a:bodyPr wrap="square">
-            <a:spAutoFit/>
-          </a:bodyPr>
-          <a:lstStyle/>
-          <a:p>
-            <a:pPr algn="l"/>
-            <a:r>
-              <a:rPr sz="2400" b="1" i="0">
+            <a:ext cx="11430000" cy="461665"/>
+          </a:xfrm>
+          <a:prstGeom prst="rect">
+            <a:avLst/>
+          </a:prstGeom>
+          <a:noFill/>
+        </p:spPr>
+        <p:txBody>
+          <a:bodyPr wrap="square">
+            <a:spAutoFit/>
+          </a:bodyPr>
+          <a:lstStyle/>
+          <a:p>
+            <a:pPr algn="l"/>
+            <a:r>
+              <a:rPr sz="2400" b="1" i="0" dirty="0" err="1">
                 <a:solidFill>
                   <a:srgbClr val="1E3A5F"/>
                 </a:solidFill>
               </a:rPr>
-              <a:t>Xiphera xQlave™ FPGA IP 코어 소개</a:t>
-            </a:r>
+              <a:t>Xiphera</a:t>
+            </a:r>
+            <a:r>
+              <a:rPr sz="2400" b="1" i="0" dirty="0">
+                <a:solidFill>
+                  <a:srgbClr val="1E3A5F"/>
+                </a:solidFill>
+              </a:rPr>
+              <a:t> </a:t>
+            </a:r>
+            <a:r>
+              <a:rPr sz="2400" b="1" i="0" dirty="0" err="1">
+                <a:solidFill>
+                  <a:srgbClr val="1E3A5F"/>
+                </a:solidFill>
+              </a:rPr>
+              <a:t>xQlave</a:t>
+            </a:r>
+            <a:r>
+              <a:rPr sz="2400" b="1" i="0" dirty="0">
+                <a:solidFill>
+                  <a:srgbClr val="1E3A5F"/>
+                </a:solidFill>
+              </a:rPr>
+              <a:t>™ FPGA IP </a:t>
+            </a:r>
+            <a:r>
+              <a:rPr sz="2400" b="1" i="0" dirty="0" err="1">
+                <a:solidFill>
+                  <a:srgbClr val="1E3A5F"/>
+                </a:solidFill>
+              </a:rPr>
+              <a:t>코어</a:t>
+            </a:r>
+            <a:endParaRPr sz="2400" b="1" i="0" dirty="0">
+              <a:solidFill>
+                <a:srgbClr val="1E3A5F"/>
+              </a:solidFill>
+            </a:endParaRPr>
           </a:p>
         </p:txBody>
       </p:sp>
@@ -12182,6 +8448,7 @@
           <a:lstStyle/>
           <a:p>
             <a:pPr algn="ctr"/>
+            <a:endParaRPr/>
           </a:p>
         </p:txBody>
       </p:sp>
@@ -12194,7 +8461,7 @@
         <p:spPr>
           <a:xfrm>
             <a:off x="274320" y="1325880"/>
-            <a:ext cx="5577840" cy="2286000"/>
+            <a:ext cx="5577840" cy="2525058"/>
           </a:xfrm>
           <a:prstGeom prst="rect">
             <a:avLst/>
@@ -12227,6 +8494,7 @@
           <a:lstStyle/>
           <a:p>
             <a:pPr algn="ctr"/>
+            <a:endParaRPr/>
           </a:p>
         </p:txBody>
       </p:sp>
@@ -12238,7 +8506,7 @@
         </p:nvSpPr>
         <p:spPr>
           <a:xfrm>
-            <a:off x="384048" y="1435607"/>
+            <a:off x="384048" y="1400771"/>
             <a:ext cx="5349240" cy="365760"/>
           </a:xfrm>
           <a:prstGeom prst="rect">
@@ -12254,13 +8522,34 @@
           <a:p>
             <a:pPr algn="l"/>
             <a:r>
-              <a:rPr sz="1300" b="1" i="0">
+              <a:rPr sz="1300" b="1" i="0" dirty="0" err="1">
                 <a:solidFill>
                   <a:srgbClr val="1E3A5F"/>
                 </a:solidFill>
               </a:rPr>
-              <a:t>Xiphera 社 개요</a:t>
-            </a:r>
+              <a:t>Xiphera</a:t>
+            </a:r>
+            <a:r>
+              <a:rPr sz="1300" b="1" i="0" dirty="0">
+                <a:solidFill>
+                  <a:srgbClr val="1E3A5F"/>
+                </a:solidFill>
+              </a:rPr>
+              <a:t> 社 </a:t>
+            </a:r>
+            <a:r>
+              <a:rPr sz="1300" b="1" i="0" dirty="0" err="1">
+                <a:solidFill>
+                  <a:srgbClr val="1E3A5F"/>
+                </a:solidFill>
+              </a:rPr>
+              <a:t>개요</a:t>
+            </a:r>
+            <a:endParaRPr sz="1300" b="1" i="0" dirty="0">
+              <a:solidFill>
+                <a:srgbClr val="1E3A5F"/>
+              </a:solidFill>
+            </a:endParaRPr>
           </a:p>
         </p:txBody>
       </p:sp>
@@ -12272,7 +8561,7 @@
         </p:nvSpPr>
         <p:spPr>
           <a:xfrm>
-            <a:off x="347472" y="1837943"/>
+            <a:off x="347472" y="1803107"/>
             <a:ext cx="5394959" cy="347472"/>
           </a:xfrm>
           <a:prstGeom prst="rect">
@@ -12306,7 +8595,7 @@
         </p:nvSpPr>
         <p:spPr>
           <a:xfrm>
-            <a:off x="347472" y="2167127"/>
+            <a:off x="347472" y="2132291"/>
             <a:ext cx="5394959" cy="347472"/>
           </a:xfrm>
           <a:prstGeom prst="rect">
@@ -12340,7 +8629,7 @@
         </p:nvSpPr>
         <p:spPr>
           <a:xfrm>
-            <a:off x="347472" y="2496311"/>
+            <a:off x="347472" y="2461475"/>
             <a:ext cx="5394959" cy="347472"/>
           </a:xfrm>
           <a:prstGeom prst="rect">
@@ -12374,7 +8663,7 @@
         </p:nvSpPr>
         <p:spPr>
           <a:xfrm>
-            <a:off x="347472" y="2825495"/>
+            <a:off x="347472" y="2790659"/>
             <a:ext cx="5394959" cy="347472"/>
           </a:xfrm>
           <a:prstGeom prst="rect">
@@ -12409,7 +8698,7 @@
         <p:spPr>
           <a:xfrm>
             <a:off x="5943600" y="1325880"/>
-            <a:ext cx="5943600" cy="2286000"/>
+            <a:ext cx="5943600" cy="2525058"/>
           </a:xfrm>
           <a:prstGeom prst="rect">
             <a:avLst/>
@@ -12442,6 +8731,7 @@
           <a:lstStyle/>
           <a:p>
             <a:pPr algn="ctr"/>
+            <a:endParaRPr/>
           </a:p>
         </p:txBody>
       </p:sp>
@@ -12453,7 +8743,7 @@
         </p:nvSpPr>
         <p:spPr>
           <a:xfrm>
-            <a:off x="6053328" y="1435607"/>
+            <a:off x="6053328" y="1400771"/>
             <a:ext cx="5715000" cy="365760"/>
           </a:xfrm>
           <a:prstGeom prst="rect">
@@ -12487,7 +8777,7 @@
         </p:nvSpPr>
         <p:spPr>
           <a:xfrm>
-            <a:off x="6016752" y="1837943"/>
+            <a:off x="6016752" y="1803107"/>
             <a:ext cx="5760720" cy="347472"/>
           </a:xfrm>
           <a:prstGeom prst="rect">
@@ -12521,7 +8811,7 @@
         </p:nvSpPr>
         <p:spPr>
           <a:xfrm>
-            <a:off x="6016752" y="2167127"/>
+            <a:off x="6016752" y="2132291"/>
             <a:ext cx="5760720" cy="347472"/>
           </a:xfrm>
           <a:prstGeom prst="rect">
@@ -12555,7 +8845,7 @@
         </p:nvSpPr>
         <p:spPr>
           <a:xfrm>
-            <a:off x="6016752" y="2496311"/>
+            <a:off x="6016752" y="2461475"/>
             <a:ext cx="5760720" cy="347472"/>
           </a:xfrm>
           <a:prstGeom prst="rect">
@@ -12589,7 +8879,7 @@
         </p:nvSpPr>
         <p:spPr>
           <a:xfrm>
-            <a:off x="6016752" y="2825495"/>
+            <a:off x="6016752" y="2790659"/>
             <a:ext cx="5760720" cy="347472"/>
           </a:xfrm>
           <a:prstGeom prst="rect">
@@ -12623,7 +8913,7 @@
         </p:nvSpPr>
         <p:spPr>
           <a:xfrm>
-            <a:off x="6016752" y="3154679"/>
+            <a:off x="6016752" y="3119843"/>
             <a:ext cx="5760720" cy="347472"/>
           </a:xfrm>
           <a:prstGeom prst="rect">
@@ -12657,7 +8947,7 @@
         </p:nvSpPr>
         <p:spPr>
           <a:xfrm>
-            <a:off x="6016752" y="3483863"/>
+            <a:off x="6016752" y="3449027"/>
             <a:ext cx="5760720" cy="347472"/>
           </a:xfrm>
           <a:prstGeom prst="rect">
@@ -12691,8 +8981,8 @@
         </p:nvSpPr>
         <p:spPr>
           <a:xfrm>
-            <a:off x="274320" y="3749039"/>
-            <a:ext cx="11612880" cy="1737360"/>
+            <a:off x="274320" y="4010299"/>
+            <a:ext cx="11612880" cy="1847089"/>
           </a:xfrm>
           <a:prstGeom prst="rect">
             <a:avLst/>
@@ -12725,6 +9015,7 @@
           <a:lstStyle/>
           <a:p>
             <a:pPr algn="ctr"/>
+            <a:endParaRPr/>
           </a:p>
         </p:txBody>
       </p:sp>
@@ -12736,7 +9027,7 @@
         </p:nvSpPr>
         <p:spPr>
           <a:xfrm>
-            <a:off x="384048" y="3858768"/>
+            <a:off x="384048" y="4120029"/>
             <a:ext cx="11384280" cy="365760"/>
           </a:xfrm>
           <a:prstGeom prst="rect">
@@ -12770,7 +9061,7 @@
         </p:nvSpPr>
         <p:spPr>
           <a:xfrm>
-            <a:off x="347472" y="4261104"/>
+            <a:off x="347472" y="4522365"/>
             <a:ext cx="11430000" cy="347472"/>
           </a:xfrm>
           <a:prstGeom prst="rect">
@@ -12804,7 +9095,7 @@
         </p:nvSpPr>
         <p:spPr>
           <a:xfrm>
-            <a:off x="347472" y="4590288"/>
+            <a:off x="347472" y="4851549"/>
             <a:ext cx="11430000" cy="347472"/>
           </a:xfrm>
           <a:prstGeom prst="rect">
@@ -12838,7 +9129,7 @@
         </p:nvSpPr>
         <p:spPr>
           <a:xfrm>
-            <a:off x="347472" y="4919472"/>
+            <a:off x="347472" y="5180733"/>
             <a:ext cx="11430000" cy="347472"/>
           </a:xfrm>
           <a:prstGeom prst="rect">
@@ -12872,7 +9163,7 @@
         </p:nvSpPr>
         <p:spPr>
           <a:xfrm>
-            <a:off x="347472" y="5248656"/>
+            <a:off x="347472" y="5509917"/>
             <a:ext cx="11430000" cy="347472"/>
           </a:xfrm>
           <a:prstGeom prst="rect">
@@ -12907,7 +9198,7 @@
 </file>
 
 <file path=ppt/slides/slide5.xml><?xml version="1.0" encoding="utf-8"?>
-<p:sld xmlns:a="http://schemas.openxmlformats.org/drawingml/2006/main" xmlns:p="http://schemas.openxmlformats.org/presentationml/2006/main" xmlns:r="http://schemas.openxmlformats.org/officeDocument/2006/relationships">
+<p:sld xmlns:a="http://schemas.openxmlformats.org/drawingml/2006/main" xmlns:r="http://schemas.openxmlformats.org/officeDocument/2006/relationships" xmlns:p="http://schemas.openxmlformats.org/presentationml/2006/main">
   <p:cSld>
     <p:spTree>
       <p:nvGrpSpPr>
@@ -12915,7 +9206,14 @@
         <p:cNvGrpSpPr/>
         <p:nvPr/>
       </p:nvGrpSpPr>
-      <p:grpSpPr/>
+      <p:grpSpPr>
+        <a:xfrm>
+          <a:off x="0" y="0"/>
+          <a:ext cx="0" cy="0"/>
+          <a:chOff x="0" y="0"/>
+          <a:chExt cx="0" cy="0"/>
+        </a:xfrm>
+      </p:grpSpPr>
       <p:sp>
         <p:nvSpPr>
           <p:cNvPr id="2" name="Rectangle 1"/>
@@ -12924,7 +9222,7 @@
         </p:nvSpPr>
         <p:spPr>
           <a:xfrm>
-            <a:off x="0" y="0"/>
+            <a:off x="0" y="45720"/>
             <a:ext cx="12188952" cy="6858000"/>
           </a:xfrm>
           <a:prstGeom prst="rect">
@@ -12956,6 +9254,7 @@
           <a:lstStyle/>
           <a:p>
             <a:pPr algn="ctr"/>
+            <a:endParaRPr/>
           </a:p>
         </p:txBody>
       </p:sp>
@@ -12999,6 +9298,7 @@
           <a:lstStyle/>
           <a:p>
             <a:pPr algn="ctr"/>
+            <a:endParaRPr/>
           </a:p>
         </p:txBody>
       </p:sp>
@@ -13042,6 +9342,7 @@
           <a:lstStyle/>
           <a:p>
             <a:pPr algn="ctr"/>
+            <a:endParaRPr/>
           </a:p>
         </p:txBody>
       </p:sp>
@@ -13153,6 +9454,7 @@
           <a:lstStyle/>
           <a:p>
             <a:pPr algn="ctr"/>
+            <a:endParaRPr/>
           </a:p>
         </p:txBody>
       </p:sp>
@@ -13164,8 +9466,8 @@
         </p:nvSpPr>
         <p:spPr>
           <a:xfrm>
-            <a:off x="228600" y="1325880"/>
-            <a:ext cx="3383280" cy="5212080"/>
+            <a:off x="256031" y="1884969"/>
+            <a:ext cx="3383280" cy="3716383"/>
           </a:xfrm>
           <a:prstGeom prst="rect">
             <a:avLst/>
@@ -13198,6 +9500,7 @@
           <a:lstStyle/>
           <a:p>
             <a:pPr algn="ctr"/>
+            <a:endParaRPr/>
           </a:p>
         </p:txBody>
       </p:sp>
@@ -13209,7 +9512,7 @@
         </p:nvSpPr>
         <p:spPr>
           <a:xfrm>
-            <a:off x="274320" y="1371600"/>
+            <a:off x="301751" y="1930689"/>
             <a:ext cx="3291840" cy="384048"/>
           </a:xfrm>
           <a:prstGeom prst="rect">
@@ -13243,7 +9546,7 @@
         </p:nvSpPr>
         <p:spPr>
           <a:xfrm>
-            <a:off x="365760" y="1874519"/>
+            <a:off x="393191" y="2433608"/>
             <a:ext cx="3108960" cy="502920"/>
           </a:xfrm>
           <a:prstGeom prst="rect">
@@ -13277,6 +9580,7 @@
           <a:lstStyle/>
           <a:p>
             <a:pPr algn="ctr"/>
+            <a:endParaRPr/>
           </a:p>
         </p:txBody>
       </p:sp>
@@ -13288,7 +9592,7 @@
         </p:nvSpPr>
         <p:spPr>
           <a:xfrm>
-            <a:off x="384048" y="1911095"/>
+            <a:off x="411479" y="2470184"/>
             <a:ext cx="3072384" cy="457200"/>
           </a:xfrm>
           <a:prstGeom prst="rect">
@@ -13322,7 +9626,7 @@
         </p:nvSpPr>
         <p:spPr>
           <a:xfrm>
-            <a:off x="365760" y="2514600"/>
+            <a:off x="393191" y="3073689"/>
             <a:ext cx="3108960" cy="502920"/>
           </a:xfrm>
           <a:prstGeom prst="rect">
@@ -13356,6 +9660,7 @@
           <a:lstStyle/>
           <a:p>
             <a:pPr algn="ctr"/>
+            <a:endParaRPr/>
           </a:p>
         </p:txBody>
       </p:sp>
@@ -13367,7 +9672,7 @@
         </p:nvSpPr>
         <p:spPr>
           <a:xfrm>
-            <a:off x="384048" y="2551176"/>
+            <a:off x="411479" y="3110265"/>
             <a:ext cx="3072384" cy="457200"/>
           </a:xfrm>
           <a:prstGeom prst="rect">
@@ -13402,7 +9707,7 @@
         </p:nvSpPr>
         <p:spPr>
           <a:xfrm>
-            <a:off x="365760" y="3200400"/>
+            <a:off x="393191" y="3759489"/>
             <a:ext cx="3108960" cy="502920"/>
           </a:xfrm>
           <a:prstGeom prst="rect">
@@ -13436,6 +9741,7 @@
           <a:lstStyle/>
           <a:p>
             <a:pPr algn="ctr"/>
+            <a:endParaRPr/>
           </a:p>
         </p:txBody>
       </p:sp>
@@ -13447,7 +9753,7 @@
         </p:nvSpPr>
         <p:spPr>
           <a:xfrm>
-            <a:off x="384048" y="3236976"/>
+            <a:off x="411479" y="3796065"/>
             <a:ext cx="3072384" cy="457200"/>
           </a:xfrm>
           <a:prstGeom prst="rect">
@@ -13481,7 +9787,7 @@
         </p:nvSpPr>
         <p:spPr>
           <a:xfrm>
-            <a:off x="365760" y="3749039"/>
+            <a:off x="393191" y="4308128"/>
             <a:ext cx="3108960" cy="502920"/>
           </a:xfrm>
           <a:prstGeom prst="rect">
@@ -13515,6 +9821,7 @@
           <a:lstStyle/>
           <a:p>
             <a:pPr algn="ctr"/>
+            <a:endParaRPr/>
           </a:p>
         </p:txBody>
       </p:sp>
@@ -13526,7 +9833,7 @@
         </p:nvSpPr>
         <p:spPr>
           <a:xfrm>
-            <a:off x="384048" y="3785615"/>
+            <a:off x="411479" y="4344704"/>
             <a:ext cx="3072384" cy="457200"/>
           </a:xfrm>
           <a:prstGeom prst="rect">
@@ -13560,7 +9867,7 @@
         </p:nvSpPr>
         <p:spPr>
           <a:xfrm>
-            <a:off x="365760" y="4343400"/>
+            <a:off x="393191" y="4902489"/>
             <a:ext cx="3108960" cy="502920"/>
           </a:xfrm>
           <a:prstGeom prst="rect">
@@ -13594,6 +9901,7 @@
           <a:lstStyle/>
           <a:p>
             <a:pPr algn="ctr"/>
+            <a:endParaRPr/>
           </a:p>
         </p:txBody>
       </p:sp>
@@ -13605,7 +9913,7 @@
         </p:nvSpPr>
         <p:spPr>
           <a:xfrm>
-            <a:off x="384048" y="4379976"/>
+            <a:off x="411479" y="4939065"/>
             <a:ext cx="3072384" cy="457200"/>
           </a:xfrm>
           <a:prstGeom prst="rect">
@@ -13639,7 +9947,7 @@
         </p:nvSpPr>
         <p:spPr>
           <a:xfrm>
-            <a:off x="3657600" y="2743200"/>
+            <a:off x="3511296" y="3063240"/>
             <a:ext cx="1188720" cy="731520"/>
           </a:xfrm>
           <a:prstGeom prst="rect">
@@ -13655,13 +9963,37 @@
           <a:p>
             <a:pPr algn="ctr"/>
             <a:r>
-              <a:rPr sz="1000" b="0" i="1">
+              <a:rPr sz="1000" b="0" i="1" dirty="0" err="1">
                 <a:solidFill>
                   <a:srgbClr val="167A4B"/>
                 </a:solidFill>
               </a:rPr>
-              <a:t>암호화
-TCP 세션 ×N</a:t>
+              <a:t>암호화</a:t>
+            </a:r>
+            <a:r>
+              <a:rPr sz="1000" b="0" i="1" dirty="0">
+                <a:solidFill>
+                  <a:srgbClr val="167A4B"/>
+                </a:solidFill>
+              </a:rPr>
+              <a:t>
+TCP </a:t>
+            </a:r>
+            <a:r>
+              <a:rPr sz="1000" b="0" i="1" dirty="0" err="1">
+                <a:solidFill>
+                  <a:srgbClr val="167A4B"/>
+                </a:solidFill>
+              </a:rPr>
+              <a:t>세션</a:t>
+            </a:r>
+            <a:r>
+              <a:rPr sz="1000" b="0" i="1" dirty="0">
+                <a:solidFill>
+                  <a:srgbClr val="167A4B"/>
+                </a:solidFill>
+              </a:rPr>
+              <a:t> ×N</a:t>
             </a:r>
           </a:p>
         </p:txBody>
@@ -13742,6 +10074,7 @@
           <a:lstStyle/>
           <a:p>
             <a:pPr algn="ctr"/>
+            <a:endParaRPr/>
           </a:p>
         </p:txBody>
       </p:sp>
@@ -13753,23 +10086,23 @@
         </p:nvSpPr>
         <p:spPr>
           <a:xfrm>
-            <a:off x="4572000" y="2834640"/>
-            <a:ext cx="1280160" cy="1097280"/>
-          </a:xfrm>
-          <a:prstGeom prst="rect">
-            <a:avLst/>
-          </a:prstGeom>
-          <a:noFill/>
-        </p:spPr>
-        <p:txBody>
-          <a:bodyPr wrap="square">
+            <a:off x="4572000" y="3152447"/>
+            <a:ext cx="1280160" cy="461665"/>
+          </a:xfrm>
+          <a:prstGeom prst="rect">
+            <a:avLst/>
+          </a:prstGeom>
+          <a:noFill/>
+        </p:spPr>
+        <p:txBody>
+          <a:bodyPr wrap="square" anchor="ctr">
             <a:spAutoFit/>
           </a:bodyPr>
           <a:lstStyle/>
           <a:p>
             <a:pPr algn="ctr"/>
             <a:r>
-              <a:rPr sz="1200" b="0" i="0">
+              <a:rPr sz="1200" b="0" i="0" dirty="0">
                 <a:solidFill>
                   <a:srgbClr val="888888"/>
                 </a:solidFill>
@@ -13856,6 +10189,7 @@
           <a:lstStyle/>
           <a:p>
             <a:pPr algn="ctr"/>
+            <a:endParaRPr/>
           </a:p>
         </p:txBody>
       </p:sp>
@@ -13936,6 +10270,7 @@
           <a:lstStyle/>
           <a:p>
             <a:pPr algn="ctr"/>
+            <a:endParaRPr/>
           </a:p>
         </p:txBody>
       </p:sp>
@@ -14016,6 +10351,7 @@
           <a:lstStyle/>
           <a:p>
             <a:pPr algn="ctr"/>
+            <a:endParaRPr/>
           </a:p>
         </p:txBody>
       </p:sp>
@@ -14096,6 +10432,7 @@
           <a:lstStyle/>
           <a:p>
             <a:pPr algn="ctr"/>
+            <a:endParaRPr/>
           </a:p>
         </p:txBody>
       </p:sp>
@@ -14176,6 +10513,7 @@
           <a:lstStyle/>
           <a:p>
             <a:pPr algn="ctr"/>
+            <a:endParaRPr/>
           </a:p>
         </p:txBody>
       </p:sp>
@@ -14256,6 +10594,7 @@
           <a:lstStyle/>
           <a:p>
             <a:pPr algn="ctr"/>
+            <a:endParaRPr/>
           </a:p>
         </p:txBody>
       </p:sp>
@@ -14372,7 +10711,7 @@
 </file>
 
 <file path=ppt/slides/slide6.xml><?xml version="1.0" encoding="utf-8"?>
-<p:sld xmlns:a="http://schemas.openxmlformats.org/drawingml/2006/main" xmlns:p="http://schemas.openxmlformats.org/presentationml/2006/main" xmlns:r="http://schemas.openxmlformats.org/officeDocument/2006/relationships">
+<p:sld xmlns:a="http://schemas.openxmlformats.org/drawingml/2006/main" xmlns:r="http://schemas.openxmlformats.org/officeDocument/2006/relationships" xmlns:p="http://schemas.openxmlformats.org/presentationml/2006/main">
   <p:cSld>
     <p:spTree>
       <p:nvGrpSpPr>
@@ -14380,7 +10719,14 @@
         <p:cNvGrpSpPr/>
         <p:nvPr/>
       </p:nvGrpSpPr>
-      <p:grpSpPr/>
+      <p:grpSpPr>
+        <a:xfrm>
+          <a:off x="0" y="0"/>
+          <a:ext cx="0" cy="0"/>
+          <a:chOff x="0" y="0"/>
+          <a:chExt cx="0" cy="0"/>
+        </a:xfrm>
+      </p:grpSpPr>
       <p:sp>
         <p:nvSpPr>
           <p:cNvPr id="2" name="Rectangle 1"/>
@@ -14421,6 +10767,7 @@
           <a:lstStyle/>
           <a:p>
             <a:pPr algn="ctr"/>
+            <a:endParaRPr/>
           </a:p>
         </p:txBody>
       </p:sp>
@@ -14464,6 +10811,7 @@
           <a:lstStyle/>
           <a:p>
             <a:pPr algn="ctr"/>
+            <a:endParaRPr/>
           </a:p>
         </p:txBody>
       </p:sp>
@@ -14507,6 +10855,7 @@
           <a:lstStyle/>
           <a:p>
             <a:pPr algn="ctr"/>
+            <a:endParaRPr/>
           </a:p>
         </p:txBody>
       </p:sp>
@@ -14618,6 +10967,7 @@
           <a:lstStyle/>
           <a:p>
             <a:pPr algn="ctr"/>
+            <a:endParaRPr/>
           </a:p>
         </p:txBody>
       </p:sp>
@@ -14663,6 +11013,7 @@
           <a:lstStyle/>
           <a:p>
             <a:pPr algn="ctr"/>
+            <a:endParaRPr/>
           </a:p>
         </p:txBody>
       </p:sp>
@@ -15014,6 +11365,7 @@
           <a:lstStyle/>
           <a:p>
             <a:pPr algn="ctr"/>
+            <a:endParaRPr/>
           </a:p>
         </p:txBody>
       </p:sp>
@@ -15366,7 +11718,7 @@
 </file>
 
 <file path=ppt/slides/slide7.xml><?xml version="1.0" encoding="utf-8"?>
-<p:sld xmlns:a="http://schemas.openxmlformats.org/drawingml/2006/main" xmlns:p="http://schemas.openxmlformats.org/presentationml/2006/main" xmlns:r="http://schemas.openxmlformats.org/officeDocument/2006/relationships">
+<p:sld xmlns:a="http://schemas.openxmlformats.org/drawingml/2006/main" xmlns:r="http://schemas.openxmlformats.org/officeDocument/2006/relationships" xmlns:p="http://schemas.openxmlformats.org/presentationml/2006/main">
   <p:cSld>
     <p:spTree>
       <p:nvGrpSpPr>
@@ -15374,7 +11726,14 @@
         <p:cNvGrpSpPr/>
         <p:nvPr/>
       </p:nvGrpSpPr>
-      <p:grpSpPr/>
+      <p:grpSpPr>
+        <a:xfrm>
+          <a:off x="0" y="0"/>
+          <a:ext cx="0" cy="0"/>
+          <a:chOff x="0" y="0"/>
+          <a:chExt cx="0" cy="0"/>
+        </a:xfrm>
+      </p:grpSpPr>
       <p:sp>
         <p:nvSpPr>
           <p:cNvPr id="2" name="Rectangle 1"/>
@@ -15415,6 +11774,7 @@
           <a:lstStyle/>
           <a:p>
             <a:pPr algn="ctr"/>
+            <a:endParaRPr/>
           </a:p>
         </p:txBody>
       </p:sp>
@@ -15458,6 +11818,7 @@
           <a:lstStyle/>
           <a:p>
             <a:pPr algn="ctr"/>
+            <a:endParaRPr/>
           </a:p>
         </p:txBody>
       </p:sp>
@@ -15501,6 +11862,7 @@
           <a:lstStyle/>
           <a:p>
             <a:pPr algn="ctr"/>
+            <a:endParaRPr/>
           </a:p>
         </p:txBody>
       </p:sp>
@@ -15612,6 +11974,7 @@
           <a:lstStyle/>
           <a:p>
             <a:pPr algn="ctr"/>
+            <a:endParaRPr/>
           </a:p>
         </p:txBody>
       </p:sp>
@@ -15657,6 +12020,7 @@
           <a:lstStyle/>
           <a:p>
             <a:pPr algn="ctr"/>
+            <a:endParaRPr/>
           </a:p>
         </p:txBody>
       </p:sp>
@@ -16008,6 +12372,7 @@
           <a:lstStyle/>
           <a:p>
             <a:pPr algn="ctr"/>
+            <a:endParaRPr/>
           </a:p>
         </p:txBody>
       </p:sp>
@@ -16190,28 +12555,89 @@
         <p:spPr>
           <a:xfrm>
             <a:off x="6108192" y="3154679"/>
-            <a:ext cx="5669280" cy="347472"/>
-          </a:xfrm>
-          <a:prstGeom prst="rect">
-            <a:avLst/>
-          </a:prstGeom>
-          <a:noFill/>
-        </p:spPr>
-        <p:txBody>
-          <a:bodyPr wrap="square">
-            <a:spAutoFit/>
-          </a:bodyPr>
-          <a:lstStyle/>
-          <a:p>
-            <a:pPr algn="l"/>
-            <a:r>
-              <a:rPr sz="1250" b="0" i="0">
-                <a:solidFill>
-                  <a:srgbClr val="1A1A1A"/>
-                </a:solidFill>
-              </a:rPr>
-              <a:t>  ▪ 폼 팩터 옵션 C: PCB 인라인 어댑터</a:t>
-            </a:r>
+            <a:ext cx="5669280" cy="284693"/>
+          </a:xfrm>
+          <a:prstGeom prst="rect">
+            <a:avLst/>
+          </a:prstGeom>
+          <a:noFill/>
+        </p:spPr>
+        <p:txBody>
+          <a:bodyPr wrap="square">
+            <a:spAutoFit/>
+          </a:bodyPr>
+          <a:lstStyle/>
+          <a:p>
+            <a:pPr algn="l"/>
+            <a:r>
+              <a:rPr sz="1250" b="0" i="0" dirty="0">
+                <a:solidFill>
+                  <a:srgbClr val="FF0000"/>
+                </a:solidFill>
+              </a:rPr>
+              <a:t>  ▪ 폼 </a:t>
+            </a:r>
+            <a:r>
+              <a:rPr sz="1250" b="0" i="0" dirty="0" err="1">
+                <a:solidFill>
+                  <a:srgbClr val="FF0000"/>
+                </a:solidFill>
+              </a:rPr>
+              <a:t>팩터</a:t>
+            </a:r>
+            <a:r>
+              <a:rPr sz="1250" b="0" i="0" dirty="0">
+                <a:solidFill>
+                  <a:srgbClr val="FF0000"/>
+                </a:solidFill>
+              </a:rPr>
+              <a:t> </a:t>
+            </a:r>
+            <a:r>
+              <a:rPr sz="1250" b="0" i="0" dirty="0" err="1">
+                <a:solidFill>
+                  <a:srgbClr val="FF0000"/>
+                </a:solidFill>
+              </a:rPr>
+              <a:t>옵션</a:t>
+            </a:r>
+            <a:r>
+              <a:rPr sz="1250" b="0" i="0" dirty="0">
+                <a:solidFill>
+                  <a:srgbClr val="FF0000"/>
+                </a:solidFill>
+              </a:rPr>
+              <a:t> C: PCB </a:t>
+            </a:r>
+            <a:r>
+              <a:rPr sz="1250" b="0" i="0" dirty="0" err="1">
+                <a:solidFill>
+                  <a:srgbClr val="FF0000"/>
+                </a:solidFill>
+              </a:rPr>
+              <a:t>인라인</a:t>
+            </a:r>
+            <a:r>
+              <a:rPr sz="1250" b="0" i="0" dirty="0">
+                <a:solidFill>
+                  <a:srgbClr val="FF0000"/>
+                </a:solidFill>
+              </a:rPr>
+              <a:t> </a:t>
+            </a:r>
+            <a:r>
+              <a:rPr sz="1250" b="0" i="0" dirty="0" err="1">
+                <a:solidFill>
+                  <a:srgbClr val="FF0000"/>
+                </a:solidFill>
+              </a:rPr>
+              <a:t>어댑터</a:t>
+            </a:r>
+            <a:endParaRPr sz="1250" b="0" i="0" dirty="0">
+              <a:solidFill>
+                <a:srgbClr val="FF0000"/>
+              </a:solidFill>
+            </a:endParaRPr>
           </a:p>
         </p:txBody>
       </p:sp>
@@ -16224,28 +12650,89 @@
         <p:spPr>
           <a:xfrm>
             <a:off x="6108192" y="3483863"/>
-            <a:ext cx="5669280" cy="347472"/>
-          </a:xfrm>
-          <a:prstGeom prst="rect">
-            <a:avLst/>
-          </a:prstGeom>
-          <a:noFill/>
-        </p:spPr>
-        <p:txBody>
-          <a:bodyPr wrap="square">
-            <a:spAutoFit/>
-          </a:bodyPr>
-          <a:lstStyle/>
-          <a:p>
-            <a:pPr algn="l"/>
-            <a:r>
-              <a:rPr sz="1200" b="0" i="0">
-                <a:solidFill>
-                  <a:srgbClr val="888888"/>
-                </a:solidFill>
-              </a:rPr>
-              <a:t>    – 디바이스 PCB에 직접 장착</a:t>
-            </a:r>
+            <a:ext cx="5669280" cy="276999"/>
+          </a:xfrm>
+          <a:prstGeom prst="rect">
+            <a:avLst/>
+          </a:prstGeom>
+          <a:noFill/>
+        </p:spPr>
+        <p:txBody>
+          <a:bodyPr wrap="square">
+            <a:spAutoFit/>
+          </a:bodyPr>
+          <a:lstStyle/>
+          <a:p>
+            <a:pPr algn="l"/>
+            <a:r>
+              <a:rPr sz="1200" b="0" i="0" dirty="0">
+                <a:solidFill>
+                  <a:srgbClr val="0070C0"/>
+                </a:solidFill>
+              </a:rPr>
+              <a:t>    – </a:t>
+            </a:r>
+            <a:r>
+              <a:rPr sz="1200" b="0" i="0" dirty="0" err="1">
+                <a:solidFill>
+                  <a:srgbClr val="0070C0"/>
+                </a:solidFill>
+              </a:rPr>
+              <a:t>디바이스</a:t>
+            </a:r>
+            <a:r>
+              <a:rPr sz="1200" b="0" i="0" dirty="0">
+                <a:solidFill>
+                  <a:srgbClr val="0070C0"/>
+                </a:solidFill>
+              </a:rPr>
+              <a:t> </a:t>
+            </a:r>
+            <a:r>
+              <a:rPr sz="1200" b="0" i="0" dirty="0" err="1">
+                <a:solidFill>
+                  <a:srgbClr val="0070C0"/>
+                </a:solidFill>
+              </a:rPr>
+              <a:t>PCB에</a:t>
+            </a:r>
+            <a:r>
+              <a:rPr sz="1200" b="0" i="0" dirty="0">
+                <a:solidFill>
+                  <a:srgbClr val="0070C0"/>
+                </a:solidFill>
+              </a:rPr>
+              <a:t> </a:t>
+            </a:r>
+            <a:r>
+              <a:rPr sz="1200" b="0" i="0" dirty="0" err="1">
+                <a:solidFill>
+                  <a:srgbClr val="0070C0"/>
+                </a:solidFill>
+              </a:rPr>
+              <a:t>직접</a:t>
+            </a:r>
+            <a:r>
+              <a:rPr sz="1200" b="0" i="0" dirty="0">
+                <a:solidFill>
+                  <a:srgbClr val="0070C0"/>
+                </a:solidFill>
+              </a:rPr>
+              <a:t> </a:t>
+            </a:r>
+            <a:r>
+              <a:rPr sz="1200" b="0" i="0" dirty="0" err="1">
+                <a:solidFill>
+                  <a:srgbClr val="0070C0"/>
+                </a:solidFill>
+              </a:rPr>
+              <a:t>장착</a:t>
+            </a:r>
+            <a:endParaRPr sz="1200" b="0" i="0" dirty="0">
+              <a:solidFill>
+                <a:srgbClr val="0070C0"/>
+              </a:solidFill>
+            </a:endParaRPr>
           </a:p>
         </p:txBody>
       </p:sp>
@@ -16325,6 +12812,7 @@
           <a:lstStyle/>
           <a:p>
             <a:pPr algn="ctr"/>
+            <a:endParaRPr/>
           </a:p>
         </p:txBody>
       </p:sp>
@@ -16371,7 +12859,7 @@
 </file>
 
 <file path=ppt/slides/slide8.xml><?xml version="1.0" encoding="utf-8"?>
-<p:sld xmlns:a="http://schemas.openxmlformats.org/drawingml/2006/main" xmlns:p="http://schemas.openxmlformats.org/presentationml/2006/main" xmlns:r="http://schemas.openxmlformats.org/officeDocument/2006/relationships">
+<p:sld xmlns:a="http://schemas.openxmlformats.org/drawingml/2006/main" xmlns:r="http://schemas.openxmlformats.org/officeDocument/2006/relationships" xmlns:p="http://schemas.openxmlformats.org/presentationml/2006/main">
   <p:cSld>
     <p:spTree>
       <p:nvGrpSpPr>
@@ -16379,7 +12867,14 @@
         <p:cNvGrpSpPr/>
         <p:nvPr/>
       </p:nvGrpSpPr>
-      <p:grpSpPr/>
+      <p:grpSpPr>
+        <a:xfrm>
+          <a:off x="0" y="0"/>
+          <a:ext cx="0" cy="0"/>
+          <a:chOff x="0" y="0"/>
+          <a:chExt cx="0" cy="0"/>
+        </a:xfrm>
+      </p:grpSpPr>
       <p:sp>
         <p:nvSpPr>
           <p:cNvPr id="2" name="Rectangle 1"/>
@@ -16420,6 +12915,7 @@
           <a:lstStyle/>
           <a:p>
             <a:pPr algn="ctr"/>
+            <a:endParaRPr/>
           </a:p>
         </p:txBody>
       </p:sp>
@@ -16463,6 +12959,7 @@
           <a:lstStyle/>
           <a:p>
             <a:pPr algn="ctr"/>
+            <a:endParaRPr/>
           </a:p>
         </p:txBody>
       </p:sp>
@@ -16506,6 +13003,7 @@
           <a:lstStyle/>
           <a:p>
             <a:pPr algn="ctr"/>
+            <a:endParaRPr/>
           </a:p>
         </p:txBody>
       </p:sp>
@@ -16617,6 +13115,7 @@
           <a:lstStyle/>
           <a:p>
             <a:pPr algn="ctr"/>
+            <a:endParaRPr/>
           </a:p>
         </p:txBody>
       </p:sp>
@@ -16662,6 +13161,7 @@
           <a:lstStyle/>
           <a:p>
             <a:pPr algn="ctr"/>
+            <a:endParaRPr/>
           </a:p>
         </p:txBody>
       </p:sp>
@@ -16775,6 +13275,7 @@
           <a:lstStyle/>
           <a:p>
             <a:pPr algn="ctr"/>
+            <a:endParaRPr/>
           </a:p>
         </p:txBody>
       </p:sp>
@@ -16888,6 +13389,7 @@
           <a:lstStyle/>
           <a:p>
             <a:pPr algn="ctr"/>
+            <a:endParaRPr/>
           </a:p>
         </p:txBody>
       </p:sp>
@@ -17001,6 +13503,7 @@
           <a:lstStyle/>
           <a:p>
             <a:pPr algn="ctr"/>
+            <a:endParaRPr/>
           </a:p>
         </p:txBody>
       </p:sp>
@@ -17114,6 +13617,7 @@
           <a:lstStyle/>
           <a:p>
             <a:pPr algn="ctr"/>
+            <a:endParaRPr/>
           </a:p>
         </p:txBody>
       </p:sp>
@@ -17227,6 +13731,7 @@
           <a:lstStyle/>
           <a:p>
             <a:pPr algn="ctr"/>
+            <a:endParaRPr/>
           </a:p>
         </p:txBody>
       </p:sp>
@@ -17340,6 +13845,7 @@
           <a:lstStyle/>
           <a:p>
             <a:pPr algn="ctr"/>
+            <a:endParaRPr/>
           </a:p>
         </p:txBody>
       </p:sp>
@@ -17453,6 +13959,7 @@
           <a:lstStyle/>
           <a:p>
             <a:pPr algn="ctr"/>
+            <a:endParaRPr/>
           </a:p>
         </p:txBody>
       </p:sp>
@@ -17566,6 +14073,7 @@
           <a:lstStyle/>
           <a:p>
             <a:pPr algn="ctr"/>
+            <a:endParaRPr/>
           </a:p>
         </p:txBody>
       </p:sp>
@@ -17612,7 +14120,7 @@
 </file>
 
 <file path=ppt/slides/slide9.xml><?xml version="1.0" encoding="utf-8"?>
-<p:sld xmlns:a="http://schemas.openxmlformats.org/drawingml/2006/main" xmlns:p="http://schemas.openxmlformats.org/presentationml/2006/main" xmlns:r="http://schemas.openxmlformats.org/officeDocument/2006/relationships">
+<p:sld xmlns:a="http://schemas.openxmlformats.org/drawingml/2006/main" xmlns:r="http://schemas.openxmlformats.org/officeDocument/2006/relationships" xmlns:p="http://schemas.openxmlformats.org/presentationml/2006/main">
   <p:cSld>
     <p:spTree>
       <p:nvGrpSpPr>
@@ -17620,7 +14128,14 @@
         <p:cNvGrpSpPr/>
         <p:nvPr/>
       </p:nvGrpSpPr>
-      <p:grpSpPr/>
+      <p:grpSpPr>
+        <a:xfrm>
+          <a:off x="0" y="0"/>
+          <a:ext cx="0" cy="0"/>
+          <a:chOff x="0" y="0"/>
+          <a:chExt cx="0" cy="0"/>
+        </a:xfrm>
+      </p:grpSpPr>
       <p:sp>
         <p:nvSpPr>
           <p:cNvPr id="2" name="Rectangle 1"/>
@@ -17661,6 +14176,7 @@
           <a:lstStyle/>
           <a:p>
             <a:pPr algn="ctr"/>
+            <a:endParaRPr/>
           </a:p>
         </p:txBody>
       </p:sp>
@@ -17704,6 +14220,7 @@
           <a:lstStyle/>
           <a:p>
             <a:pPr algn="ctr"/>
+            <a:endParaRPr/>
           </a:p>
         </p:txBody>
       </p:sp>
@@ -17747,6 +14264,7 @@
           <a:lstStyle/>
           <a:p>
             <a:pPr algn="ctr"/>
+            <a:endParaRPr/>
           </a:p>
         </p:txBody>
       </p:sp>
@@ -17858,6 +14376,7 @@
           <a:lstStyle/>
           <a:p>
             <a:pPr algn="ctr"/>
+            <a:endParaRPr/>
           </a:p>
         </p:txBody>
       </p:sp>
@@ -17903,6 +14422,7 @@
           <a:lstStyle/>
           <a:p>
             <a:pPr algn="ctr"/>
+            <a:endParaRPr/>
           </a:p>
         </p:txBody>
       </p:sp>
@@ -18288,6 +14808,7 @@
           <a:lstStyle/>
           <a:p>
             <a:pPr algn="ctr"/>
+            <a:endParaRPr/>
           </a:p>
         </p:txBody>
       </p:sp>
